--- a/output_pptx/Thank_You_Jesus_For_The_Blood.pptx
+++ b/output_pptx/Thank_You_Jesus_For_The_Blood.pptx
@@ -27,6 +27,14 @@
     <p:sldId id="275" r:id="rId26"/>
     <p:sldId id="276" r:id="rId27"/>
     <p:sldId id="277" r:id="rId28"/>
+    <p:sldId id="278" r:id="rId29"/>
+    <p:sldId id="279" r:id="rId30"/>
+    <p:sldId id="280" r:id="rId31"/>
+    <p:sldId id="281" r:id="rId32"/>
+    <p:sldId id="282" r:id="rId33"/>
+    <p:sldId id="283" r:id="rId34"/>
+    <p:sldId id="284" r:id="rId35"/>
+    <p:sldId id="285" r:id="rId36"/>
   </p:sldIdLst>
   <p:sldSz cx="12191695" cy="6858000" type="screen4x3"/>
   <p:notesSz cx="6858000" cy="9144000"/>
@@ -3125,23 +3133,23 @@
         </p:nvSpPr>
         <p:spPr>
           <a:xfrm>
-            <a:off x="594360" y="2258568"/>
-            <a:ext cx="11002975" cy="685800"/>
-          </a:xfrm>
-          <a:prstGeom prst="rect">
-            <a:avLst/>
-          </a:prstGeom>
-          <a:noFill/>
-        </p:spPr>
-        <p:txBody>
-          <a:bodyPr wrap="square">
-            <a:spAutoFit/>
-          </a:bodyPr>
-          <a:lstStyle/>
-          <a:p>
-            <a:pPr algn="ctr"/>
-            <a:r>
-              <a:rPr sz="4400" b="1" i="0">
+            <a:off x="640080" y="2052828"/>
+            <a:ext cx="10911535" cy="731520"/>
+          </a:xfrm>
+          <a:prstGeom prst="rect">
+            <a:avLst/>
+          </a:prstGeom>
+          <a:noFill/>
+        </p:spPr>
+        <p:txBody>
+          <a:bodyPr wrap="square">
+            <a:spAutoFit/>
+          </a:bodyPr>
+          <a:lstStyle/>
+          <a:p>
+            <a:pPr algn="ctr"/>
+            <a:r>
+              <a:rPr sz="4800" b="1" i="0">
                 <a:solidFill>
                   <a:srgbClr val="FFFFFF"/>
                 </a:solidFill>
@@ -3160,99 +3168,29 @@
         </p:nvSpPr>
         <p:spPr>
           <a:xfrm>
-            <a:off x="594360" y="2980944"/>
-            <a:ext cx="11002975" cy="347472"/>
-          </a:xfrm>
-          <a:prstGeom prst="rect">
-            <a:avLst/>
-          </a:prstGeom>
-          <a:noFill/>
-        </p:spPr>
-        <p:txBody>
-          <a:bodyPr wrap="square">
-            <a:spAutoFit/>
-          </a:bodyPr>
-          <a:lstStyle/>
-          <a:p>
-            <a:pPr algn="ctr"/>
-            <a:r>
-              <a:rPr sz="2200" b="0" i="1">
-                <a:solidFill>
-                  <a:srgbClr val="8C8C8C"/>
-                </a:solidFill>
-                <a:latin typeface="Arial"/>
-              </a:rPr>
-              <a:t/>
-            </a:r>
-          </a:p>
-        </p:txBody>
-      </p:sp>
-      <p:sp>
-        <p:nvSpPr>
-          <p:cNvPr id="4" name="TextBox 3"/>
-          <p:cNvSpPr txBox="1"/>
-          <p:nvPr/>
-        </p:nvSpPr>
-        <p:spPr>
-          <a:xfrm>
-            <a:off x="594360" y="3529584"/>
-            <a:ext cx="11002975" cy="685800"/>
-          </a:xfrm>
-          <a:prstGeom prst="rect">
-            <a:avLst/>
-          </a:prstGeom>
-          <a:noFill/>
-        </p:spPr>
-        <p:txBody>
-          <a:bodyPr wrap="square">
-            <a:spAutoFit/>
-          </a:bodyPr>
-          <a:lstStyle/>
-          <a:p>
-            <a:pPr algn="ctr"/>
-            <a:r>
-              <a:rPr sz="4400" b="1" i="0">
+            <a:off x="640080" y="2985516"/>
+            <a:ext cx="10911535" cy="731520"/>
+          </a:xfrm>
+          <a:prstGeom prst="rect">
+            <a:avLst/>
+          </a:prstGeom>
+          <a:noFill/>
+        </p:spPr>
+        <p:txBody>
+          <a:bodyPr wrap="square">
+            <a:spAutoFit/>
+          </a:bodyPr>
+          <a:lstStyle/>
+          <a:p>
+            <a:pPr algn="ctr"/>
+            <a:r>
+              <a:rPr sz="4800" b="1" i="0">
                 <a:solidFill>
                   <a:srgbClr val="FFFFFF"/>
                 </a:solidFill>
                 <a:latin typeface="Arial"/>
               </a:rPr>
               <a:t>Eu lembro quem eu era</a:t>
-            </a:r>
-          </a:p>
-        </p:txBody>
-      </p:sp>
-      <p:sp>
-        <p:nvSpPr>
-          <p:cNvPr id="5" name="TextBox 4"/>
-          <p:cNvSpPr txBox="1"/>
-          <p:nvPr/>
-        </p:nvSpPr>
-        <p:spPr>
-          <a:xfrm>
-            <a:off x="594360" y="4251960"/>
-            <a:ext cx="11002975" cy="347472"/>
-          </a:xfrm>
-          <a:prstGeom prst="rect">
-            <a:avLst/>
-          </a:prstGeom>
-          <a:noFill/>
-        </p:spPr>
-        <p:txBody>
-          <a:bodyPr wrap="square">
-            <a:spAutoFit/>
-          </a:bodyPr>
-          <a:lstStyle/>
-          <a:p>
-            <a:pPr algn="ctr"/>
-            <a:r>
-              <a:rPr sz="2200" b="0" i="1">
-                <a:solidFill>
-                  <a:srgbClr val="8C8C8C"/>
-                </a:solidFill>
-                <a:latin typeface="Arial"/>
-              </a:rPr>
-              <a:t/>
             </a:r>
           </a:p>
         </p:txBody>
@@ -3291,29 +3229,29 @@
         </p:nvSpPr>
         <p:spPr>
           <a:xfrm>
-            <a:off x="594360" y="2258568"/>
-            <a:ext cx="11002975" cy="685800"/>
-          </a:xfrm>
-          <a:prstGeom prst="rect">
-            <a:avLst/>
-          </a:prstGeom>
-          <a:noFill/>
-        </p:spPr>
-        <p:txBody>
-          <a:bodyPr wrap="square">
-            <a:spAutoFit/>
-          </a:bodyPr>
-          <a:lstStyle/>
-          <a:p>
-            <a:pPr algn="ctr"/>
-            <a:r>
-              <a:rPr sz="4400" b="1" i="0">
+            <a:off x="640080" y="1650492"/>
+            <a:ext cx="10911535" cy="731520"/>
+          </a:xfrm>
+          <a:prstGeom prst="rect">
+            <a:avLst/>
+          </a:prstGeom>
+          <a:noFill/>
+        </p:spPr>
+        <p:txBody>
+          <a:bodyPr wrap="square">
+            <a:spAutoFit/>
+          </a:bodyPr>
+          <a:lstStyle/>
+          <a:p>
+            <a:pPr algn="ctr"/>
+            <a:r>
+              <a:rPr sz="4800" b="1" i="0">
                 <a:solidFill>
                   <a:srgbClr val="FFFFFF"/>
                 </a:solidFill>
                 <a:latin typeface="Arial"/>
               </a:rPr>
-              <a:t>Atravessaste o grande separador</a:t>
+              <a:t>私の   罪の代わりに</a:t>
             </a:r>
           </a:p>
         </p:txBody>
@@ -3326,29 +3264,29 @@
         </p:nvSpPr>
         <p:spPr>
           <a:xfrm>
-            <a:off x="594360" y="2980944"/>
-            <a:ext cx="11002975" cy="347472"/>
-          </a:xfrm>
-          <a:prstGeom prst="rect">
-            <a:avLst/>
-          </a:prstGeom>
-          <a:noFill/>
-        </p:spPr>
-        <p:txBody>
-          <a:bodyPr wrap="square">
-            <a:spAutoFit/>
-          </a:bodyPr>
-          <a:lstStyle/>
-          <a:p>
-            <a:pPr algn="ctr"/>
-            <a:r>
-              <a:rPr sz="2200" b="0" i="1">
-                <a:solidFill>
-                  <a:srgbClr val="8C8C8C"/>
-                </a:solidFill>
-                <a:latin typeface="Arial"/>
-              </a:rPr>
-              <a:t/>
+            <a:off x="640080" y="2418588"/>
+            <a:ext cx="10911535" cy="365760"/>
+          </a:xfrm>
+          <a:prstGeom prst="rect">
+            <a:avLst/>
+          </a:prstGeom>
+          <a:noFill/>
+        </p:spPr>
+        <p:txBody>
+          <a:bodyPr wrap="square">
+            <a:spAutoFit/>
+          </a:bodyPr>
+          <a:lstStyle/>
+          <a:p>
+            <a:pPr algn="ctr"/>
+            <a:r>
+              <a:rPr sz="2400" b="0" i="1">
+                <a:solidFill>
+                  <a:srgbClr val="AAAAAA"/>
+                </a:solidFill>
+                <a:latin typeface="Arial"/>
+              </a:rPr>
+              <a:t>watashi no tsumi no kawari ni</a:t>
             </a:r>
           </a:p>
         </p:txBody>
@@ -3361,29 +3299,29 @@
         </p:nvSpPr>
         <p:spPr>
           <a:xfrm>
-            <a:off x="594360" y="3529584"/>
-            <a:ext cx="11002975" cy="685800"/>
-          </a:xfrm>
-          <a:prstGeom prst="rect">
-            <a:avLst/>
-          </a:prstGeom>
-          <a:noFill/>
-        </p:spPr>
-        <p:txBody>
-          <a:bodyPr wrap="square">
-            <a:spAutoFit/>
-          </a:bodyPr>
-          <a:lstStyle/>
-          <a:p>
-            <a:pPr algn="ctr"/>
-            <a:r>
-              <a:rPr sz="4400" b="1" i="0">
+            <a:off x="640080" y="2985516"/>
+            <a:ext cx="10911535" cy="731520"/>
+          </a:xfrm>
+          <a:prstGeom prst="rect">
+            <a:avLst/>
+          </a:prstGeom>
+          <a:noFill/>
+        </p:spPr>
+        <p:txBody>
+          <a:bodyPr wrap="square">
+            <a:spAutoFit/>
+          </a:bodyPr>
+          <a:lstStyle/>
+          <a:p>
+            <a:pPr algn="ctr"/>
+            <a:r>
+              <a:rPr sz="4800" b="1" i="0">
                 <a:solidFill>
                   <a:srgbClr val="FFFFFF"/>
                 </a:solidFill>
                 <a:latin typeface="Arial"/>
               </a:rPr>
-              <a:t>O trono celestial</a:t>
+              <a:t>墓に葬られて</a:t>
             </a:r>
           </a:p>
         </p:txBody>
@@ -3396,29 +3334,99 @@
         </p:nvSpPr>
         <p:spPr>
           <a:xfrm>
-            <a:off x="594360" y="4251960"/>
-            <a:ext cx="11002975" cy="347472"/>
-          </a:xfrm>
-          <a:prstGeom prst="rect">
-            <a:avLst/>
-          </a:prstGeom>
-          <a:noFill/>
-        </p:spPr>
-        <p:txBody>
-          <a:bodyPr wrap="square">
-            <a:spAutoFit/>
-          </a:bodyPr>
-          <a:lstStyle/>
-          <a:p>
-            <a:pPr algn="ctr"/>
-            <a:r>
-              <a:rPr sz="2200" b="0" i="1">
-                <a:solidFill>
-                  <a:srgbClr val="8C8C8C"/>
-                </a:solidFill>
-                <a:latin typeface="Arial"/>
-              </a:rPr>
-              <a:t/>
+            <a:off x="640080" y="3753612"/>
+            <a:ext cx="10911535" cy="365760"/>
+          </a:xfrm>
+          <a:prstGeom prst="rect">
+            <a:avLst/>
+          </a:prstGeom>
+          <a:noFill/>
+        </p:spPr>
+        <p:txBody>
+          <a:bodyPr wrap="square">
+            <a:spAutoFit/>
+          </a:bodyPr>
+          <a:lstStyle/>
+          <a:p>
+            <a:pPr algn="ctr"/>
+            <a:r>
+              <a:rPr sz="2400" b="0" i="1">
+                <a:solidFill>
+                  <a:srgbClr val="AAAAAA"/>
+                </a:solidFill>
+                <a:latin typeface="Arial"/>
+              </a:rPr>
+              <a:t>haka ni houmurarete</a:t>
+            </a:r>
+          </a:p>
+        </p:txBody>
+      </p:sp>
+      <p:sp>
+        <p:nvSpPr>
+          <p:cNvPr id="6" name="TextBox 5"/>
+          <p:cNvSpPr txBox="1"/>
+          <p:nvPr/>
+        </p:nvSpPr>
+        <p:spPr>
+          <a:xfrm>
+            <a:off x="640080" y="4530852"/>
+            <a:ext cx="10911535" cy="310896"/>
+          </a:xfrm>
+          <a:prstGeom prst="rect">
+            <a:avLst/>
+          </a:prstGeom>
+          <a:noFill/>
+        </p:spPr>
+        <p:txBody>
+          <a:bodyPr wrap="square">
+            <a:spAutoFit/>
+          </a:bodyPr>
+          <a:lstStyle/>
+          <a:p>
+            <a:pPr algn="ctr"/>
+            <a:r>
+              <a:rPr sz="2000" b="0" i="1">
+                <a:solidFill>
+                  <a:srgbClr val="828282"/>
+                </a:solidFill>
+                <a:latin typeface="Arial"/>
+              </a:rPr>
+              <a:t>Tu me mantiveste no Teu olhar</a:t>
+            </a:r>
+          </a:p>
+        </p:txBody>
+      </p:sp>
+      <p:sp>
+        <p:nvSpPr>
+          <p:cNvPr id="7" name="TextBox 6"/>
+          <p:cNvSpPr txBox="1"/>
+          <p:nvPr/>
+        </p:nvSpPr>
+        <p:spPr>
+          <a:xfrm>
+            <a:off x="640080" y="4896612"/>
+            <a:ext cx="10911535" cy="310896"/>
+          </a:xfrm>
+          <a:prstGeom prst="rect">
+            <a:avLst/>
+          </a:prstGeom>
+          <a:noFill/>
+        </p:spPr>
+        <p:txBody>
+          <a:bodyPr wrap="square">
+            <a:spAutoFit/>
+          </a:bodyPr>
+          <a:lstStyle/>
+          <a:p>
+            <a:pPr algn="ctr"/>
+            <a:r>
+              <a:rPr sz="2000" b="0" i="1">
+                <a:solidFill>
+                  <a:srgbClr val="828282"/>
+                </a:solidFill>
+                <a:latin typeface="Arial"/>
+              </a:rPr>
+              <a:t>E abriste um caminho</a:t>
             </a:r>
           </a:p>
         </p:txBody>
@@ -3457,29 +3465,29 @@
         </p:nvSpPr>
         <p:spPr>
           <a:xfrm>
-            <a:off x="594360" y="2258568"/>
-            <a:ext cx="11002975" cy="685800"/>
-          </a:xfrm>
-          <a:prstGeom prst="rect">
-            <a:avLst/>
-          </a:prstGeom>
-          <a:noFill/>
-        </p:spPr>
-        <p:txBody>
-          <a:bodyPr wrap="square">
-            <a:spAutoFit/>
-          </a:bodyPr>
-          <a:lstStyle/>
-          <a:p>
-            <a:pPr algn="ctr"/>
-            <a:r>
-              <a:rPr sz="4400" b="1" i="0">
+            <a:off x="640080" y="1650492"/>
+            <a:ext cx="10911535" cy="731520"/>
+          </a:xfrm>
+          <a:prstGeom prst="rect">
+            <a:avLst/>
+          </a:prstGeom>
+          <a:noFill/>
+        </p:spPr>
+        <p:txBody>
+          <a:bodyPr wrap="square">
+            <a:spAutoFit/>
+          </a:bodyPr>
+          <a:lstStyle/>
+          <a:p>
+            <a:pPr algn="ctr"/>
+            <a:r>
+              <a:rPr sz="4800" b="1" i="0">
                 <a:solidFill>
                   <a:srgbClr val="FFFFFF"/>
                 </a:solidFill>
                 <a:latin typeface="Arial"/>
               </a:rPr>
-              <a:t>E ali na cruz</a:t>
+              <a:t>蘇られた</a:t>
             </a:r>
           </a:p>
         </p:txBody>
@@ -3492,29 +3500,29 @@
         </p:nvSpPr>
         <p:spPr>
           <a:xfrm>
-            <a:off x="594360" y="2980944"/>
-            <a:ext cx="11002975" cy="347472"/>
-          </a:xfrm>
-          <a:prstGeom prst="rect">
-            <a:avLst/>
-          </a:prstGeom>
-          <a:noFill/>
-        </p:spPr>
-        <p:txBody>
-          <a:bodyPr wrap="square">
-            <a:spAutoFit/>
-          </a:bodyPr>
-          <a:lstStyle/>
-          <a:p>
-            <a:pPr algn="ctr"/>
-            <a:r>
-              <a:rPr sz="2200" b="0" i="1">
-                <a:solidFill>
-                  <a:srgbClr val="8C8C8C"/>
-                </a:solidFill>
-                <a:latin typeface="Arial"/>
-              </a:rPr>
-              <a:t/>
+            <a:off x="640080" y="2418588"/>
+            <a:ext cx="10911535" cy="365760"/>
+          </a:xfrm>
+          <a:prstGeom prst="rect">
+            <a:avLst/>
+          </a:prstGeom>
+          <a:noFill/>
+        </p:spPr>
+        <p:txBody>
+          <a:bodyPr wrap="square">
+            <a:spAutoFit/>
+          </a:bodyPr>
+          <a:lstStyle/>
+          <a:p>
+            <a:pPr algn="ctr"/>
+            <a:r>
+              <a:rPr sz="2400" b="0" i="1">
+                <a:solidFill>
+                  <a:srgbClr val="AAAAAA"/>
+                </a:solidFill>
+                <a:latin typeface="Arial"/>
+              </a:rPr>
+              <a:t>yomigaerareta</a:t>
             </a:r>
           </a:p>
         </p:txBody>
@@ -3527,29 +3535,29 @@
         </p:nvSpPr>
         <p:spPr>
           <a:xfrm>
-            <a:off x="594360" y="3529584"/>
-            <a:ext cx="11002975" cy="685800"/>
-          </a:xfrm>
-          <a:prstGeom prst="rect">
-            <a:avLst/>
-          </a:prstGeom>
-          <a:noFill/>
-        </p:spPr>
-        <p:txBody>
-          <a:bodyPr wrap="square">
-            <a:spAutoFit/>
-          </a:bodyPr>
-          <a:lstStyle/>
-          <a:p>
-            <a:pPr algn="ctr"/>
-            <a:r>
-              <a:rPr sz="4400" b="1" i="0">
+            <a:off x="640080" y="2985516"/>
+            <a:ext cx="10911535" cy="731520"/>
+          </a:xfrm>
+          <a:prstGeom prst="rect">
+            <a:avLst/>
+          </a:prstGeom>
+          <a:noFill/>
+        </p:spPr>
+        <p:txBody>
+          <a:bodyPr wrap="square">
+            <a:spAutoFit/>
+          </a:bodyPr>
+          <a:lstStyle/>
+          <a:p>
+            <a:pPr algn="ctr"/>
+            <a:r>
+              <a:rPr sz="4800" b="1" i="0">
                 <a:solidFill>
                   <a:srgbClr val="FFFFFF"/>
                 </a:solidFill>
                 <a:latin typeface="Arial"/>
               </a:rPr>
-              <a:t>Pagaste a dívida que eu devia</a:t>
+              <a:t>だから罪の   とげはもう無い</a:t>
             </a:r>
           </a:p>
         </p:txBody>
@@ -3562,29 +3570,99 @@
         </p:nvSpPr>
         <p:spPr>
           <a:xfrm>
-            <a:off x="594360" y="4251960"/>
-            <a:ext cx="11002975" cy="347472"/>
-          </a:xfrm>
-          <a:prstGeom prst="rect">
-            <a:avLst/>
-          </a:prstGeom>
-          <a:noFill/>
-        </p:spPr>
-        <p:txBody>
-          <a:bodyPr wrap="square">
-            <a:spAutoFit/>
-          </a:bodyPr>
-          <a:lstStyle/>
-          <a:p>
-            <a:pPr algn="ctr"/>
-            <a:r>
-              <a:rPr sz="2200" b="0" i="1">
-                <a:solidFill>
-                  <a:srgbClr val="8C8C8C"/>
-                </a:solidFill>
-                <a:latin typeface="Arial"/>
-              </a:rPr>
-              <a:t/>
+            <a:off x="640080" y="3753612"/>
+            <a:ext cx="10911535" cy="365760"/>
+          </a:xfrm>
+          <a:prstGeom prst="rect">
+            <a:avLst/>
+          </a:prstGeom>
+          <a:noFill/>
+        </p:spPr>
+        <p:txBody>
+          <a:bodyPr wrap="square">
+            <a:spAutoFit/>
+          </a:bodyPr>
+          <a:lstStyle/>
+          <a:p>
+            <a:pPr algn="ctr"/>
+            <a:r>
+              <a:rPr sz="2400" b="0" i="1">
+                <a:solidFill>
+                  <a:srgbClr val="AAAAAA"/>
+                </a:solidFill>
+                <a:latin typeface="Arial"/>
+              </a:rPr>
+              <a:t>dakara tsumi no toge wa mou nai</a:t>
+            </a:r>
+          </a:p>
+        </p:txBody>
+      </p:sp>
+      <p:sp>
+        <p:nvSpPr>
+          <p:cNvPr id="6" name="TextBox 5"/>
+          <p:cNvSpPr txBox="1"/>
+          <p:nvPr/>
+        </p:nvSpPr>
+        <p:spPr>
+          <a:xfrm>
+            <a:off x="640080" y="4530852"/>
+            <a:ext cx="10911535" cy="310896"/>
+          </a:xfrm>
+          <a:prstGeom prst="rect">
+            <a:avLst/>
+          </a:prstGeom>
+          <a:noFill/>
+        </p:spPr>
+        <p:txBody>
+          <a:bodyPr wrap="square">
+            <a:spAutoFit/>
+          </a:bodyPr>
+          <a:lstStyle/>
+          <a:p>
+            <a:pPr algn="ctr"/>
+            <a:r>
+              <a:rPr sz="2000" b="0" i="1">
+                <a:solidFill>
+                  <a:srgbClr val="828282"/>
+                </a:solidFill>
+                <a:latin typeface="Arial"/>
+              </a:rPr>
+              <a:t>Atravessaste o grande separador</a:t>
+            </a:r>
+          </a:p>
+        </p:txBody>
+      </p:sp>
+      <p:sp>
+        <p:nvSpPr>
+          <p:cNvPr id="7" name="TextBox 6"/>
+          <p:cNvSpPr txBox="1"/>
+          <p:nvPr/>
+        </p:nvSpPr>
+        <p:spPr>
+          <a:xfrm>
+            <a:off x="640080" y="4896612"/>
+            <a:ext cx="10911535" cy="310896"/>
+          </a:xfrm>
+          <a:prstGeom prst="rect">
+            <a:avLst/>
+          </a:prstGeom>
+          <a:noFill/>
+        </p:spPr>
+        <p:txBody>
+          <a:bodyPr wrap="square">
+            <a:spAutoFit/>
+          </a:bodyPr>
+          <a:lstStyle/>
+          <a:p>
+            <a:pPr algn="ctr"/>
+            <a:r>
+              <a:rPr sz="2000" b="0" i="1">
+                <a:solidFill>
+                  <a:srgbClr val="828282"/>
+                </a:solidFill>
+                <a:latin typeface="Arial"/>
+              </a:rPr>
+              <a:t>O trono celestial</a:t>
             </a:r>
           </a:p>
         </p:txBody>
@@ -3623,29 +3701,29 @@
         </p:nvSpPr>
         <p:spPr>
           <a:xfrm>
-            <a:off x="594360" y="2258568"/>
-            <a:ext cx="11002975" cy="685800"/>
-          </a:xfrm>
-          <a:prstGeom prst="rect">
-            <a:avLst/>
-          </a:prstGeom>
-          <a:noFill/>
-        </p:spPr>
-        <p:txBody>
-          <a:bodyPr wrap="square">
-            <a:spAutoFit/>
-          </a:bodyPr>
-          <a:lstStyle/>
-          <a:p>
-            <a:pPr algn="ctr"/>
-            <a:r>
-              <a:rPr sz="4400" b="1" i="0">
+            <a:off x="640080" y="2500884"/>
+            <a:ext cx="10911535" cy="731520"/>
+          </a:xfrm>
+          <a:prstGeom prst="rect">
+            <a:avLst/>
+          </a:prstGeom>
+          <a:noFill/>
+        </p:spPr>
+        <p:txBody>
+          <a:bodyPr wrap="square">
+            <a:spAutoFit/>
+          </a:bodyPr>
+          <a:lstStyle/>
+          <a:p>
+            <a:pPr algn="ctr"/>
+            <a:r>
+              <a:rPr sz="4800" b="1" i="0">
                 <a:solidFill>
                   <a:srgbClr val="FFFFFF"/>
                 </a:solidFill>
                 <a:latin typeface="Arial"/>
               </a:rPr>
-              <a:t>Quebraste minhas correntes</a:t>
+              <a:t>子羊の血で、永久のいのちへ</a:t>
             </a:r>
           </a:p>
         </p:txBody>
@@ -3658,29 +3736,29 @@
         </p:nvSpPr>
         <p:spPr>
           <a:xfrm>
-            <a:off x="594360" y="2980944"/>
-            <a:ext cx="11002975" cy="347472"/>
-          </a:xfrm>
-          <a:prstGeom prst="rect">
-            <a:avLst/>
-          </a:prstGeom>
-          <a:noFill/>
-        </p:spPr>
-        <p:txBody>
-          <a:bodyPr wrap="square">
-            <a:spAutoFit/>
-          </a:bodyPr>
-          <a:lstStyle/>
-          <a:p>
-            <a:pPr algn="ctr"/>
-            <a:r>
-              <a:rPr sz="2200" b="0" i="1">
-                <a:solidFill>
-                  <a:srgbClr val="8C8C8C"/>
-                </a:solidFill>
-                <a:latin typeface="Arial"/>
-              </a:rPr>
-              <a:t/>
+            <a:off x="640080" y="3268980"/>
+            <a:ext cx="10911535" cy="365760"/>
+          </a:xfrm>
+          <a:prstGeom prst="rect">
+            <a:avLst/>
+          </a:prstGeom>
+          <a:noFill/>
+        </p:spPr>
+        <p:txBody>
+          <a:bodyPr wrap="square">
+            <a:spAutoFit/>
+          </a:bodyPr>
+          <a:lstStyle/>
+          <a:p>
+            <a:pPr algn="ctr"/>
+            <a:r>
+              <a:rPr sz="2400" b="0" i="1">
+                <a:solidFill>
+                  <a:srgbClr val="AAAAAA"/>
+                </a:solidFill>
+                <a:latin typeface="Arial"/>
+              </a:rPr>
+              <a:t>kohitsuji no chi de, towa no inochi he</a:t>
             </a:r>
           </a:p>
         </p:txBody>
@@ -3693,64 +3771,29 @@
         </p:nvSpPr>
         <p:spPr>
           <a:xfrm>
-            <a:off x="594360" y="3529584"/>
-            <a:ext cx="11002975" cy="685800"/>
-          </a:xfrm>
-          <a:prstGeom prst="rect">
-            <a:avLst/>
-          </a:prstGeom>
-          <a:noFill/>
-        </p:spPr>
-        <p:txBody>
-          <a:bodyPr wrap="square">
-            <a:spAutoFit/>
-          </a:bodyPr>
-          <a:lstStyle/>
-          <a:p>
-            <a:pPr algn="ctr"/>
-            <a:r>
-              <a:rPr sz="4400" b="1" i="0">
-                <a:solidFill>
-                  <a:srgbClr val="FFFFFF"/>
-                </a:solidFill>
-                <a:latin typeface="Arial"/>
-              </a:rPr>
-              <a:t>Libertaste minha alma</a:t>
-            </a:r>
-          </a:p>
-        </p:txBody>
-      </p:sp>
-      <p:sp>
-        <p:nvSpPr>
-          <p:cNvPr id="5" name="TextBox 4"/>
-          <p:cNvSpPr txBox="1"/>
-          <p:nvPr/>
-        </p:nvSpPr>
-        <p:spPr>
-          <a:xfrm>
-            <a:off x="594360" y="4251960"/>
-            <a:ext cx="11002975" cy="347472"/>
-          </a:xfrm>
-          <a:prstGeom prst="rect">
-            <a:avLst/>
-          </a:prstGeom>
-          <a:noFill/>
-        </p:spPr>
-        <p:txBody>
-          <a:bodyPr wrap="square">
-            <a:spAutoFit/>
-          </a:bodyPr>
-          <a:lstStyle/>
-          <a:p>
-            <a:pPr algn="ctr"/>
-            <a:r>
-              <a:rPr sz="2200" b="0" i="1">
-                <a:solidFill>
-                  <a:srgbClr val="8C8C8C"/>
-                </a:solidFill>
-                <a:latin typeface="Arial"/>
-              </a:rPr>
-              <a:t/>
+            <a:off x="640080" y="4046220"/>
+            <a:ext cx="10911535" cy="310896"/>
+          </a:xfrm>
+          <a:prstGeom prst="rect">
+            <a:avLst/>
+          </a:prstGeom>
+          <a:noFill/>
+        </p:spPr>
+        <p:txBody>
+          <a:bodyPr wrap="square">
+            <a:spAutoFit/>
+          </a:bodyPr>
+          <a:lstStyle/>
+          <a:p>
+            <a:pPr algn="ctr"/>
+            <a:r>
+              <a:rPr sz="2000" b="0" i="1">
+                <a:solidFill>
+                  <a:srgbClr val="828282"/>
+                </a:solidFill>
+                <a:latin typeface="Arial"/>
+              </a:rPr>
+              <a:t>E ali na cruz</a:t>
             </a:r>
           </a:p>
         </p:txBody>
@@ -3789,29 +3832,29 @@
         </p:nvSpPr>
         <p:spPr>
           <a:xfrm>
-            <a:off x="594360" y="2258568"/>
-            <a:ext cx="11002975" cy="685800"/>
-          </a:xfrm>
-          <a:prstGeom prst="rect">
-            <a:avLst/>
-          </a:prstGeom>
-          <a:noFill/>
-        </p:spPr>
-        <p:txBody>
-          <a:bodyPr wrap="square">
-            <a:spAutoFit/>
-          </a:bodyPr>
-          <a:lstStyle/>
-          <a:p>
-            <a:pPr algn="ctr"/>
-            <a:r>
-              <a:rPr sz="4400" b="1" i="0">
+            <a:off x="640080" y="2052828"/>
+            <a:ext cx="10911535" cy="731520"/>
+          </a:xfrm>
+          <a:prstGeom prst="rect">
+            <a:avLst/>
+          </a:prstGeom>
+          <a:noFill/>
+        </p:spPr>
+        <p:txBody>
+          <a:bodyPr wrap="square">
+            <a:spAutoFit/>
+          </a:bodyPr>
+          <a:lstStyle/>
+          <a:p>
+            <a:pPr algn="ctr"/>
+            <a:r>
+              <a:rPr sz="4800" b="1" i="0">
                 <a:solidFill>
                   <a:srgbClr val="FFFFFF"/>
                 </a:solidFill>
                 <a:latin typeface="Arial"/>
               </a:rPr>
-              <a:t>Pela primeira vez tive esperança</a:t>
+              <a:t>Tu me mantiveste no Teu olhar</a:t>
             </a:r>
           </a:p>
         </p:txBody>
@@ -3824,29 +3867,29 @@
         </p:nvSpPr>
         <p:spPr>
           <a:xfrm>
-            <a:off x="594360" y="2980944"/>
-            <a:ext cx="11002975" cy="347472"/>
-          </a:xfrm>
-          <a:prstGeom prst="rect">
-            <a:avLst/>
-          </a:prstGeom>
-          <a:noFill/>
-        </p:spPr>
-        <p:txBody>
-          <a:bodyPr wrap="square">
-            <a:spAutoFit/>
-          </a:bodyPr>
-          <a:lstStyle/>
-          <a:p>
-            <a:pPr algn="ctr"/>
-            <a:r>
-              <a:rPr sz="2200" b="0" i="1">
-                <a:solidFill>
-                  <a:srgbClr val="8C8C8C"/>
-                </a:solidFill>
-                <a:latin typeface="Arial"/>
-              </a:rPr>
-              <a:t/>
+            <a:off x="640080" y="2985516"/>
+            <a:ext cx="10911535" cy="731520"/>
+          </a:xfrm>
+          <a:prstGeom prst="rect">
+            <a:avLst/>
+          </a:prstGeom>
+          <a:noFill/>
+        </p:spPr>
+        <p:txBody>
+          <a:bodyPr wrap="square">
+            <a:spAutoFit/>
+          </a:bodyPr>
+          <a:lstStyle/>
+          <a:p>
+            <a:pPr algn="ctr"/>
+            <a:r>
+              <a:rPr sz="4800" b="1" i="0">
+                <a:solidFill>
+                  <a:srgbClr val="FFFFFF"/>
+                </a:solidFill>
+                <a:latin typeface="Arial"/>
+              </a:rPr>
+              <a:t>E abriste um caminho</a:t>
             </a:r>
           </a:p>
         </p:txBody>
@@ -3859,29 +3902,29 @@
         </p:nvSpPr>
         <p:spPr>
           <a:xfrm>
-            <a:off x="594360" y="3529584"/>
-            <a:ext cx="11002975" cy="685800"/>
-          </a:xfrm>
-          <a:prstGeom prst="rect">
-            <a:avLst/>
-          </a:prstGeom>
-          <a:noFill/>
-        </p:spPr>
-        <p:txBody>
-          <a:bodyPr wrap="square">
-            <a:spAutoFit/>
-          </a:bodyPr>
-          <a:lstStyle/>
-          <a:p>
-            <a:pPr algn="ctr"/>
-            <a:r>
-              <a:rPr sz="3705" b="1" i="0">
-                <a:solidFill>
-                  <a:srgbClr val="FFFFFF"/>
-                </a:solidFill>
-                <a:latin typeface="Arial"/>
-              </a:rPr>
-              <a:t>Obrigado, Jesus, pelo sangue derramado</a:t>
+            <a:off x="640080" y="4128516"/>
+            <a:ext cx="10911535" cy="310896"/>
+          </a:xfrm>
+          <a:prstGeom prst="rect">
+            <a:avLst/>
+          </a:prstGeom>
+          <a:noFill/>
+        </p:spPr>
+        <p:txBody>
+          <a:bodyPr wrap="square">
+            <a:spAutoFit/>
+          </a:bodyPr>
+          <a:lstStyle/>
+          <a:p>
+            <a:pPr algn="ctr"/>
+            <a:r>
+              <a:rPr sz="2000" b="0" i="0">
+                <a:solidFill>
+                  <a:srgbClr val="828282"/>
+                </a:solidFill>
+                <a:latin typeface="Arial"/>
+              </a:rPr>
+              <a:t>私の   罪の代わりに</a:t>
             </a:r>
           </a:p>
         </p:txBody>
@@ -3894,29 +3937,29 @@
         </p:nvSpPr>
         <p:spPr>
           <a:xfrm>
-            <a:off x="594360" y="4251960"/>
-            <a:ext cx="11002975" cy="347472"/>
-          </a:xfrm>
-          <a:prstGeom prst="rect">
-            <a:avLst/>
-          </a:prstGeom>
-          <a:noFill/>
-        </p:spPr>
-        <p:txBody>
-          <a:bodyPr wrap="square">
-            <a:spAutoFit/>
-          </a:bodyPr>
-          <a:lstStyle/>
-          <a:p>
-            <a:pPr algn="ctr"/>
-            <a:r>
-              <a:rPr sz="2200" b="0" i="1">
-                <a:solidFill>
-                  <a:srgbClr val="8C8C8C"/>
-                </a:solidFill>
-                <a:latin typeface="Arial"/>
-              </a:rPr>
-              <a:t/>
+            <a:off x="640080" y="4494276"/>
+            <a:ext cx="10911535" cy="310896"/>
+          </a:xfrm>
+          <a:prstGeom prst="rect">
+            <a:avLst/>
+          </a:prstGeom>
+          <a:noFill/>
+        </p:spPr>
+        <p:txBody>
+          <a:bodyPr wrap="square">
+            <a:spAutoFit/>
+          </a:bodyPr>
+          <a:lstStyle/>
+          <a:p>
+            <a:pPr algn="ctr"/>
+            <a:r>
+              <a:rPr sz="2000" b="0" i="0">
+                <a:solidFill>
+                  <a:srgbClr val="828282"/>
+                </a:solidFill>
+                <a:latin typeface="Arial"/>
+              </a:rPr>
+              <a:t>墓に葬られて</a:t>
             </a:r>
           </a:p>
         </p:txBody>
@@ -3955,29 +3998,29 @@
         </p:nvSpPr>
         <p:spPr>
           <a:xfrm>
-            <a:off x="594360" y="2258568"/>
-            <a:ext cx="11002975" cy="685800"/>
-          </a:xfrm>
-          <a:prstGeom prst="rect">
-            <a:avLst/>
-          </a:prstGeom>
-          <a:noFill/>
-        </p:spPr>
-        <p:txBody>
-          <a:bodyPr wrap="square">
-            <a:spAutoFit/>
-          </a:bodyPr>
-          <a:lstStyle/>
-          <a:p>
-            <a:pPr algn="ctr"/>
-            <a:r>
-              <a:rPr sz="4400" b="1" i="0">
+            <a:off x="640080" y="2052828"/>
+            <a:ext cx="10911535" cy="731520"/>
+          </a:xfrm>
+          <a:prstGeom prst="rect">
+            <a:avLst/>
+          </a:prstGeom>
+          <a:noFill/>
+        </p:spPr>
+        <p:txBody>
+          <a:bodyPr wrap="square">
+            <a:spAutoFit/>
+          </a:bodyPr>
+          <a:lstStyle/>
+          <a:p>
+            <a:pPr algn="ctr"/>
+            <a:r>
+              <a:rPr sz="4800" b="1" i="0">
                 <a:solidFill>
                   <a:srgbClr val="FFFFFF"/>
                 </a:solidFill>
                 <a:latin typeface="Arial"/>
               </a:rPr>
-              <a:t>Obrigado, Jesus, Tu me lavaste</a:t>
+              <a:t>Atravessaste o grande separador</a:t>
             </a:r>
           </a:p>
         </p:txBody>
@@ -3990,29 +4033,29 @@
         </p:nvSpPr>
         <p:spPr>
           <a:xfrm>
-            <a:off x="594360" y="2980944"/>
-            <a:ext cx="11002975" cy="347472"/>
-          </a:xfrm>
-          <a:prstGeom prst="rect">
-            <a:avLst/>
-          </a:prstGeom>
-          <a:noFill/>
-        </p:spPr>
-        <p:txBody>
-          <a:bodyPr wrap="square">
-            <a:spAutoFit/>
-          </a:bodyPr>
-          <a:lstStyle/>
-          <a:p>
-            <a:pPr algn="ctr"/>
-            <a:r>
-              <a:rPr sz="2200" b="0" i="1">
-                <a:solidFill>
-                  <a:srgbClr val="8C8C8C"/>
-                </a:solidFill>
-                <a:latin typeface="Arial"/>
-              </a:rPr>
-              <a:t/>
+            <a:off x="640080" y="2985516"/>
+            <a:ext cx="10911535" cy="731520"/>
+          </a:xfrm>
+          <a:prstGeom prst="rect">
+            <a:avLst/>
+          </a:prstGeom>
+          <a:noFill/>
+        </p:spPr>
+        <p:txBody>
+          <a:bodyPr wrap="square">
+            <a:spAutoFit/>
+          </a:bodyPr>
+          <a:lstStyle/>
+          <a:p>
+            <a:pPr algn="ctr"/>
+            <a:r>
+              <a:rPr sz="4800" b="1" i="0">
+                <a:solidFill>
+                  <a:srgbClr val="FFFFFF"/>
+                </a:solidFill>
+                <a:latin typeface="Arial"/>
+              </a:rPr>
+              <a:t>O trono celestial</a:t>
             </a:r>
           </a:p>
         </p:txBody>
@@ -4025,29 +4068,29 @@
         </p:nvSpPr>
         <p:spPr>
           <a:xfrm>
-            <a:off x="594360" y="3529584"/>
-            <a:ext cx="11002975" cy="685800"/>
-          </a:xfrm>
-          <a:prstGeom prst="rect">
-            <a:avLst/>
-          </a:prstGeom>
-          <a:noFill/>
-        </p:spPr>
-        <p:txBody>
-          <a:bodyPr wrap="square">
-            <a:spAutoFit/>
-          </a:bodyPr>
-          <a:lstStyle/>
-          <a:p>
-            <a:pPr algn="ctr"/>
-            <a:r>
-              <a:rPr sz="3705" b="1" i="0">
-                <a:solidFill>
-                  <a:srgbClr val="FFFFFF"/>
-                </a:solidFill>
-                <a:latin typeface="Arial"/>
-              </a:rPr>
-              <a:t>Obrigado, Jesus, salvaste a minha vida</a:t>
+            <a:off x="640080" y="4128516"/>
+            <a:ext cx="10911535" cy="310896"/>
+          </a:xfrm>
+          <a:prstGeom prst="rect">
+            <a:avLst/>
+          </a:prstGeom>
+          <a:noFill/>
+        </p:spPr>
+        <p:txBody>
+          <a:bodyPr wrap="square">
+            <a:spAutoFit/>
+          </a:bodyPr>
+          <a:lstStyle/>
+          <a:p>
+            <a:pPr algn="ctr"/>
+            <a:r>
+              <a:rPr sz="2000" b="0" i="0">
+                <a:solidFill>
+                  <a:srgbClr val="828282"/>
+                </a:solidFill>
+                <a:latin typeface="Arial"/>
+              </a:rPr>
+              <a:t>蘇られた</a:t>
             </a:r>
           </a:p>
         </p:txBody>
@@ -4060,29 +4103,29 @@
         </p:nvSpPr>
         <p:spPr>
           <a:xfrm>
-            <a:off x="594360" y="4251960"/>
-            <a:ext cx="11002975" cy="347472"/>
-          </a:xfrm>
-          <a:prstGeom prst="rect">
-            <a:avLst/>
-          </a:prstGeom>
-          <a:noFill/>
-        </p:spPr>
-        <p:txBody>
-          <a:bodyPr wrap="square">
-            <a:spAutoFit/>
-          </a:bodyPr>
-          <a:lstStyle/>
-          <a:p>
-            <a:pPr algn="ctr"/>
-            <a:r>
-              <a:rPr sz="2200" b="0" i="1">
-                <a:solidFill>
-                  <a:srgbClr val="8C8C8C"/>
-                </a:solidFill>
-                <a:latin typeface="Arial"/>
-              </a:rPr>
-              <a:t/>
+            <a:off x="640080" y="4494276"/>
+            <a:ext cx="10911535" cy="310896"/>
+          </a:xfrm>
+          <a:prstGeom prst="rect">
+            <a:avLst/>
+          </a:prstGeom>
+          <a:noFill/>
+        </p:spPr>
+        <p:txBody>
+          <a:bodyPr wrap="square">
+            <a:spAutoFit/>
+          </a:bodyPr>
+          <a:lstStyle/>
+          <a:p>
+            <a:pPr algn="ctr"/>
+            <a:r>
+              <a:rPr sz="2000" b="0" i="0">
+                <a:solidFill>
+                  <a:srgbClr val="828282"/>
+                </a:solidFill>
+                <a:latin typeface="Arial"/>
+              </a:rPr>
+              <a:t>だから罪の   とげはもう無い</a:t>
             </a:r>
           </a:p>
         </p:txBody>
@@ -4121,29 +4164,29 @@
         </p:nvSpPr>
         <p:spPr>
           <a:xfrm>
-            <a:off x="594360" y="2258568"/>
-            <a:ext cx="11002975" cy="685800"/>
-          </a:xfrm>
-          <a:prstGeom prst="rect">
-            <a:avLst/>
-          </a:prstGeom>
-          <a:noFill/>
-        </p:spPr>
-        <p:txBody>
-          <a:bodyPr wrap="square">
-            <a:spAutoFit/>
-          </a:bodyPr>
-          <a:lstStyle/>
-          <a:p>
-            <a:pPr algn="ctr"/>
-            <a:r>
-              <a:rPr sz="4400" b="1" i="0">
+            <a:off x="640080" y="2052828"/>
+            <a:ext cx="10911535" cy="731520"/>
+          </a:xfrm>
+          <a:prstGeom prst="rect">
+            <a:avLst/>
+          </a:prstGeom>
+          <a:noFill/>
+        </p:spPr>
+        <p:txBody>
+          <a:bodyPr wrap="square">
+            <a:spAutoFit/>
+          </a:bodyPr>
+          <a:lstStyle/>
+          <a:p>
+            <a:pPr algn="ctr"/>
+            <a:r>
+              <a:rPr sz="4800" b="1" i="0">
                 <a:solidFill>
                   <a:srgbClr val="FFFFFF"/>
                 </a:solidFill>
                 <a:latin typeface="Arial"/>
               </a:rPr>
-              <a:t>Tiraste-me das trevas para a luz</a:t>
+              <a:t>E ali na cruz</a:t>
             </a:r>
           </a:p>
         </p:txBody>
@@ -4156,29 +4199,29 @@
         </p:nvSpPr>
         <p:spPr>
           <a:xfrm>
-            <a:off x="594360" y="2980944"/>
-            <a:ext cx="11002975" cy="347472"/>
-          </a:xfrm>
-          <a:prstGeom prst="rect">
-            <a:avLst/>
-          </a:prstGeom>
-          <a:noFill/>
-        </p:spPr>
-        <p:txBody>
-          <a:bodyPr wrap="square">
-            <a:spAutoFit/>
-          </a:bodyPr>
-          <a:lstStyle/>
-          <a:p>
-            <a:pPr algn="ctr"/>
-            <a:r>
-              <a:rPr sz="2200" b="0" i="1">
-                <a:solidFill>
-                  <a:srgbClr val="8C8C8C"/>
-                </a:solidFill>
-                <a:latin typeface="Arial"/>
-              </a:rPr>
-              <a:t/>
+            <a:off x="640080" y="2985516"/>
+            <a:ext cx="10911535" cy="731520"/>
+          </a:xfrm>
+          <a:prstGeom prst="rect">
+            <a:avLst/>
+          </a:prstGeom>
+          <a:noFill/>
+        </p:spPr>
+        <p:txBody>
+          <a:bodyPr wrap="square">
+            <a:spAutoFit/>
+          </a:bodyPr>
+          <a:lstStyle/>
+          <a:p>
+            <a:pPr algn="ctr"/>
+            <a:r>
+              <a:rPr sz="4800" b="1" i="0">
+                <a:solidFill>
+                  <a:srgbClr val="FFFFFF"/>
+                </a:solidFill>
+                <a:latin typeface="Arial"/>
+              </a:rPr>
+              <a:t>Pagaste a dívida que eu devia</a:t>
             </a:r>
           </a:p>
         </p:txBody>
@@ -4191,64 +4234,29 @@
         </p:nvSpPr>
         <p:spPr>
           <a:xfrm>
-            <a:off x="594360" y="3529584"/>
-            <a:ext cx="11002975" cy="685800"/>
-          </a:xfrm>
-          <a:prstGeom prst="rect">
-            <a:avLst/>
-          </a:prstGeom>
-          <a:noFill/>
-        </p:spPr>
-        <p:txBody>
-          <a:bodyPr wrap="square">
-            <a:spAutoFit/>
-          </a:bodyPr>
-          <a:lstStyle/>
-          <a:p>
-            <a:pPr algn="ctr"/>
-            <a:r>
-              <a:rPr sz="4400" b="1" i="0">
-                <a:solidFill>
-                  <a:srgbClr val="FFFFFF"/>
-                </a:solidFill>
-                <a:latin typeface="Arial"/>
-              </a:rPr>
-              <a:t>A volta está completa</a:t>
-            </a:r>
-          </a:p>
-        </p:txBody>
-      </p:sp>
-      <p:sp>
-        <p:nvSpPr>
-          <p:cNvPr id="5" name="TextBox 4"/>
-          <p:cNvSpPr txBox="1"/>
-          <p:nvPr/>
-        </p:nvSpPr>
-        <p:spPr>
-          <a:xfrm>
-            <a:off x="594360" y="4251960"/>
-            <a:ext cx="11002975" cy="347472"/>
-          </a:xfrm>
-          <a:prstGeom prst="rect">
-            <a:avLst/>
-          </a:prstGeom>
-          <a:noFill/>
-        </p:spPr>
-        <p:txBody>
-          <a:bodyPr wrap="square">
-            <a:spAutoFit/>
-          </a:bodyPr>
-          <a:lstStyle/>
-          <a:p>
-            <a:pPr algn="ctr"/>
-            <a:r>
-              <a:rPr sz="2200" b="0" i="1">
-                <a:solidFill>
-                  <a:srgbClr val="8C8C8C"/>
-                </a:solidFill>
-                <a:latin typeface="Arial"/>
-              </a:rPr>
-              <a:t/>
+            <a:off x="640080" y="4128516"/>
+            <a:ext cx="10911535" cy="310896"/>
+          </a:xfrm>
+          <a:prstGeom prst="rect">
+            <a:avLst/>
+          </a:prstGeom>
+          <a:noFill/>
+        </p:spPr>
+        <p:txBody>
+          <a:bodyPr wrap="square">
+            <a:spAutoFit/>
+          </a:bodyPr>
+          <a:lstStyle/>
+          <a:p>
+            <a:pPr algn="ctr"/>
+            <a:r>
+              <a:rPr sz="2000" b="0" i="0">
+                <a:solidFill>
+                  <a:srgbClr val="828282"/>
+                </a:solidFill>
+                <a:latin typeface="Arial"/>
+              </a:rPr>
+              <a:t>子羊の血で、永久のいのちへ</a:t>
             </a:r>
           </a:p>
         </p:txBody>
@@ -4287,29 +4295,29 @@
         </p:nvSpPr>
         <p:spPr>
           <a:xfrm>
-            <a:off x="594360" y="2258568"/>
-            <a:ext cx="11002975" cy="685800"/>
-          </a:xfrm>
-          <a:prstGeom prst="rect">
-            <a:avLst/>
-          </a:prstGeom>
-          <a:noFill/>
-        </p:spPr>
-        <p:txBody>
-          <a:bodyPr wrap="square">
-            <a:spAutoFit/>
-          </a:bodyPr>
-          <a:lstStyle/>
-          <a:p>
-            <a:pPr algn="ctr"/>
-            <a:r>
-              <a:rPr sz="4400" b="1" i="0">
+            <a:off x="640080" y="2052828"/>
+            <a:ext cx="10911535" cy="731520"/>
+          </a:xfrm>
+          <a:prstGeom prst="rect">
+            <a:avLst/>
+          </a:prstGeom>
+          <a:noFill/>
+        </p:spPr>
+        <p:txBody>
+          <a:bodyPr wrap="square">
+            <a:spAutoFit/>
+          </a:bodyPr>
+          <a:lstStyle/>
+          <a:p>
+            <a:pPr algn="ctr"/>
+            <a:r>
+              <a:rPr sz="4800" b="1" i="0">
                 <a:solidFill>
                   <a:srgbClr val="FFFFFF"/>
                 </a:solidFill>
                 <a:latin typeface="Arial"/>
               </a:rPr>
-              <a:t>Alegria chegou ao meu coração</a:t>
+              <a:t>Quebraste minhas correntes</a:t>
             </a:r>
           </a:p>
         </p:txBody>
@@ -4322,29 +4330,29 @@
         </p:nvSpPr>
         <p:spPr>
           <a:xfrm>
-            <a:off x="594360" y="2980944"/>
-            <a:ext cx="11002975" cy="347472"/>
-          </a:xfrm>
-          <a:prstGeom prst="rect">
-            <a:avLst/>
-          </a:prstGeom>
-          <a:noFill/>
-        </p:spPr>
-        <p:txBody>
-          <a:bodyPr wrap="square">
-            <a:spAutoFit/>
-          </a:bodyPr>
-          <a:lstStyle/>
-          <a:p>
-            <a:pPr algn="ctr"/>
-            <a:r>
-              <a:rPr sz="2200" b="0" i="1">
-                <a:solidFill>
-                  <a:srgbClr val="8C8C8C"/>
-                </a:solidFill>
-                <a:latin typeface="Arial"/>
-              </a:rPr>
-              <a:t/>
+            <a:off x="640080" y="2985516"/>
+            <a:ext cx="10911535" cy="731520"/>
+          </a:xfrm>
+          <a:prstGeom prst="rect">
+            <a:avLst/>
+          </a:prstGeom>
+          <a:noFill/>
+        </p:spPr>
+        <p:txBody>
+          <a:bodyPr wrap="square">
+            <a:spAutoFit/>
+          </a:bodyPr>
+          <a:lstStyle/>
+          <a:p>
+            <a:pPr algn="ctr"/>
+            <a:r>
+              <a:rPr sz="4800" b="1" i="0">
+                <a:solidFill>
+                  <a:srgbClr val="FFFFFF"/>
+                </a:solidFill>
+                <a:latin typeface="Arial"/>
+              </a:rPr>
+              <a:t>Libertaste minha alma</a:t>
             </a:r>
           </a:p>
         </p:txBody>
@@ -4357,29 +4365,29 @@
         </p:nvSpPr>
         <p:spPr>
           <a:xfrm>
-            <a:off x="594360" y="3529584"/>
-            <a:ext cx="11002975" cy="685800"/>
-          </a:xfrm>
-          <a:prstGeom prst="rect">
-            <a:avLst/>
-          </a:prstGeom>
-          <a:noFill/>
-        </p:spPr>
-        <p:txBody>
-          <a:bodyPr wrap="square">
-            <a:spAutoFit/>
-          </a:bodyPr>
-          <a:lstStyle/>
-          <a:p>
-            <a:pPr algn="ctr"/>
-            <a:r>
-              <a:rPr sz="4400" b="1" i="0">
-                <a:solidFill>
-                  <a:srgbClr val="FFFFFF"/>
-                </a:solidFill>
-                <a:latin typeface="Arial"/>
-              </a:rPr>
-              <a:t>Quão livre me sinto</a:t>
+            <a:off x="640080" y="4128516"/>
+            <a:ext cx="10911535" cy="310896"/>
+          </a:xfrm>
+          <a:prstGeom prst="rect">
+            <a:avLst/>
+          </a:prstGeom>
+          <a:noFill/>
+        </p:spPr>
+        <p:txBody>
+          <a:bodyPr wrap="square">
+            <a:spAutoFit/>
+          </a:bodyPr>
+          <a:lstStyle/>
+          <a:p>
+            <a:pPr algn="ctr"/>
+            <a:r>
+              <a:rPr sz="2000" b="0" i="0">
+                <a:solidFill>
+                  <a:srgbClr val="828282"/>
+                </a:solidFill>
+                <a:latin typeface="Arial"/>
+              </a:rPr>
+              <a:t>Thank You, Jesus あなたの血が</a:t>
             </a:r>
           </a:p>
         </p:txBody>
@@ -4392,29 +4400,29 @@
         </p:nvSpPr>
         <p:spPr>
           <a:xfrm>
-            <a:off x="594360" y="4251960"/>
-            <a:ext cx="11002975" cy="347472"/>
-          </a:xfrm>
-          <a:prstGeom prst="rect">
-            <a:avLst/>
-          </a:prstGeom>
-          <a:noFill/>
-        </p:spPr>
-        <p:txBody>
-          <a:bodyPr wrap="square">
-            <a:spAutoFit/>
-          </a:bodyPr>
-          <a:lstStyle/>
-          <a:p>
-            <a:pPr algn="ctr"/>
-            <a:r>
-              <a:rPr sz="2200" b="0" i="1">
-                <a:solidFill>
-                  <a:srgbClr val="8C8C8C"/>
-                </a:solidFill>
-                <a:latin typeface="Arial"/>
-              </a:rPr>
-              <a:t/>
+            <a:off x="640080" y="4494276"/>
+            <a:ext cx="10911535" cy="310896"/>
+          </a:xfrm>
+          <a:prstGeom prst="rect">
+            <a:avLst/>
+          </a:prstGeom>
+          <a:noFill/>
+        </p:spPr>
+        <p:txBody>
+          <a:bodyPr wrap="square">
+            <a:spAutoFit/>
+          </a:bodyPr>
+          <a:lstStyle/>
+          <a:p>
+            <a:pPr algn="ctr"/>
+            <a:r>
+              <a:rPr sz="2000" b="0" i="0">
+                <a:solidFill>
+                  <a:srgbClr val="828282"/>
+                </a:solidFill>
+                <a:latin typeface="Arial"/>
+              </a:rPr>
+              <a:t>Thank You, Jesus 洗いきよめた</a:t>
             </a:r>
           </a:p>
         </p:txBody>
@@ -4453,29 +4461,29 @@
         </p:nvSpPr>
         <p:spPr>
           <a:xfrm>
-            <a:off x="594360" y="1837944"/>
-            <a:ext cx="11002975" cy="685800"/>
-          </a:xfrm>
-          <a:prstGeom prst="rect">
-            <a:avLst/>
-          </a:prstGeom>
-          <a:noFill/>
-        </p:spPr>
-        <p:txBody>
-          <a:bodyPr wrap="square">
-            <a:spAutoFit/>
-          </a:bodyPr>
-          <a:lstStyle/>
-          <a:p>
-            <a:pPr algn="ctr"/>
-            <a:r>
-              <a:rPr sz="4400" b="1" i="0">
+            <a:off x="640080" y="2052828"/>
+            <a:ext cx="10911535" cy="731520"/>
+          </a:xfrm>
+          <a:prstGeom prst="rect">
+            <a:avLst/>
+          </a:prstGeom>
+          <a:noFill/>
+        </p:spPr>
+        <p:txBody>
+          <a:bodyPr wrap="square">
+            <a:spAutoFit/>
+          </a:bodyPr>
+          <a:lstStyle/>
+          <a:p>
+            <a:pPr algn="ctr"/>
+            <a:r>
+              <a:rPr sz="4800" b="1" i="0">
                 <a:solidFill>
                   <a:srgbClr val="FFFFFF"/>
                 </a:solidFill>
                 <a:latin typeface="Arial"/>
               </a:rPr>
-              <a:t>これほど偉大で力あるものはない</a:t>
+              <a:t>Pela primeira vez tive esperança</a:t>
             </a:r>
           </a:p>
         </p:txBody>
@@ -4488,29 +4496,29 @@
         </p:nvSpPr>
         <p:spPr>
           <a:xfrm>
-            <a:off x="594360" y="2560320"/>
-            <a:ext cx="11002975" cy="384048"/>
-          </a:xfrm>
-          <a:prstGeom prst="rect">
-            <a:avLst/>
-          </a:prstGeom>
-          <a:noFill/>
-        </p:spPr>
-        <p:txBody>
-          <a:bodyPr wrap="square">
-            <a:spAutoFit/>
-          </a:bodyPr>
-          <a:lstStyle/>
-          <a:p>
-            <a:pPr algn="ctr"/>
-            <a:r>
-              <a:rPr sz="2400" b="0" i="1">
-                <a:solidFill>
-                  <a:srgbClr val="B4B4B4"/>
-                </a:solidFill>
-                <a:latin typeface="Arial"/>
-              </a:rPr>
-              <a:t>kore hodo idai de chikara aru mono wa nai</a:t>
+            <a:off x="640080" y="2985516"/>
+            <a:ext cx="10911535" cy="731520"/>
+          </a:xfrm>
+          <a:prstGeom prst="rect">
+            <a:avLst/>
+          </a:prstGeom>
+          <a:noFill/>
+        </p:spPr>
+        <p:txBody>
+          <a:bodyPr wrap="square">
+            <a:spAutoFit/>
+          </a:bodyPr>
+          <a:lstStyle/>
+          <a:p>
+            <a:pPr algn="ctr"/>
+            <a:r>
+              <a:rPr sz="4000" b="1" i="0">
+                <a:solidFill>
+                  <a:srgbClr val="FFFFFF"/>
+                </a:solidFill>
+                <a:latin typeface="Arial"/>
+              </a:rPr>
+              <a:t>Obrigado, Jesus, pelo sangue derramado</a:t>
             </a:r>
           </a:p>
         </p:txBody>
@@ -4523,29 +4531,29 @@
         </p:nvSpPr>
         <p:spPr>
           <a:xfrm>
-            <a:off x="594360" y="2980944"/>
-            <a:ext cx="11002975" cy="347472"/>
-          </a:xfrm>
-          <a:prstGeom prst="rect">
-            <a:avLst/>
-          </a:prstGeom>
-          <a:noFill/>
-        </p:spPr>
-        <p:txBody>
-          <a:bodyPr wrap="square">
-            <a:spAutoFit/>
-          </a:bodyPr>
-          <a:lstStyle/>
-          <a:p>
-            <a:pPr algn="ctr"/>
-            <a:r>
-              <a:rPr sz="2000" b="0" i="1">
-                <a:solidFill>
-                  <a:srgbClr val="8C8C8C"/>
-                </a:solidFill>
-                <a:latin typeface="Arial"/>
-              </a:rPr>
-              <a:t/>
+            <a:off x="640080" y="4128516"/>
+            <a:ext cx="10911535" cy="310896"/>
+          </a:xfrm>
+          <a:prstGeom prst="rect">
+            <a:avLst/>
+          </a:prstGeom>
+          <a:noFill/>
+        </p:spPr>
+        <p:txBody>
+          <a:bodyPr wrap="square">
+            <a:spAutoFit/>
+          </a:bodyPr>
+          <a:lstStyle/>
+          <a:p>
+            <a:pPr algn="ctr"/>
+            <a:r>
+              <a:rPr sz="2000" b="0" i="0">
+                <a:solidFill>
+                  <a:srgbClr val="828282"/>
+                </a:solidFill>
+                <a:latin typeface="Arial"/>
+              </a:rPr>
+              <a:t>Thank You, Jesus 救ってくれた</a:t>
             </a:r>
           </a:p>
         </p:txBody>
@@ -4558,99 +4566,29 @@
         </p:nvSpPr>
         <p:spPr>
           <a:xfrm>
-            <a:off x="594360" y="3529584"/>
-            <a:ext cx="11002975" cy="685800"/>
-          </a:xfrm>
-          <a:prstGeom prst="rect">
-            <a:avLst/>
-          </a:prstGeom>
-          <a:noFill/>
-        </p:spPr>
-        <p:txBody>
-          <a:bodyPr wrap="square">
-            <a:spAutoFit/>
-          </a:bodyPr>
-          <a:lstStyle/>
-          <a:p>
-            <a:pPr algn="ctr"/>
-            <a:r>
-              <a:rPr sz="4400" b="1" i="0">
-                <a:solidFill>
-                  <a:srgbClr val="FFFFFF"/>
-                </a:solidFill>
-                <a:latin typeface="Arial"/>
-              </a:rPr>
-              <a:t>血潮が</a:t>
-            </a:r>
-          </a:p>
-        </p:txBody>
-      </p:sp>
-      <p:sp>
-        <p:nvSpPr>
-          <p:cNvPr id="6" name="TextBox 5"/>
-          <p:cNvSpPr txBox="1"/>
-          <p:nvPr/>
-        </p:nvSpPr>
-        <p:spPr>
-          <a:xfrm>
-            <a:off x="594360" y="4251960"/>
-            <a:ext cx="11002975" cy="384048"/>
-          </a:xfrm>
-          <a:prstGeom prst="rect">
-            <a:avLst/>
-          </a:prstGeom>
-          <a:noFill/>
-        </p:spPr>
-        <p:txBody>
-          <a:bodyPr wrap="square">
-            <a:spAutoFit/>
-          </a:bodyPr>
-          <a:lstStyle/>
-          <a:p>
-            <a:pPr algn="ctr"/>
-            <a:r>
-              <a:rPr sz="2400" b="0" i="1">
-                <a:solidFill>
-                  <a:srgbClr val="B4B4B4"/>
-                </a:solidFill>
-                <a:latin typeface="Arial"/>
-              </a:rPr>
-              <a:t>chishio ga</a:t>
-            </a:r>
-          </a:p>
-        </p:txBody>
-      </p:sp>
-      <p:sp>
-        <p:nvSpPr>
-          <p:cNvPr id="7" name="TextBox 6"/>
-          <p:cNvSpPr txBox="1"/>
-          <p:nvPr/>
-        </p:nvSpPr>
-        <p:spPr>
-          <a:xfrm>
-            <a:off x="594360" y="4672584"/>
-            <a:ext cx="11002975" cy="347472"/>
-          </a:xfrm>
-          <a:prstGeom prst="rect">
-            <a:avLst/>
-          </a:prstGeom>
-          <a:noFill/>
-        </p:spPr>
-        <p:txBody>
-          <a:bodyPr wrap="square">
-            <a:spAutoFit/>
-          </a:bodyPr>
-          <a:lstStyle/>
-          <a:p>
-            <a:pPr algn="ctr"/>
-            <a:r>
-              <a:rPr sz="2000" b="0" i="1">
-                <a:solidFill>
-                  <a:srgbClr val="8C8C8C"/>
-                </a:solidFill>
-                <a:latin typeface="Arial"/>
-              </a:rPr>
-              <a:t/>
+            <a:off x="640080" y="4494276"/>
+            <a:ext cx="10911535" cy="310896"/>
+          </a:xfrm>
+          <a:prstGeom prst="rect">
+            <a:avLst/>
+          </a:prstGeom>
+          <a:noFill/>
+        </p:spPr>
+        <p:txBody>
+          <a:bodyPr wrap="square">
+            <a:spAutoFit/>
+          </a:bodyPr>
+          <a:lstStyle/>
+          <a:p>
+            <a:pPr algn="ctr"/>
+            <a:r>
+              <a:rPr sz="2000" b="0" i="0">
+                <a:solidFill>
+                  <a:srgbClr val="828282"/>
+                </a:solidFill>
+                <a:latin typeface="Arial"/>
+              </a:rPr>
+              <a:t>暗闇から、      光の中へ</a:t>
             </a:r>
           </a:p>
         </p:txBody>
@@ -4689,29 +4627,29 @@
         </p:nvSpPr>
         <p:spPr>
           <a:xfrm>
-            <a:off x="594360" y="1837944"/>
-            <a:ext cx="11002975" cy="685800"/>
-          </a:xfrm>
-          <a:prstGeom prst="rect">
-            <a:avLst/>
-          </a:prstGeom>
-          <a:noFill/>
-        </p:spPr>
-        <p:txBody>
-          <a:bodyPr wrap="square">
-            <a:spAutoFit/>
-          </a:bodyPr>
-          <a:lstStyle/>
-          <a:p>
-            <a:pPr algn="ctr"/>
-            <a:r>
-              <a:rPr sz="4400" b="1" i="0">
+            <a:off x="640080" y="2052828"/>
+            <a:ext cx="10911535" cy="731520"/>
+          </a:xfrm>
+          <a:prstGeom prst="rect">
+            <a:avLst/>
+          </a:prstGeom>
+          <a:noFill/>
+        </p:spPr>
+        <p:txBody>
+          <a:bodyPr wrap="square">
+            <a:spAutoFit/>
+          </a:bodyPr>
+          <a:lstStyle/>
+          <a:p>
+            <a:pPr algn="ctr"/>
+            <a:r>
+              <a:rPr sz="4800" b="1" i="0">
                 <a:solidFill>
                   <a:srgbClr val="FFFFFF"/>
                 </a:solidFill>
                 <a:latin typeface="Arial"/>
               </a:rPr>
-              <a:t>私たちを天の父の子と呼ばせる</a:t>
+              <a:t>Andando nesse amor</a:t>
             </a:r>
           </a:p>
         </p:txBody>
@@ -4724,169 +4662,29 @@
         </p:nvSpPr>
         <p:spPr>
           <a:xfrm>
-            <a:off x="594360" y="2560320"/>
-            <a:ext cx="11002975" cy="384048"/>
-          </a:xfrm>
-          <a:prstGeom prst="rect">
-            <a:avLst/>
-          </a:prstGeom>
-          <a:noFill/>
-        </p:spPr>
-        <p:txBody>
-          <a:bodyPr wrap="square">
-            <a:spAutoFit/>
-          </a:bodyPr>
-          <a:lstStyle/>
-          <a:p>
-            <a:pPr algn="ctr"/>
-            <a:r>
-              <a:rPr sz="2144" b="0" i="1">
-                <a:solidFill>
-                  <a:srgbClr val="B4B4B4"/>
-                </a:solidFill>
-                <a:latin typeface="Arial"/>
-              </a:rPr>
-              <a:t>watashitachi wo ten no chichi no ko to yobaseru</a:t>
-            </a:r>
-          </a:p>
-        </p:txBody>
-      </p:sp>
-      <p:sp>
-        <p:nvSpPr>
-          <p:cNvPr id="4" name="TextBox 3"/>
-          <p:cNvSpPr txBox="1"/>
-          <p:nvPr/>
-        </p:nvSpPr>
-        <p:spPr>
-          <a:xfrm>
-            <a:off x="594360" y="2980944"/>
-            <a:ext cx="11002975" cy="347472"/>
-          </a:xfrm>
-          <a:prstGeom prst="rect">
-            <a:avLst/>
-          </a:prstGeom>
-          <a:noFill/>
-        </p:spPr>
-        <p:txBody>
-          <a:bodyPr wrap="square">
-            <a:spAutoFit/>
-          </a:bodyPr>
-          <a:lstStyle/>
-          <a:p>
-            <a:pPr algn="ctr"/>
-            <a:r>
-              <a:rPr sz="2000" b="0" i="1">
-                <a:solidFill>
-                  <a:srgbClr val="8C8C8C"/>
-                </a:solidFill>
-                <a:latin typeface="Arial"/>
-              </a:rPr>
-              <a:t/>
-            </a:r>
-          </a:p>
-        </p:txBody>
-      </p:sp>
-      <p:sp>
-        <p:nvSpPr>
-          <p:cNvPr id="5" name="TextBox 4"/>
-          <p:cNvSpPr txBox="1"/>
-          <p:nvPr/>
-        </p:nvSpPr>
-        <p:spPr>
-          <a:xfrm>
-            <a:off x="594360" y="3529584"/>
-            <a:ext cx="11002975" cy="685800"/>
-          </a:xfrm>
-          <a:prstGeom prst="rect">
-            <a:avLst/>
-          </a:prstGeom>
-          <a:noFill/>
-        </p:spPr>
-        <p:txBody>
-          <a:bodyPr wrap="square">
-            <a:spAutoFit/>
-          </a:bodyPr>
-          <a:lstStyle/>
-          <a:p>
-            <a:pPr algn="ctr"/>
-            <a:r>
-              <a:rPr sz="4400" b="1" i="0">
+            <a:off x="640080" y="2985516"/>
+            <a:ext cx="10911535" cy="731520"/>
+          </a:xfrm>
+          <a:prstGeom prst="rect">
+            <a:avLst/>
+          </a:prstGeom>
+          <a:noFill/>
+        </p:spPr>
+        <p:txBody>
+          <a:bodyPr wrap="square">
+            <a:spAutoFit/>
+          </a:bodyPr>
+          <a:lstStyle/>
+          <a:p>
+            <a:pPr algn="ctr"/>
+            <a:r>
+              <a:rPr sz="4800" b="1" i="0">
                 <a:solidFill>
                   <a:srgbClr val="FFFFFF"/>
                 </a:solidFill>
                 <a:latin typeface="Arial"/>
               </a:rPr>
-              <a:t>血潮が</a:t>
-            </a:r>
-          </a:p>
-        </p:txBody>
-      </p:sp>
-      <p:sp>
-        <p:nvSpPr>
-          <p:cNvPr id="6" name="TextBox 5"/>
-          <p:cNvSpPr txBox="1"/>
-          <p:nvPr/>
-        </p:nvSpPr>
-        <p:spPr>
-          <a:xfrm>
-            <a:off x="594360" y="4251960"/>
-            <a:ext cx="11002975" cy="384048"/>
-          </a:xfrm>
-          <a:prstGeom prst="rect">
-            <a:avLst/>
-          </a:prstGeom>
-          <a:noFill/>
-        </p:spPr>
-        <p:txBody>
-          <a:bodyPr wrap="square">
-            <a:spAutoFit/>
-          </a:bodyPr>
-          <a:lstStyle/>
-          <a:p>
-            <a:pPr algn="ctr"/>
-            <a:r>
-              <a:rPr sz="2400" b="0" i="1">
-                <a:solidFill>
-                  <a:srgbClr val="B4B4B4"/>
-                </a:solidFill>
-                <a:latin typeface="Arial"/>
-              </a:rPr>
-              <a:t>chishio ga</a:t>
-            </a:r>
-          </a:p>
-        </p:txBody>
-      </p:sp>
-      <p:sp>
-        <p:nvSpPr>
-          <p:cNvPr id="7" name="TextBox 6"/>
-          <p:cNvSpPr txBox="1"/>
-          <p:nvPr/>
-        </p:nvSpPr>
-        <p:spPr>
-          <a:xfrm>
-            <a:off x="594360" y="4672584"/>
-            <a:ext cx="11002975" cy="347472"/>
-          </a:xfrm>
-          <a:prstGeom prst="rect">
-            <a:avLst/>
-          </a:prstGeom>
-          <a:noFill/>
-        </p:spPr>
-        <p:txBody>
-          <a:bodyPr wrap="square">
-            <a:spAutoFit/>
-          </a:bodyPr>
-          <a:lstStyle/>
-          <a:p>
-            <a:pPr algn="ctr"/>
-            <a:r>
-              <a:rPr sz="2000" b="0" i="1">
-                <a:solidFill>
-                  <a:srgbClr val="8C8C8C"/>
-                </a:solidFill>
-                <a:latin typeface="Arial"/>
-              </a:rPr>
-              <a:t/>
+              <a:t>Obrigado, Jesus, pelo sangue</a:t>
             </a:r>
           </a:p>
         </p:txBody>
@@ -4925,29 +4723,29 @@
         </p:nvSpPr>
         <p:spPr>
           <a:xfrm>
-            <a:off x="594360" y="1837944"/>
-            <a:ext cx="11002975" cy="685800"/>
-          </a:xfrm>
-          <a:prstGeom prst="rect">
-            <a:avLst/>
-          </a:prstGeom>
-          <a:noFill/>
-        </p:spPr>
-        <p:txBody>
-          <a:bodyPr wrap="square">
-            <a:spAutoFit/>
-          </a:bodyPr>
-          <a:lstStyle/>
-          <a:p>
-            <a:pPr algn="ctr"/>
-            <a:r>
-              <a:rPr sz="4400" b="1" i="0">
+            <a:off x="640080" y="2052828"/>
+            <a:ext cx="10911535" cy="731520"/>
+          </a:xfrm>
+          <a:prstGeom prst="rect">
+            <a:avLst/>
+          </a:prstGeom>
+          <a:noFill/>
+        </p:spPr>
+        <p:txBody>
+          <a:bodyPr wrap="square">
+            <a:spAutoFit/>
+          </a:bodyPr>
+          <a:lstStyle/>
+          <a:p>
+            <a:pPr algn="ctr"/>
+            <a:r>
+              <a:rPr sz="4800" b="1" i="0">
                 <a:solidFill>
                   <a:srgbClr val="FFFFFF"/>
                 </a:solidFill>
                 <a:latin typeface="Arial"/>
               </a:rPr>
-              <a:t>Thank You, Jesus あなたの血が</a:t>
+              <a:t>Andando nesse amor</a:t>
             </a:r>
           </a:p>
         </p:txBody>
@@ -4960,169 +4758,29 @@
         </p:nvSpPr>
         <p:spPr>
           <a:xfrm>
-            <a:off x="594360" y="2560320"/>
-            <a:ext cx="11002975" cy="384048"/>
-          </a:xfrm>
-          <a:prstGeom prst="rect">
-            <a:avLst/>
-          </a:prstGeom>
-          <a:noFill/>
-        </p:spPr>
-        <p:txBody>
-          <a:bodyPr wrap="square">
-            <a:spAutoFit/>
-          </a:bodyPr>
-          <a:lstStyle/>
-          <a:p>
-            <a:pPr algn="ctr"/>
-            <a:r>
-              <a:rPr sz="2400" b="0" i="1">
-                <a:solidFill>
-                  <a:srgbClr val="B4B4B4"/>
-                </a:solidFill>
-                <a:latin typeface="Arial"/>
-              </a:rPr>
-              <a:t>anata no chi ga</a:t>
-            </a:r>
-          </a:p>
-        </p:txBody>
-      </p:sp>
-      <p:sp>
-        <p:nvSpPr>
-          <p:cNvPr id="4" name="TextBox 3"/>
-          <p:cNvSpPr txBox="1"/>
-          <p:nvPr/>
-        </p:nvSpPr>
-        <p:spPr>
-          <a:xfrm>
-            <a:off x="594360" y="2980944"/>
-            <a:ext cx="11002975" cy="347472"/>
-          </a:xfrm>
-          <a:prstGeom prst="rect">
-            <a:avLst/>
-          </a:prstGeom>
-          <a:noFill/>
-        </p:spPr>
-        <p:txBody>
-          <a:bodyPr wrap="square">
-            <a:spAutoFit/>
-          </a:bodyPr>
-          <a:lstStyle/>
-          <a:p>
-            <a:pPr algn="ctr"/>
-            <a:r>
-              <a:rPr sz="2000" b="0" i="1">
-                <a:solidFill>
-                  <a:srgbClr val="8C8C8C"/>
-                </a:solidFill>
-                <a:latin typeface="Arial"/>
-              </a:rPr>
-              <a:t/>
-            </a:r>
-          </a:p>
-        </p:txBody>
-      </p:sp>
-      <p:sp>
-        <p:nvSpPr>
-          <p:cNvPr id="5" name="TextBox 4"/>
-          <p:cNvSpPr txBox="1"/>
-          <p:nvPr/>
-        </p:nvSpPr>
-        <p:spPr>
-          <a:xfrm>
-            <a:off x="594360" y="3529584"/>
-            <a:ext cx="11002975" cy="685800"/>
-          </a:xfrm>
-          <a:prstGeom prst="rect">
-            <a:avLst/>
-          </a:prstGeom>
-          <a:noFill/>
-        </p:spPr>
-        <p:txBody>
-          <a:bodyPr wrap="square">
-            <a:spAutoFit/>
-          </a:bodyPr>
-          <a:lstStyle/>
-          <a:p>
-            <a:pPr algn="ctr"/>
-            <a:r>
-              <a:rPr sz="4400" b="1" i="0">
+            <a:off x="640080" y="2985516"/>
+            <a:ext cx="10911535" cy="731520"/>
+          </a:xfrm>
+          <a:prstGeom prst="rect">
+            <a:avLst/>
+          </a:prstGeom>
+          <a:noFill/>
+        </p:spPr>
+        <p:txBody>
+          <a:bodyPr wrap="square">
+            <a:spAutoFit/>
+          </a:bodyPr>
+          <a:lstStyle/>
+          <a:p>
+            <a:pPr algn="ctr"/>
+            <a:r>
+              <a:rPr sz="4800" b="1" i="0">
                 <a:solidFill>
                   <a:srgbClr val="FFFFFF"/>
                 </a:solidFill>
                 <a:latin typeface="Arial"/>
               </a:rPr>
-              <a:t>Thank You, Jesus 洗いきよめた</a:t>
-            </a:r>
-          </a:p>
-        </p:txBody>
-      </p:sp>
-      <p:sp>
-        <p:nvSpPr>
-          <p:cNvPr id="6" name="TextBox 5"/>
-          <p:cNvSpPr txBox="1"/>
-          <p:nvPr/>
-        </p:nvSpPr>
-        <p:spPr>
-          <a:xfrm>
-            <a:off x="594360" y="4251960"/>
-            <a:ext cx="11002975" cy="384048"/>
-          </a:xfrm>
-          <a:prstGeom prst="rect">
-            <a:avLst/>
-          </a:prstGeom>
-          <a:noFill/>
-        </p:spPr>
-        <p:txBody>
-          <a:bodyPr wrap="square">
-            <a:spAutoFit/>
-          </a:bodyPr>
-          <a:lstStyle/>
-          <a:p>
-            <a:pPr algn="ctr"/>
-            <a:r>
-              <a:rPr sz="2400" b="0" i="1">
-                <a:solidFill>
-                  <a:srgbClr val="B4B4B4"/>
-                </a:solidFill>
-                <a:latin typeface="Arial"/>
-              </a:rPr>
-              <a:t>arai kiyometa</a:t>
-            </a:r>
-          </a:p>
-        </p:txBody>
-      </p:sp>
-      <p:sp>
-        <p:nvSpPr>
-          <p:cNvPr id="7" name="TextBox 6"/>
-          <p:cNvSpPr txBox="1"/>
-          <p:nvPr/>
-        </p:nvSpPr>
-        <p:spPr>
-          <a:xfrm>
-            <a:off x="594360" y="4672584"/>
-            <a:ext cx="11002975" cy="347472"/>
-          </a:xfrm>
-          <a:prstGeom prst="rect">
-            <a:avLst/>
-          </a:prstGeom>
-          <a:noFill/>
-        </p:spPr>
-        <p:txBody>
-          <a:bodyPr wrap="square">
-            <a:spAutoFit/>
-          </a:bodyPr>
-          <a:lstStyle/>
-          <a:p>
-            <a:pPr algn="ctr"/>
-            <a:r>
-              <a:rPr sz="2000" b="0" i="1">
-                <a:solidFill>
-                  <a:srgbClr val="8C8C8C"/>
-                </a:solidFill>
-                <a:latin typeface="Arial"/>
-              </a:rPr>
-              <a:t/>
+              <a:t>Obrigado, Jesus, pelo sangue</a:t>
             </a:r>
           </a:p>
         </p:txBody>
@@ -5161,23 +4819,23 @@
         </p:nvSpPr>
         <p:spPr>
           <a:xfrm>
-            <a:off x="594360" y="2258568"/>
-            <a:ext cx="11002975" cy="685800"/>
-          </a:xfrm>
-          <a:prstGeom prst="rect">
-            <a:avLst/>
-          </a:prstGeom>
-          <a:noFill/>
-        </p:spPr>
-        <p:txBody>
-          <a:bodyPr wrap="square">
-            <a:spAutoFit/>
-          </a:bodyPr>
-          <a:lstStyle/>
-          <a:p>
-            <a:pPr algn="ctr"/>
-            <a:r>
-              <a:rPr sz="4400" b="1" i="0">
+            <a:off x="640080" y="2052828"/>
+            <a:ext cx="10911535" cy="731520"/>
+          </a:xfrm>
+          <a:prstGeom prst="rect">
+            <a:avLst/>
+          </a:prstGeom>
+          <a:noFill/>
+        </p:spPr>
+        <p:txBody>
+          <a:bodyPr wrap="square">
+            <a:spAutoFit/>
+          </a:bodyPr>
+          <a:lstStyle/>
+          <a:p>
+            <a:pPr algn="ctr"/>
+            <a:r>
+              <a:rPr sz="4800" b="1" i="0">
                 <a:solidFill>
                   <a:srgbClr val="FFFFFF"/>
                 </a:solidFill>
@@ -5196,99 +4854,29 @@
         </p:nvSpPr>
         <p:spPr>
           <a:xfrm>
-            <a:off x="594360" y="2980944"/>
-            <a:ext cx="11002975" cy="347472"/>
-          </a:xfrm>
-          <a:prstGeom prst="rect">
-            <a:avLst/>
-          </a:prstGeom>
-          <a:noFill/>
-        </p:spPr>
-        <p:txBody>
-          <a:bodyPr wrap="square">
-            <a:spAutoFit/>
-          </a:bodyPr>
-          <a:lstStyle/>
-          <a:p>
-            <a:pPr algn="ctr"/>
-            <a:r>
-              <a:rPr sz="2200" b="0" i="1">
-                <a:solidFill>
-                  <a:srgbClr val="8C8C8C"/>
-                </a:solidFill>
-                <a:latin typeface="Arial"/>
-              </a:rPr>
-              <a:t/>
-            </a:r>
-          </a:p>
-        </p:txBody>
-      </p:sp>
-      <p:sp>
-        <p:nvSpPr>
-          <p:cNvPr id="4" name="TextBox 3"/>
-          <p:cNvSpPr txBox="1"/>
-          <p:nvPr/>
-        </p:nvSpPr>
-        <p:spPr>
-          <a:xfrm>
-            <a:off x="594360" y="3529584"/>
-            <a:ext cx="11002975" cy="685800"/>
-          </a:xfrm>
-          <a:prstGeom prst="rect">
-            <a:avLst/>
-          </a:prstGeom>
-          <a:noFill/>
-        </p:spPr>
-        <p:txBody>
-          <a:bodyPr wrap="square">
-            <a:spAutoFit/>
-          </a:bodyPr>
-          <a:lstStyle/>
-          <a:p>
-            <a:pPr algn="ctr"/>
-            <a:r>
-              <a:rPr sz="4400" b="1" i="0">
+            <a:off x="640080" y="2985516"/>
+            <a:ext cx="10911535" cy="731520"/>
+          </a:xfrm>
+          <a:prstGeom prst="rect">
+            <a:avLst/>
+          </a:prstGeom>
+          <a:noFill/>
+        </p:spPr>
+        <p:txBody>
+          <a:bodyPr wrap="square">
+            <a:spAutoFit/>
+          </a:bodyPr>
+          <a:lstStyle/>
+          <a:p>
+            <a:pPr algn="ctr"/>
+            <a:r>
+              <a:rPr sz="4800" b="1" i="0">
                 <a:solidFill>
                   <a:srgbClr val="FFFFFF"/>
                 </a:solidFill>
                 <a:latin typeface="Arial"/>
               </a:rPr>
               <a:t>Eu estava cego</a:t>
-            </a:r>
-          </a:p>
-        </p:txBody>
-      </p:sp>
-      <p:sp>
-        <p:nvSpPr>
-          <p:cNvPr id="5" name="TextBox 4"/>
-          <p:cNvSpPr txBox="1"/>
-          <p:nvPr/>
-        </p:nvSpPr>
-        <p:spPr>
-          <a:xfrm>
-            <a:off x="594360" y="4251960"/>
-            <a:ext cx="11002975" cy="347472"/>
-          </a:xfrm>
-          <a:prstGeom prst="rect">
-            <a:avLst/>
-          </a:prstGeom>
-          <a:noFill/>
-        </p:spPr>
-        <p:txBody>
-          <a:bodyPr wrap="square">
-            <a:spAutoFit/>
-          </a:bodyPr>
-          <a:lstStyle/>
-          <a:p>
-            <a:pPr algn="ctr"/>
-            <a:r>
-              <a:rPr sz="2200" b="0" i="1">
-                <a:solidFill>
-                  <a:srgbClr val="8C8C8C"/>
-                </a:solidFill>
-                <a:latin typeface="Arial"/>
-              </a:rPr>
-              <a:t/>
             </a:r>
           </a:p>
         </p:txBody>
@@ -5327,29 +4915,29 @@
         </p:nvSpPr>
         <p:spPr>
           <a:xfrm>
-            <a:off x="594360" y="1837944"/>
-            <a:ext cx="11002975" cy="685800"/>
-          </a:xfrm>
-          <a:prstGeom prst="rect">
-            <a:avLst/>
-          </a:prstGeom>
-          <a:noFill/>
-        </p:spPr>
-        <p:txBody>
-          <a:bodyPr wrap="square">
-            <a:spAutoFit/>
-          </a:bodyPr>
-          <a:lstStyle/>
-          <a:p>
-            <a:pPr algn="ctr"/>
-            <a:r>
-              <a:rPr sz="4400" b="1" i="0">
+            <a:off x="640080" y="2052828"/>
+            <a:ext cx="10911535" cy="731520"/>
+          </a:xfrm>
+          <a:prstGeom prst="rect">
+            <a:avLst/>
+          </a:prstGeom>
+          <a:noFill/>
+        </p:spPr>
+        <p:txBody>
+          <a:bodyPr wrap="square">
+            <a:spAutoFit/>
+          </a:bodyPr>
+          <a:lstStyle/>
+          <a:p>
+            <a:pPr algn="ctr"/>
+            <a:r>
+              <a:rPr sz="4800" b="1" i="0">
                 <a:solidFill>
                   <a:srgbClr val="FFFFFF"/>
                 </a:solidFill>
                 <a:latin typeface="Arial"/>
               </a:rPr>
-              <a:t>Thank You, Jesus 救ってくれた</a:t>
+              <a:t>Obrigado, Jesus, Tu me lavaste</a:t>
             </a:r>
           </a:p>
         </p:txBody>
@@ -5362,29 +4950,29 @@
         </p:nvSpPr>
         <p:spPr>
           <a:xfrm>
-            <a:off x="594360" y="2560320"/>
-            <a:ext cx="11002975" cy="384048"/>
-          </a:xfrm>
-          <a:prstGeom prst="rect">
-            <a:avLst/>
-          </a:prstGeom>
-          <a:noFill/>
-        </p:spPr>
-        <p:txBody>
-          <a:bodyPr wrap="square">
-            <a:spAutoFit/>
-          </a:bodyPr>
-          <a:lstStyle/>
-          <a:p>
-            <a:pPr algn="ctr"/>
-            <a:r>
-              <a:rPr sz="2400" b="0" i="1">
-                <a:solidFill>
-                  <a:srgbClr val="B4B4B4"/>
-                </a:solidFill>
-                <a:latin typeface="Arial"/>
-              </a:rPr>
-              <a:t>sukutte kureta</a:t>
+            <a:off x="640080" y="2985516"/>
+            <a:ext cx="10911535" cy="731520"/>
+          </a:xfrm>
+          <a:prstGeom prst="rect">
+            <a:avLst/>
+          </a:prstGeom>
+          <a:noFill/>
+        </p:spPr>
+        <p:txBody>
+          <a:bodyPr wrap="square">
+            <a:spAutoFit/>
+          </a:bodyPr>
+          <a:lstStyle/>
+          <a:p>
+            <a:pPr algn="ctr"/>
+            <a:r>
+              <a:rPr sz="4000" b="1" i="0">
+                <a:solidFill>
+                  <a:srgbClr val="FFFFFF"/>
+                </a:solidFill>
+                <a:latin typeface="Arial"/>
+              </a:rPr>
+              <a:t>Obrigado, Jesus, salvaste a minha vida</a:t>
             </a:r>
           </a:p>
         </p:txBody>
@@ -5397,29 +4985,29 @@
         </p:nvSpPr>
         <p:spPr>
           <a:xfrm>
-            <a:off x="594360" y="2980944"/>
-            <a:ext cx="11002975" cy="347472"/>
-          </a:xfrm>
-          <a:prstGeom prst="rect">
-            <a:avLst/>
-          </a:prstGeom>
-          <a:noFill/>
-        </p:spPr>
-        <p:txBody>
-          <a:bodyPr wrap="square">
-            <a:spAutoFit/>
-          </a:bodyPr>
-          <a:lstStyle/>
-          <a:p>
-            <a:pPr algn="ctr"/>
-            <a:r>
-              <a:rPr sz="2000" b="0" i="1">
-                <a:solidFill>
-                  <a:srgbClr val="8C8C8C"/>
-                </a:solidFill>
-                <a:latin typeface="Arial"/>
-              </a:rPr>
-              <a:t/>
+            <a:off x="640080" y="4128516"/>
+            <a:ext cx="10911535" cy="310896"/>
+          </a:xfrm>
+          <a:prstGeom prst="rect">
+            <a:avLst/>
+          </a:prstGeom>
+          <a:noFill/>
+        </p:spPr>
+        <p:txBody>
+          <a:bodyPr wrap="square">
+            <a:spAutoFit/>
+          </a:bodyPr>
+          <a:lstStyle/>
+          <a:p>
+            <a:pPr algn="ctr"/>
+            <a:r>
+              <a:rPr sz="2000" b="0" i="0">
+                <a:solidFill>
+                  <a:srgbClr val="828282"/>
+                </a:solidFill>
+                <a:latin typeface="Arial"/>
+              </a:rPr>
+              <a:t>これほど偉大で力あるものはない</a:t>
             </a:r>
           </a:p>
         </p:txBody>
@@ -5432,99 +5020,29 @@
         </p:nvSpPr>
         <p:spPr>
           <a:xfrm>
-            <a:off x="594360" y="3529584"/>
-            <a:ext cx="11002975" cy="685800"/>
-          </a:xfrm>
-          <a:prstGeom prst="rect">
-            <a:avLst/>
-          </a:prstGeom>
-          <a:noFill/>
-        </p:spPr>
-        <p:txBody>
-          <a:bodyPr wrap="square">
-            <a:spAutoFit/>
-          </a:bodyPr>
-          <a:lstStyle/>
-          <a:p>
-            <a:pPr algn="ctr"/>
-            <a:r>
-              <a:rPr sz="4400" b="1" i="0">
-                <a:solidFill>
-                  <a:srgbClr val="FFFFFF"/>
-                </a:solidFill>
-                <a:latin typeface="Arial"/>
-              </a:rPr>
-              <a:t>暗闇から、      光の中へ</a:t>
-            </a:r>
-          </a:p>
-        </p:txBody>
-      </p:sp>
-      <p:sp>
-        <p:nvSpPr>
-          <p:cNvPr id="6" name="TextBox 5"/>
-          <p:cNvSpPr txBox="1"/>
-          <p:nvPr/>
-        </p:nvSpPr>
-        <p:spPr>
-          <a:xfrm>
-            <a:off x="594360" y="4251960"/>
-            <a:ext cx="11002975" cy="384048"/>
-          </a:xfrm>
-          <a:prstGeom prst="rect">
-            <a:avLst/>
-          </a:prstGeom>
-          <a:noFill/>
-        </p:spPr>
-        <p:txBody>
-          <a:bodyPr wrap="square">
-            <a:spAutoFit/>
-          </a:bodyPr>
-          <a:lstStyle/>
-          <a:p>
-            <a:pPr algn="ctr"/>
-            <a:r>
-              <a:rPr sz="2400" b="0" i="1">
-                <a:solidFill>
-                  <a:srgbClr val="B4B4B4"/>
-                </a:solidFill>
-                <a:latin typeface="Arial"/>
-              </a:rPr>
-              <a:t>kurayami kara, hikari no naka he</a:t>
-            </a:r>
-          </a:p>
-        </p:txBody>
-      </p:sp>
-      <p:sp>
-        <p:nvSpPr>
-          <p:cNvPr id="7" name="TextBox 6"/>
-          <p:cNvSpPr txBox="1"/>
-          <p:nvPr/>
-        </p:nvSpPr>
-        <p:spPr>
-          <a:xfrm>
-            <a:off x="594360" y="4672584"/>
-            <a:ext cx="11002975" cy="347472"/>
-          </a:xfrm>
-          <a:prstGeom prst="rect">
-            <a:avLst/>
-          </a:prstGeom>
-          <a:noFill/>
-        </p:spPr>
-        <p:txBody>
-          <a:bodyPr wrap="square">
-            <a:spAutoFit/>
-          </a:bodyPr>
-          <a:lstStyle/>
-          <a:p>
-            <a:pPr algn="ctr"/>
-            <a:r>
-              <a:rPr sz="2000" b="0" i="1">
-                <a:solidFill>
-                  <a:srgbClr val="8C8C8C"/>
-                </a:solidFill>
-                <a:latin typeface="Arial"/>
-              </a:rPr>
-              <a:t/>
+            <a:off x="640080" y="4494276"/>
+            <a:ext cx="10911535" cy="310896"/>
+          </a:xfrm>
+          <a:prstGeom prst="rect">
+            <a:avLst/>
+          </a:prstGeom>
+          <a:noFill/>
+        </p:spPr>
+        <p:txBody>
+          <a:bodyPr wrap="square">
+            <a:spAutoFit/>
+          </a:bodyPr>
+          <a:lstStyle/>
+          <a:p>
+            <a:pPr algn="ctr"/>
+            <a:r>
+              <a:rPr sz="2000" b="0" i="0">
+                <a:solidFill>
+                  <a:srgbClr val="828282"/>
+                </a:solidFill>
+                <a:latin typeface="Arial"/>
+              </a:rPr>
+              <a:t>血潮が</a:t>
             </a:r>
           </a:p>
         </p:txBody>
@@ -5563,29 +5081,29 @@
         </p:nvSpPr>
         <p:spPr>
           <a:xfrm>
-            <a:off x="594360" y="2258568"/>
-            <a:ext cx="11002975" cy="685800"/>
-          </a:xfrm>
-          <a:prstGeom prst="rect">
-            <a:avLst/>
-          </a:prstGeom>
-          <a:noFill/>
-        </p:spPr>
-        <p:txBody>
-          <a:bodyPr wrap="square">
-            <a:spAutoFit/>
-          </a:bodyPr>
-          <a:lstStyle/>
-          <a:p>
-            <a:pPr algn="ctr"/>
-            <a:r>
-              <a:rPr sz="4400" b="1" i="0">
+            <a:off x="640080" y="2052828"/>
+            <a:ext cx="10911535" cy="731520"/>
+          </a:xfrm>
+          <a:prstGeom prst="rect">
+            <a:avLst/>
+          </a:prstGeom>
+          <a:noFill/>
+        </p:spPr>
+        <p:txBody>
+          <a:bodyPr wrap="square">
+            <a:spAutoFit/>
+          </a:bodyPr>
+          <a:lstStyle/>
+          <a:p>
+            <a:pPr algn="ctr"/>
+            <a:r>
+              <a:rPr sz="4800" b="1" i="0">
                 <a:solidFill>
                   <a:srgbClr val="FFFFFF"/>
                 </a:solidFill>
                 <a:latin typeface="Arial"/>
               </a:rPr>
-              <a:t>Andando nesse amor</a:t>
+              <a:t>Tiraste-me das trevas para a luz</a:t>
             </a:r>
           </a:p>
         </p:txBody>
@@ -5598,29 +5116,29 @@
         </p:nvSpPr>
         <p:spPr>
           <a:xfrm>
-            <a:off x="594360" y="2980944"/>
-            <a:ext cx="11002975" cy="347472"/>
-          </a:xfrm>
-          <a:prstGeom prst="rect">
-            <a:avLst/>
-          </a:prstGeom>
-          <a:noFill/>
-        </p:spPr>
-        <p:txBody>
-          <a:bodyPr wrap="square">
-            <a:spAutoFit/>
-          </a:bodyPr>
-          <a:lstStyle/>
-          <a:p>
-            <a:pPr algn="ctr"/>
-            <a:r>
-              <a:rPr sz="2200" b="0" i="1">
-                <a:solidFill>
-                  <a:srgbClr val="8C8C8C"/>
-                </a:solidFill>
-                <a:latin typeface="Arial"/>
-              </a:rPr>
-              <a:t/>
+            <a:off x="640080" y="2985516"/>
+            <a:ext cx="10911535" cy="731520"/>
+          </a:xfrm>
+          <a:prstGeom prst="rect">
+            <a:avLst/>
+          </a:prstGeom>
+          <a:noFill/>
+        </p:spPr>
+        <p:txBody>
+          <a:bodyPr wrap="square">
+            <a:spAutoFit/>
+          </a:bodyPr>
+          <a:lstStyle/>
+          <a:p>
+            <a:pPr algn="ctr"/>
+            <a:r>
+              <a:rPr sz="4800" b="1" i="0">
+                <a:solidFill>
+                  <a:srgbClr val="FFFFFF"/>
+                </a:solidFill>
+                <a:latin typeface="Arial"/>
+              </a:rPr>
+              <a:t>A volta está completa</a:t>
             </a:r>
           </a:p>
         </p:txBody>
@@ -5633,29 +5151,29 @@
         </p:nvSpPr>
         <p:spPr>
           <a:xfrm>
-            <a:off x="594360" y="3529584"/>
-            <a:ext cx="11002975" cy="685800"/>
-          </a:xfrm>
-          <a:prstGeom prst="rect">
-            <a:avLst/>
-          </a:prstGeom>
-          <a:noFill/>
-        </p:spPr>
-        <p:txBody>
-          <a:bodyPr wrap="square">
-            <a:spAutoFit/>
-          </a:bodyPr>
-          <a:lstStyle/>
-          <a:p>
-            <a:pPr algn="ctr"/>
-            <a:r>
-              <a:rPr sz="4400" b="1" i="0">
-                <a:solidFill>
-                  <a:srgbClr val="FFFFFF"/>
-                </a:solidFill>
-                <a:latin typeface="Arial"/>
-              </a:rPr>
-              <a:t>Obrigado, Jesus, pelo sangue</a:t>
+            <a:off x="640080" y="4128516"/>
+            <a:ext cx="10911535" cy="310896"/>
+          </a:xfrm>
+          <a:prstGeom prst="rect">
+            <a:avLst/>
+          </a:prstGeom>
+          <a:noFill/>
+        </p:spPr>
+        <p:txBody>
+          <a:bodyPr wrap="square">
+            <a:spAutoFit/>
+          </a:bodyPr>
+          <a:lstStyle/>
+          <a:p>
+            <a:pPr algn="ctr"/>
+            <a:r>
+              <a:rPr sz="2000" b="0" i="0">
+                <a:solidFill>
+                  <a:srgbClr val="828282"/>
+                </a:solidFill>
+                <a:latin typeface="Arial"/>
+              </a:rPr>
+              <a:t>私たちを天の父の子と呼ばせる</a:t>
             </a:r>
           </a:p>
         </p:txBody>
@@ -5668,29 +5186,29 @@
         </p:nvSpPr>
         <p:spPr>
           <a:xfrm>
-            <a:off x="594360" y="4251960"/>
-            <a:ext cx="11002975" cy="347472"/>
-          </a:xfrm>
-          <a:prstGeom prst="rect">
-            <a:avLst/>
-          </a:prstGeom>
-          <a:noFill/>
-        </p:spPr>
-        <p:txBody>
-          <a:bodyPr wrap="square">
-            <a:spAutoFit/>
-          </a:bodyPr>
-          <a:lstStyle/>
-          <a:p>
-            <a:pPr algn="ctr"/>
-            <a:r>
-              <a:rPr sz="2200" b="0" i="1">
-                <a:solidFill>
-                  <a:srgbClr val="8C8C8C"/>
-                </a:solidFill>
-                <a:latin typeface="Arial"/>
-              </a:rPr>
-              <a:t/>
+            <a:off x="640080" y="4494276"/>
+            <a:ext cx="10911535" cy="310896"/>
+          </a:xfrm>
+          <a:prstGeom prst="rect">
+            <a:avLst/>
+          </a:prstGeom>
+          <a:noFill/>
+        </p:spPr>
+        <p:txBody>
+          <a:bodyPr wrap="square">
+            <a:spAutoFit/>
+          </a:bodyPr>
+          <a:lstStyle/>
+          <a:p>
+            <a:pPr algn="ctr"/>
+            <a:r>
+              <a:rPr sz="2000" b="0" i="0">
+                <a:solidFill>
+                  <a:srgbClr val="828282"/>
+                </a:solidFill>
+                <a:latin typeface="Arial"/>
+              </a:rPr>
+              <a:t>血潮が</a:t>
             </a:r>
           </a:p>
         </p:txBody>
@@ -5729,28 +5247,1400 @@
         </p:nvSpPr>
         <p:spPr>
           <a:xfrm>
-            <a:off x="594360" y="2258568"/>
-            <a:ext cx="11002975" cy="685800"/>
-          </a:xfrm>
-          <a:prstGeom prst="rect">
-            <a:avLst/>
-          </a:prstGeom>
-          <a:noFill/>
-        </p:spPr>
-        <p:txBody>
-          <a:bodyPr wrap="square">
-            <a:spAutoFit/>
-          </a:bodyPr>
-          <a:lstStyle/>
-          <a:p>
-            <a:pPr algn="ctr"/>
-            <a:r>
-              <a:rPr sz="4400" b="1" i="0">
+            <a:off x="640080" y="2052828"/>
+            <a:ext cx="10911535" cy="731520"/>
+          </a:xfrm>
+          <a:prstGeom prst="rect">
+            <a:avLst/>
+          </a:prstGeom>
+          <a:noFill/>
+        </p:spPr>
+        <p:txBody>
+          <a:bodyPr wrap="square">
+            <a:spAutoFit/>
+          </a:bodyPr>
+          <a:lstStyle/>
+          <a:p>
+            <a:pPr algn="ctr"/>
+            <a:r>
+              <a:rPr sz="4800" b="1" i="0">
                 <a:solidFill>
                   <a:srgbClr val="FFFFFF"/>
                 </a:solidFill>
                 <a:latin typeface="Arial"/>
               </a:rPr>
+              <a:t>Alegria chegou ao meu coração</a:t>
+            </a:r>
+          </a:p>
+        </p:txBody>
+      </p:sp>
+      <p:sp>
+        <p:nvSpPr>
+          <p:cNvPr id="3" name="TextBox 2"/>
+          <p:cNvSpPr txBox="1"/>
+          <p:nvPr/>
+        </p:nvSpPr>
+        <p:spPr>
+          <a:xfrm>
+            <a:off x="640080" y="2985516"/>
+            <a:ext cx="10911535" cy="731520"/>
+          </a:xfrm>
+          <a:prstGeom prst="rect">
+            <a:avLst/>
+          </a:prstGeom>
+          <a:noFill/>
+        </p:spPr>
+        <p:txBody>
+          <a:bodyPr wrap="square">
+            <a:spAutoFit/>
+          </a:bodyPr>
+          <a:lstStyle/>
+          <a:p>
+            <a:pPr algn="ctr"/>
+            <a:r>
+              <a:rPr sz="4800" b="1" i="0">
+                <a:solidFill>
+                  <a:srgbClr val="FFFFFF"/>
+                </a:solidFill>
+                <a:latin typeface="Arial"/>
+              </a:rPr>
+              <a:t>Quão livre me sinto</a:t>
+            </a:r>
+          </a:p>
+        </p:txBody>
+      </p:sp>
+    </p:spTree>
+  </p:cSld>
+  <p:clrMapOvr>
+    <a:masterClrMapping/>
+  </p:clrMapOvr>
+</p:sld>
+</file>
+
+<file path=ppt/slides/slide23.xml><?xml version="1.0" encoding="utf-8"?>
+<p:sld xmlns:a="http://schemas.openxmlformats.org/drawingml/2006/main" xmlns:p="http://schemas.openxmlformats.org/presentationml/2006/main" xmlns:r="http://schemas.openxmlformats.org/officeDocument/2006/relationships">
+  <p:cSld>
+    <p:bg>
+      <p:bgPr>
+        <a:solidFill>
+          <a:srgbClr val="000000"/>
+        </a:solidFill>
+        <a:effectLst/>
+      </p:bgPr>
+    </p:bg>
+    <p:spTree>
+      <p:nvGrpSpPr>
+        <p:cNvPr id="1" name=""/>
+        <p:cNvGrpSpPr/>
+        <p:nvPr/>
+      </p:nvGrpSpPr>
+      <p:grpSpPr/>
+      <p:sp>
+        <p:nvSpPr>
+          <p:cNvPr id="2" name="TextBox 1"/>
+          <p:cNvSpPr txBox="1"/>
+          <p:nvPr/>
+        </p:nvSpPr>
+        <p:spPr>
+          <a:xfrm>
+            <a:off x="640080" y="1650492"/>
+            <a:ext cx="10911535" cy="731520"/>
+          </a:xfrm>
+          <a:prstGeom prst="rect">
+            <a:avLst/>
+          </a:prstGeom>
+          <a:noFill/>
+        </p:spPr>
+        <p:txBody>
+          <a:bodyPr wrap="square">
+            <a:spAutoFit/>
+          </a:bodyPr>
+          <a:lstStyle/>
+          <a:p>
+            <a:pPr algn="ctr"/>
+            <a:r>
+              <a:rPr sz="4800" b="1" i="0">
+                <a:solidFill>
+                  <a:srgbClr val="FFFFFF"/>
+                </a:solidFill>
+                <a:latin typeface="Arial"/>
+              </a:rPr>
+              <a:t>これほど偉大で力あるものはない</a:t>
+            </a:r>
+          </a:p>
+        </p:txBody>
+      </p:sp>
+      <p:sp>
+        <p:nvSpPr>
+          <p:cNvPr id="3" name="TextBox 2"/>
+          <p:cNvSpPr txBox="1"/>
+          <p:nvPr/>
+        </p:nvSpPr>
+        <p:spPr>
+          <a:xfrm>
+            <a:off x="640080" y="2418588"/>
+            <a:ext cx="10911535" cy="365760"/>
+          </a:xfrm>
+          <a:prstGeom prst="rect">
+            <a:avLst/>
+          </a:prstGeom>
+          <a:noFill/>
+        </p:spPr>
+        <p:txBody>
+          <a:bodyPr wrap="square">
+            <a:spAutoFit/>
+          </a:bodyPr>
+          <a:lstStyle/>
+          <a:p>
+            <a:pPr algn="ctr"/>
+            <a:r>
+              <a:rPr sz="2400" b="0" i="1">
+                <a:solidFill>
+                  <a:srgbClr val="AAAAAA"/>
+                </a:solidFill>
+                <a:latin typeface="Arial"/>
+              </a:rPr>
+              <a:t>kore hodo idai de chikara aru mono wa nai</a:t>
+            </a:r>
+          </a:p>
+        </p:txBody>
+      </p:sp>
+      <p:sp>
+        <p:nvSpPr>
+          <p:cNvPr id="4" name="TextBox 3"/>
+          <p:cNvSpPr txBox="1"/>
+          <p:nvPr/>
+        </p:nvSpPr>
+        <p:spPr>
+          <a:xfrm>
+            <a:off x="640080" y="2985516"/>
+            <a:ext cx="10911535" cy="731520"/>
+          </a:xfrm>
+          <a:prstGeom prst="rect">
+            <a:avLst/>
+          </a:prstGeom>
+          <a:noFill/>
+        </p:spPr>
+        <p:txBody>
+          <a:bodyPr wrap="square">
+            <a:spAutoFit/>
+          </a:bodyPr>
+          <a:lstStyle/>
+          <a:p>
+            <a:pPr algn="ctr"/>
+            <a:r>
+              <a:rPr sz="4800" b="1" i="0">
+                <a:solidFill>
+                  <a:srgbClr val="FFFFFF"/>
+                </a:solidFill>
+                <a:latin typeface="Arial"/>
+              </a:rPr>
+              <a:t>血潮が</a:t>
+            </a:r>
+          </a:p>
+        </p:txBody>
+      </p:sp>
+      <p:sp>
+        <p:nvSpPr>
+          <p:cNvPr id="5" name="TextBox 4"/>
+          <p:cNvSpPr txBox="1"/>
+          <p:nvPr/>
+        </p:nvSpPr>
+        <p:spPr>
+          <a:xfrm>
+            <a:off x="640080" y="3753612"/>
+            <a:ext cx="10911535" cy="365760"/>
+          </a:xfrm>
+          <a:prstGeom prst="rect">
+            <a:avLst/>
+          </a:prstGeom>
+          <a:noFill/>
+        </p:spPr>
+        <p:txBody>
+          <a:bodyPr wrap="square">
+            <a:spAutoFit/>
+          </a:bodyPr>
+          <a:lstStyle/>
+          <a:p>
+            <a:pPr algn="ctr"/>
+            <a:r>
+              <a:rPr sz="2400" b="0" i="1">
+                <a:solidFill>
+                  <a:srgbClr val="AAAAAA"/>
+                </a:solidFill>
+                <a:latin typeface="Arial"/>
+              </a:rPr>
+              <a:t>chishio ga</a:t>
+            </a:r>
+          </a:p>
+        </p:txBody>
+      </p:sp>
+      <p:sp>
+        <p:nvSpPr>
+          <p:cNvPr id="6" name="TextBox 5"/>
+          <p:cNvSpPr txBox="1"/>
+          <p:nvPr/>
+        </p:nvSpPr>
+        <p:spPr>
+          <a:xfrm>
+            <a:off x="640080" y="4530852"/>
+            <a:ext cx="10911535" cy="310896"/>
+          </a:xfrm>
+          <a:prstGeom prst="rect">
+            <a:avLst/>
+          </a:prstGeom>
+          <a:noFill/>
+        </p:spPr>
+        <p:txBody>
+          <a:bodyPr wrap="square">
+            <a:spAutoFit/>
+          </a:bodyPr>
+          <a:lstStyle/>
+          <a:p>
+            <a:pPr algn="ctr"/>
+            <a:r>
+              <a:rPr sz="2000" b="0" i="1">
+                <a:solidFill>
+                  <a:srgbClr val="828282"/>
+                </a:solidFill>
+                <a:latin typeface="Arial"/>
+              </a:rPr>
+              <a:t>Obrigado, Jesus, Tu me lavaste</a:t>
+            </a:r>
+          </a:p>
+        </p:txBody>
+      </p:sp>
+      <p:sp>
+        <p:nvSpPr>
+          <p:cNvPr id="7" name="TextBox 6"/>
+          <p:cNvSpPr txBox="1"/>
+          <p:nvPr/>
+        </p:nvSpPr>
+        <p:spPr>
+          <a:xfrm>
+            <a:off x="640080" y="4896612"/>
+            <a:ext cx="10911535" cy="310896"/>
+          </a:xfrm>
+          <a:prstGeom prst="rect">
+            <a:avLst/>
+          </a:prstGeom>
+          <a:noFill/>
+        </p:spPr>
+        <p:txBody>
+          <a:bodyPr wrap="square">
+            <a:spAutoFit/>
+          </a:bodyPr>
+          <a:lstStyle/>
+          <a:p>
+            <a:pPr algn="ctr"/>
+            <a:r>
+              <a:rPr sz="2000" b="0" i="1">
+                <a:solidFill>
+                  <a:srgbClr val="828282"/>
+                </a:solidFill>
+                <a:latin typeface="Arial"/>
+              </a:rPr>
+              <a:t>Obrigado, Jesus, salvaste a minha vida</a:t>
+            </a:r>
+          </a:p>
+        </p:txBody>
+      </p:sp>
+    </p:spTree>
+  </p:cSld>
+  <p:clrMapOvr>
+    <a:masterClrMapping/>
+  </p:clrMapOvr>
+</p:sld>
+</file>
+
+<file path=ppt/slides/slide24.xml><?xml version="1.0" encoding="utf-8"?>
+<p:sld xmlns:a="http://schemas.openxmlformats.org/drawingml/2006/main" xmlns:p="http://schemas.openxmlformats.org/presentationml/2006/main" xmlns:r="http://schemas.openxmlformats.org/officeDocument/2006/relationships">
+  <p:cSld>
+    <p:bg>
+      <p:bgPr>
+        <a:solidFill>
+          <a:srgbClr val="000000"/>
+        </a:solidFill>
+        <a:effectLst/>
+      </p:bgPr>
+    </p:bg>
+    <p:spTree>
+      <p:nvGrpSpPr>
+        <p:cNvPr id="1" name=""/>
+        <p:cNvGrpSpPr/>
+        <p:nvPr/>
+      </p:nvGrpSpPr>
+      <p:grpSpPr/>
+      <p:sp>
+        <p:nvSpPr>
+          <p:cNvPr id="2" name="TextBox 1"/>
+          <p:cNvSpPr txBox="1"/>
+          <p:nvPr/>
+        </p:nvSpPr>
+        <p:spPr>
+          <a:xfrm>
+            <a:off x="640080" y="1650492"/>
+            <a:ext cx="10911535" cy="731520"/>
+          </a:xfrm>
+          <a:prstGeom prst="rect">
+            <a:avLst/>
+          </a:prstGeom>
+          <a:noFill/>
+        </p:spPr>
+        <p:txBody>
+          <a:bodyPr wrap="square">
+            <a:spAutoFit/>
+          </a:bodyPr>
+          <a:lstStyle/>
+          <a:p>
+            <a:pPr algn="ctr"/>
+            <a:r>
+              <a:rPr sz="4800" b="1" i="0">
+                <a:solidFill>
+                  <a:srgbClr val="FFFFFF"/>
+                </a:solidFill>
+                <a:latin typeface="Arial"/>
+              </a:rPr>
+              <a:t>私たちを天の父の子と呼ばせる</a:t>
+            </a:r>
+          </a:p>
+        </p:txBody>
+      </p:sp>
+      <p:sp>
+        <p:nvSpPr>
+          <p:cNvPr id="3" name="TextBox 2"/>
+          <p:cNvSpPr txBox="1"/>
+          <p:nvPr/>
+        </p:nvSpPr>
+        <p:spPr>
+          <a:xfrm>
+            <a:off x="640080" y="2418588"/>
+            <a:ext cx="10911535" cy="365760"/>
+          </a:xfrm>
+          <a:prstGeom prst="rect">
+            <a:avLst/>
+          </a:prstGeom>
+          <a:noFill/>
+        </p:spPr>
+        <p:txBody>
+          <a:bodyPr wrap="square">
+            <a:spAutoFit/>
+          </a:bodyPr>
+          <a:lstStyle/>
+          <a:p>
+            <a:pPr algn="ctr"/>
+            <a:r>
+              <a:rPr sz="2400" b="0" i="1">
+                <a:solidFill>
+                  <a:srgbClr val="AAAAAA"/>
+                </a:solidFill>
+                <a:latin typeface="Arial"/>
+              </a:rPr>
+              <a:t>watashitachi wo ten no chichi no ko to yobaseru</a:t>
+            </a:r>
+          </a:p>
+        </p:txBody>
+      </p:sp>
+      <p:sp>
+        <p:nvSpPr>
+          <p:cNvPr id="4" name="TextBox 3"/>
+          <p:cNvSpPr txBox="1"/>
+          <p:nvPr/>
+        </p:nvSpPr>
+        <p:spPr>
+          <a:xfrm>
+            <a:off x="640080" y="2985516"/>
+            <a:ext cx="10911535" cy="731520"/>
+          </a:xfrm>
+          <a:prstGeom prst="rect">
+            <a:avLst/>
+          </a:prstGeom>
+          <a:noFill/>
+        </p:spPr>
+        <p:txBody>
+          <a:bodyPr wrap="square">
+            <a:spAutoFit/>
+          </a:bodyPr>
+          <a:lstStyle/>
+          <a:p>
+            <a:pPr algn="ctr"/>
+            <a:r>
+              <a:rPr sz="4800" b="1" i="0">
+                <a:solidFill>
+                  <a:srgbClr val="FFFFFF"/>
+                </a:solidFill>
+                <a:latin typeface="Arial"/>
+              </a:rPr>
+              <a:t>血潮が</a:t>
+            </a:r>
+          </a:p>
+        </p:txBody>
+      </p:sp>
+      <p:sp>
+        <p:nvSpPr>
+          <p:cNvPr id="5" name="TextBox 4"/>
+          <p:cNvSpPr txBox="1"/>
+          <p:nvPr/>
+        </p:nvSpPr>
+        <p:spPr>
+          <a:xfrm>
+            <a:off x="640080" y="3753612"/>
+            <a:ext cx="10911535" cy="365760"/>
+          </a:xfrm>
+          <a:prstGeom prst="rect">
+            <a:avLst/>
+          </a:prstGeom>
+          <a:noFill/>
+        </p:spPr>
+        <p:txBody>
+          <a:bodyPr wrap="square">
+            <a:spAutoFit/>
+          </a:bodyPr>
+          <a:lstStyle/>
+          <a:p>
+            <a:pPr algn="ctr"/>
+            <a:r>
+              <a:rPr sz="2400" b="0" i="1">
+                <a:solidFill>
+                  <a:srgbClr val="AAAAAA"/>
+                </a:solidFill>
+                <a:latin typeface="Arial"/>
+              </a:rPr>
+              <a:t>chishio ga</a:t>
+            </a:r>
+          </a:p>
+        </p:txBody>
+      </p:sp>
+      <p:sp>
+        <p:nvSpPr>
+          <p:cNvPr id="6" name="TextBox 5"/>
+          <p:cNvSpPr txBox="1"/>
+          <p:nvPr/>
+        </p:nvSpPr>
+        <p:spPr>
+          <a:xfrm>
+            <a:off x="640080" y="4530852"/>
+            <a:ext cx="10911535" cy="310896"/>
+          </a:xfrm>
+          <a:prstGeom prst="rect">
+            <a:avLst/>
+          </a:prstGeom>
+          <a:noFill/>
+        </p:spPr>
+        <p:txBody>
+          <a:bodyPr wrap="square">
+            <a:spAutoFit/>
+          </a:bodyPr>
+          <a:lstStyle/>
+          <a:p>
+            <a:pPr algn="ctr"/>
+            <a:r>
+              <a:rPr sz="2000" b="0" i="1">
+                <a:solidFill>
+                  <a:srgbClr val="828282"/>
+                </a:solidFill>
+                <a:latin typeface="Arial"/>
+              </a:rPr>
+              <a:t>Tiraste-me das trevas para a luz</a:t>
+            </a:r>
+          </a:p>
+        </p:txBody>
+      </p:sp>
+      <p:sp>
+        <p:nvSpPr>
+          <p:cNvPr id="7" name="TextBox 6"/>
+          <p:cNvSpPr txBox="1"/>
+          <p:nvPr/>
+        </p:nvSpPr>
+        <p:spPr>
+          <a:xfrm>
+            <a:off x="640080" y="4896612"/>
+            <a:ext cx="10911535" cy="310896"/>
+          </a:xfrm>
+          <a:prstGeom prst="rect">
+            <a:avLst/>
+          </a:prstGeom>
+          <a:noFill/>
+        </p:spPr>
+        <p:txBody>
+          <a:bodyPr wrap="square">
+            <a:spAutoFit/>
+          </a:bodyPr>
+          <a:lstStyle/>
+          <a:p>
+            <a:pPr algn="ctr"/>
+            <a:r>
+              <a:rPr sz="2000" b="0" i="1">
+                <a:solidFill>
+                  <a:srgbClr val="828282"/>
+                </a:solidFill>
+                <a:latin typeface="Arial"/>
+              </a:rPr>
+              <a:t>A volta está completa</a:t>
+            </a:r>
+          </a:p>
+        </p:txBody>
+      </p:sp>
+    </p:spTree>
+  </p:cSld>
+  <p:clrMapOvr>
+    <a:masterClrMapping/>
+  </p:clrMapOvr>
+</p:sld>
+</file>
+
+<file path=ppt/slides/slide25.xml><?xml version="1.0" encoding="utf-8"?>
+<p:sld xmlns:a="http://schemas.openxmlformats.org/drawingml/2006/main" xmlns:p="http://schemas.openxmlformats.org/presentationml/2006/main" xmlns:r="http://schemas.openxmlformats.org/officeDocument/2006/relationships">
+  <p:cSld>
+    <p:bg>
+      <p:bgPr>
+        <a:solidFill>
+          <a:srgbClr val="000000"/>
+        </a:solidFill>
+        <a:effectLst/>
+      </p:bgPr>
+    </p:bg>
+    <p:spTree>
+      <p:nvGrpSpPr>
+        <p:cNvPr id="1" name=""/>
+        <p:cNvGrpSpPr/>
+        <p:nvPr/>
+      </p:nvGrpSpPr>
+      <p:grpSpPr/>
+      <p:sp>
+        <p:nvSpPr>
+          <p:cNvPr id="2" name="TextBox 1"/>
+          <p:cNvSpPr txBox="1"/>
+          <p:nvPr/>
+        </p:nvSpPr>
+        <p:spPr>
+          <a:xfrm>
+            <a:off x="640080" y="1650492"/>
+            <a:ext cx="10911535" cy="731520"/>
+          </a:xfrm>
+          <a:prstGeom prst="rect">
+            <a:avLst/>
+          </a:prstGeom>
+          <a:noFill/>
+        </p:spPr>
+        <p:txBody>
+          <a:bodyPr wrap="square">
+            <a:spAutoFit/>
+          </a:bodyPr>
+          <a:lstStyle/>
+          <a:p>
+            <a:pPr algn="ctr"/>
+            <a:r>
+              <a:rPr sz="4800" b="1" i="0">
+                <a:solidFill>
+                  <a:srgbClr val="FFFFFF"/>
+                </a:solidFill>
+                <a:latin typeface="Arial"/>
+              </a:rPr>
+              <a:t>Thank You, Jesus あなたの血が</a:t>
+            </a:r>
+          </a:p>
+        </p:txBody>
+      </p:sp>
+      <p:sp>
+        <p:nvSpPr>
+          <p:cNvPr id="3" name="TextBox 2"/>
+          <p:cNvSpPr txBox="1"/>
+          <p:nvPr/>
+        </p:nvSpPr>
+        <p:spPr>
+          <a:xfrm>
+            <a:off x="640080" y="2418588"/>
+            <a:ext cx="10911535" cy="365760"/>
+          </a:xfrm>
+          <a:prstGeom prst="rect">
+            <a:avLst/>
+          </a:prstGeom>
+          <a:noFill/>
+        </p:spPr>
+        <p:txBody>
+          <a:bodyPr wrap="square">
+            <a:spAutoFit/>
+          </a:bodyPr>
+          <a:lstStyle/>
+          <a:p>
+            <a:pPr algn="ctr"/>
+            <a:r>
+              <a:rPr sz="2400" b="0" i="1">
+                <a:solidFill>
+                  <a:srgbClr val="AAAAAA"/>
+                </a:solidFill>
+                <a:latin typeface="Arial"/>
+              </a:rPr>
+              <a:t>anata no chi ga</a:t>
+            </a:r>
+          </a:p>
+        </p:txBody>
+      </p:sp>
+      <p:sp>
+        <p:nvSpPr>
+          <p:cNvPr id="4" name="TextBox 3"/>
+          <p:cNvSpPr txBox="1"/>
+          <p:nvPr/>
+        </p:nvSpPr>
+        <p:spPr>
+          <a:xfrm>
+            <a:off x="640080" y="2985516"/>
+            <a:ext cx="10911535" cy="731520"/>
+          </a:xfrm>
+          <a:prstGeom prst="rect">
+            <a:avLst/>
+          </a:prstGeom>
+          <a:noFill/>
+        </p:spPr>
+        <p:txBody>
+          <a:bodyPr wrap="square">
+            <a:spAutoFit/>
+          </a:bodyPr>
+          <a:lstStyle/>
+          <a:p>
+            <a:pPr algn="ctr"/>
+            <a:r>
+              <a:rPr sz="4800" b="1" i="0">
+                <a:solidFill>
+                  <a:srgbClr val="FFFFFF"/>
+                </a:solidFill>
+                <a:latin typeface="Arial"/>
+              </a:rPr>
+              <a:t>Thank You, Jesus 洗いきよめた</a:t>
+            </a:r>
+          </a:p>
+        </p:txBody>
+      </p:sp>
+      <p:sp>
+        <p:nvSpPr>
+          <p:cNvPr id="5" name="TextBox 4"/>
+          <p:cNvSpPr txBox="1"/>
+          <p:nvPr/>
+        </p:nvSpPr>
+        <p:spPr>
+          <a:xfrm>
+            <a:off x="640080" y="3753612"/>
+            <a:ext cx="10911535" cy="365760"/>
+          </a:xfrm>
+          <a:prstGeom prst="rect">
+            <a:avLst/>
+          </a:prstGeom>
+          <a:noFill/>
+        </p:spPr>
+        <p:txBody>
+          <a:bodyPr wrap="square">
+            <a:spAutoFit/>
+          </a:bodyPr>
+          <a:lstStyle/>
+          <a:p>
+            <a:pPr algn="ctr"/>
+            <a:r>
+              <a:rPr sz="2400" b="0" i="1">
+                <a:solidFill>
+                  <a:srgbClr val="AAAAAA"/>
+                </a:solidFill>
+                <a:latin typeface="Arial"/>
+              </a:rPr>
+              <a:t>arai kiyometa</a:t>
+            </a:r>
+          </a:p>
+        </p:txBody>
+      </p:sp>
+      <p:sp>
+        <p:nvSpPr>
+          <p:cNvPr id="6" name="TextBox 5"/>
+          <p:cNvSpPr txBox="1"/>
+          <p:nvPr/>
+        </p:nvSpPr>
+        <p:spPr>
+          <a:xfrm>
+            <a:off x="640080" y="4530852"/>
+            <a:ext cx="10911535" cy="310896"/>
+          </a:xfrm>
+          <a:prstGeom prst="rect">
+            <a:avLst/>
+          </a:prstGeom>
+          <a:noFill/>
+        </p:spPr>
+        <p:txBody>
+          <a:bodyPr wrap="square">
+            <a:spAutoFit/>
+          </a:bodyPr>
+          <a:lstStyle/>
+          <a:p>
+            <a:pPr algn="ctr"/>
+            <a:r>
+              <a:rPr sz="2000" b="0" i="1">
+                <a:solidFill>
+                  <a:srgbClr val="828282"/>
+                </a:solidFill>
+                <a:latin typeface="Arial"/>
+              </a:rPr>
+              <a:t>Quebraste minhas correntes</a:t>
+            </a:r>
+          </a:p>
+        </p:txBody>
+      </p:sp>
+      <p:sp>
+        <p:nvSpPr>
+          <p:cNvPr id="7" name="TextBox 6"/>
+          <p:cNvSpPr txBox="1"/>
+          <p:nvPr/>
+        </p:nvSpPr>
+        <p:spPr>
+          <a:xfrm>
+            <a:off x="640080" y="4896612"/>
+            <a:ext cx="10911535" cy="310896"/>
+          </a:xfrm>
+          <a:prstGeom prst="rect">
+            <a:avLst/>
+          </a:prstGeom>
+          <a:noFill/>
+        </p:spPr>
+        <p:txBody>
+          <a:bodyPr wrap="square">
+            <a:spAutoFit/>
+          </a:bodyPr>
+          <a:lstStyle/>
+          <a:p>
+            <a:pPr algn="ctr"/>
+            <a:r>
+              <a:rPr sz="2000" b="0" i="1">
+                <a:solidFill>
+                  <a:srgbClr val="828282"/>
+                </a:solidFill>
+                <a:latin typeface="Arial"/>
+              </a:rPr>
+              <a:t>Libertaste minha alma</a:t>
+            </a:r>
+          </a:p>
+        </p:txBody>
+      </p:sp>
+    </p:spTree>
+  </p:cSld>
+  <p:clrMapOvr>
+    <a:masterClrMapping/>
+  </p:clrMapOvr>
+</p:sld>
+</file>
+
+<file path=ppt/slides/slide26.xml><?xml version="1.0" encoding="utf-8"?>
+<p:sld xmlns:a="http://schemas.openxmlformats.org/drawingml/2006/main" xmlns:p="http://schemas.openxmlformats.org/presentationml/2006/main" xmlns:r="http://schemas.openxmlformats.org/officeDocument/2006/relationships">
+  <p:cSld>
+    <p:bg>
+      <p:bgPr>
+        <a:solidFill>
+          <a:srgbClr val="000000"/>
+        </a:solidFill>
+        <a:effectLst/>
+      </p:bgPr>
+    </p:bg>
+    <p:spTree>
+      <p:nvGrpSpPr>
+        <p:cNvPr id="1" name=""/>
+        <p:cNvGrpSpPr/>
+        <p:nvPr/>
+      </p:nvGrpSpPr>
+      <p:grpSpPr/>
+      <p:sp>
+        <p:nvSpPr>
+          <p:cNvPr id="2" name="TextBox 1"/>
+          <p:cNvSpPr txBox="1"/>
+          <p:nvPr/>
+        </p:nvSpPr>
+        <p:spPr>
+          <a:xfrm>
+            <a:off x="640080" y="1650492"/>
+            <a:ext cx="10911535" cy="731520"/>
+          </a:xfrm>
+          <a:prstGeom prst="rect">
+            <a:avLst/>
+          </a:prstGeom>
+          <a:noFill/>
+        </p:spPr>
+        <p:txBody>
+          <a:bodyPr wrap="square">
+            <a:spAutoFit/>
+          </a:bodyPr>
+          <a:lstStyle/>
+          <a:p>
+            <a:pPr algn="ctr"/>
+            <a:r>
+              <a:rPr sz="4800" b="1" i="0">
+                <a:solidFill>
+                  <a:srgbClr val="FFFFFF"/>
+                </a:solidFill>
+                <a:latin typeface="Arial"/>
+              </a:rPr>
+              <a:t>Thank You, Jesus 救ってくれた</a:t>
+            </a:r>
+          </a:p>
+        </p:txBody>
+      </p:sp>
+      <p:sp>
+        <p:nvSpPr>
+          <p:cNvPr id="3" name="TextBox 2"/>
+          <p:cNvSpPr txBox="1"/>
+          <p:nvPr/>
+        </p:nvSpPr>
+        <p:spPr>
+          <a:xfrm>
+            <a:off x="640080" y="2418588"/>
+            <a:ext cx="10911535" cy="365760"/>
+          </a:xfrm>
+          <a:prstGeom prst="rect">
+            <a:avLst/>
+          </a:prstGeom>
+          <a:noFill/>
+        </p:spPr>
+        <p:txBody>
+          <a:bodyPr wrap="square">
+            <a:spAutoFit/>
+          </a:bodyPr>
+          <a:lstStyle/>
+          <a:p>
+            <a:pPr algn="ctr"/>
+            <a:r>
+              <a:rPr sz="2400" b="0" i="1">
+                <a:solidFill>
+                  <a:srgbClr val="AAAAAA"/>
+                </a:solidFill>
+                <a:latin typeface="Arial"/>
+              </a:rPr>
+              <a:t>sukutte kureta</a:t>
+            </a:r>
+          </a:p>
+        </p:txBody>
+      </p:sp>
+      <p:sp>
+        <p:nvSpPr>
+          <p:cNvPr id="4" name="TextBox 3"/>
+          <p:cNvSpPr txBox="1"/>
+          <p:nvPr/>
+        </p:nvSpPr>
+        <p:spPr>
+          <a:xfrm>
+            <a:off x="640080" y="2985516"/>
+            <a:ext cx="10911535" cy="731520"/>
+          </a:xfrm>
+          <a:prstGeom prst="rect">
+            <a:avLst/>
+          </a:prstGeom>
+          <a:noFill/>
+        </p:spPr>
+        <p:txBody>
+          <a:bodyPr wrap="square">
+            <a:spAutoFit/>
+          </a:bodyPr>
+          <a:lstStyle/>
+          <a:p>
+            <a:pPr algn="ctr"/>
+            <a:r>
+              <a:rPr sz="4800" b="1" i="0">
+                <a:solidFill>
+                  <a:srgbClr val="FFFFFF"/>
+                </a:solidFill>
+                <a:latin typeface="Arial"/>
+              </a:rPr>
+              <a:t>暗闇から、      光の中へ</a:t>
+            </a:r>
+          </a:p>
+        </p:txBody>
+      </p:sp>
+      <p:sp>
+        <p:nvSpPr>
+          <p:cNvPr id="5" name="TextBox 4"/>
+          <p:cNvSpPr txBox="1"/>
+          <p:nvPr/>
+        </p:nvSpPr>
+        <p:spPr>
+          <a:xfrm>
+            <a:off x="640080" y="3753612"/>
+            <a:ext cx="10911535" cy="365760"/>
+          </a:xfrm>
+          <a:prstGeom prst="rect">
+            <a:avLst/>
+          </a:prstGeom>
+          <a:noFill/>
+        </p:spPr>
+        <p:txBody>
+          <a:bodyPr wrap="square">
+            <a:spAutoFit/>
+          </a:bodyPr>
+          <a:lstStyle/>
+          <a:p>
+            <a:pPr algn="ctr"/>
+            <a:r>
+              <a:rPr sz="2400" b="0" i="1">
+                <a:solidFill>
+                  <a:srgbClr val="AAAAAA"/>
+                </a:solidFill>
+                <a:latin typeface="Arial"/>
+              </a:rPr>
+              <a:t>kurayami kara, hikari no naka he</a:t>
+            </a:r>
+          </a:p>
+        </p:txBody>
+      </p:sp>
+      <p:sp>
+        <p:nvSpPr>
+          <p:cNvPr id="6" name="TextBox 5"/>
+          <p:cNvSpPr txBox="1"/>
+          <p:nvPr/>
+        </p:nvSpPr>
+        <p:spPr>
+          <a:xfrm>
+            <a:off x="640080" y="4530852"/>
+            <a:ext cx="10911535" cy="310896"/>
+          </a:xfrm>
+          <a:prstGeom prst="rect">
+            <a:avLst/>
+          </a:prstGeom>
+          <a:noFill/>
+        </p:spPr>
+        <p:txBody>
+          <a:bodyPr wrap="square">
+            <a:spAutoFit/>
+          </a:bodyPr>
+          <a:lstStyle/>
+          <a:p>
+            <a:pPr algn="ctr"/>
+            <a:r>
+              <a:rPr sz="2000" b="0" i="1">
+                <a:solidFill>
+                  <a:srgbClr val="828282"/>
+                </a:solidFill>
+                <a:latin typeface="Arial"/>
+              </a:rPr>
+              <a:t>Pela primeira vez tive esperança</a:t>
+            </a:r>
+          </a:p>
+        </p:txBody>
+      </p:sp>
+      <p:sp>
+        <p:nvSpPr>
+          <p:cNvPr id="7" name="TextBox 6"/>
+          <p:cNvSpPr txBox="1"/>
+          <p:nvPr/>
+        </p:nvSpPr>
+        <p:spPr>
+          <a:xfrm>
+            <a:off x="640080" y="4896612"/>
+            <a:ext cx="10911535" cy="310896"/>
+          </a:xfrm>
+          <a:prstGeom prst="rect">
+            <a:avLst/>
+          </a:prstGeom>
+          <a:noFill/>
+        </p:spPr>
+        <p:txBody>
+          <a:bodyPr wrap="square">
+            <a:spAutoFit/>
+          </a:bodyPr>
+          <a:lstStyle/>
+          <a:p>
+            <a:pPr algn="ctr"/>
+            <a:r>
+              <a:rPr sz="2000" b="0" i="1">
+                <a:solidFill>
+                  <a:srgbClr val="828282"/>
+                </a:solidFill>
+                <a:latin typeface="Arial"/>
+              </a:rPr>
+              <a:t>Obrigado, Jesus, pelo sangue derramado</a:t>
+            </a:r>
+          </a:p>
+        </p:txBody>
+      </p:sp>
+    </p:spTree>
+  </p:cSld>
+  <p:clrMapOvr>
+    <a:masterClrMapping/>
+  </p:clrMapOvr>
+</p:sld>
+</file>
+
+<file path=ppt/slides/slide27.xml><?xml version="1.0" encoding="utf-8"?>
+<p:sld xmlns:a="http://schemas.openxmlformats.org/drawingml/2006/main" xmlns:p="http://schemas.openxmlformats.org/presentationml/2006/main" xmlns:r="http://schemas.openxmlformats.org/officeDocument/2006/relationships">
+  <p:cSld>
+    <p:bg>
+      <p:bgPr>
+        <a:solidFill>
+          <a:srgbClr val="000000"/>
+        </a:solidFill>
+        <a:effectLst/>
+      </p:bgPr>
+    </p:bg>
+    <p:spTree>
+      <p:nvGrpSpPr>
+        <p:cNvPr id="1" name=""/>
+        <p:cNvGrpSpPr/>
+        <p:nvPr/>
+      </p:nvGrpSpPr>
+      <p:grpSpPr/>
+      <p:sp>
+        <p:nvSpPr>
+          <p:cNvPr id="2" name="TextBox 1"/>
+          <p:cNvSpPr txBox="1"/>
+          <p:nvPr/>
+        </p:nvSpPr>
+        <p:spPr>
+          <a:xfrm>
+            <a:off x="640080" y="2052828"/>
+            <a:ext cx="10911535" cy="731520"/>
+          </a:xfrm>
+          <a:prstGeom prst="rect">
+            <a:avLst/>
+          </a:prstGeom>
+          <a:noFill/>
+        </p:spPr>
+        <p:txBody>
+          <a:bodyPr wrap="square">
+            <a:spAutoFit/>
+          </a:bodyPr>
+          <a:lstStyle/>
+          <a:p>
+            <a:pPr algn="ctr"/>
+            <a:r>
+              <a:rPr sz="4800" b="1" i="0">
+                <a:solidFill>
+                  <a:srgbClr val="FFFFFF"/>
+                </a:solidFill>
+                <a:latin typeface="Arial"/>
+              </a:rPr>
+              <a:t>Quebraste minhas correntes</a:t>
+            </a:r>
+          </a:p>
+        </p:txBody>
+      </p:sp>
+      <p:sp>
+        <p:nvSpPr>
+          <p:cNvPr id="3" name="TextBox 2"/>
+          <p:cNvSpPr txBox="1"/>
+          <p:nvPr/>
+        </p:nvSpPr>
+        <p:spPr>
+          <a:xfrm>
+            <a:off x="640080" y="2985516"/>
+            <a:ext cx="10911535" cy="731520"/>
+          </a:xfrm>
+          <a:prstGeom prst="rect">
+            <a:avLst/>
+          </a:prstGeom>
+          <a:noFill/>
+        </p:spPr>
+        <p:txBody>
+          <a:bodyPr wrap="square">
+            <a:spAutoFit/>
+          </a:bodyPr>
+          <a:lstStyle/>
+          <a:p>
+            <a:pPr algn="ctr"/>
+            <a:r>
+              <a:rPr sz="4800" b="1" i="0">
+                <a:solidFill>
+                  <a:srgbClr val="FFFFFF"/>
+                </a:solidFill>
+                <a:latin typeface="Arial"/>
+              </a:rPr>
+              <a:t>Libertaste minha alma</a:t>
+            </a:r>
+          </a:p>
+        </p:txBody>
+      </p:sp>
+      <p:sp>
+        <p:nvSpPr>
+          <p:cNvPr id="4" name="TextBox 3"/>
+          <p:cNvSpPr txBox="1"/>
+          <p:nvPr/>
+        </p:nvSpPr>
+        <p:spPr>
+          <a:xfrm>
+            <a:off x="640080" y="4128516"/>
+            <a:ext cx="10911535" cy="310896"/>
+          </a:xfrm>
+          <a:prstGeom prst="rect">
+            <a:avLst/>
+          </a:prstGeom>
+          <a:noFill/>
+        </p:spPr>
+        <p:txBody>
+          <a:bodyPr wrap="square">
+            <a:spAutoFit/>
+          </a:bodyPr>
+          <a:lstStyle/>
+          <a:p>
+            <a:pPr algn="ctr"/>
+            <a:r>
+              <a:rPr sz="2000" b="0" i="0">
+                <a:solidFill>
+                  <a:srgbClr val="828282"/>
+                </a:solidFill>
+                <a:latin typeface="Arial"/>
+              </a:rPr>
+              <a:t>Thank You, Jesus あなたの血が</a:t>
+            </a:r>
+          </a:p>
+        </p:txBody>
+      </p:sp>
+      <p:sp>
+        <p:nvSpPr>
+          <p:cNvPr id="5" name="TextBox 4"/>
+          <p:cNvSpPr txBox="1"/>
+          <p:nvPr/>
+        </p:nvSpPr>
+        <p:spPr>
+          <a:xfrm>
+            <a:off x="640080" y="4494276"/>
+            <a:ext cx="10911535" cy="310896"/>
+          </a:xfrm>
+          <a:prstGeom prst="rect">
+            <a:avLst/>
+          </a:prstGeom>
+          <a:noFill/>
+        </p:spPr>
+        <p:txBody>
+          <a:bodyPr wrap="square">
+            <a:spAutoFit/>
+          </a:bodyPr>
+          <a:lstStyle/>
+          <a:p>
+            <a:pPr algn="ctr"/>
+            <a:r>
+              <a:rPr sz="2000" b="0" i="0">
+                <a:solidFill>
+                  <a:srgbClr val="828282"/>
+                </a:solidFill>
+                <a:latin typeface="Arial"/>
+              </a:rPr>
+              <a:t>Thank You, Jesus 洗いきよめた</a:t>
+            </a:r>
+          </a:p>
+        </p:txBody>
+      </p:sp>
+    </p:spTree>
+  </p:cSld>
+  <p:clrMapOvr>
+    <a:masterClrMapping/>
+  </p:clrMapOvr>
+</p:sld>
+</file>
+
+<file path=ppt/slides/slide28.xml><?xml version="1.0" encoding="utf-8"?>
+<p:sld xmlns:a="http://schemas.openxmlformats.org/drawingml/2006/main" xmlns:p="http://schemas.openxmlformats.org/presentationml/2006/main" xmlns:r="http://schemas.openxmlformats.org/officeDocument/2006/relationships">
+  <p:cSld>
+    <p:bg>
+      <p:bgPr>
+        <a:solidFill>
+          <a:srgbClr val="000000"/>
+        </a:solidFill>
+        <a:effectLst/>
+      </p:bgPr>
+    </p:bg>
+    <p:spTree>
+      <p:nvGrpSpPr>
+        <p:cNvPr id="1" name=""/>
+        <p:cNvGrpSpPr/>
+        <p:nvPr/>
+      </p:nvGrpSpPr>
+      <p:grpSpPr/>
+      <p:sp>
+        <p:nvSpPr>
+          <p:cNvPr id="2" name="TextBox 1"/>
+          <p:cNvSpPr txBox="1"/>
+          <p:nvPr/>
+        </p:nvSpPr>
+        <p:spPr>
+          <a:xfrm>
+            <a:off x="640080" y="2052828"/>
+            <a:ext cx="10911535" cy="731520"/>
+          </a:xfrm>
+          <a:prstGeom prst="rect">
+            <a:avLst/>
+          </a:prstGeom>
+          <a:noFill/>
+        </p:spPr>
+        <p:txBody>
+          <a:bodyPr wrap="square">
+            <a:spAutoFit/>
+          </a:bodyPr>
+          <a:lstStyle/>
+          <a:p>
+            <a:pPr algn="ctr"/>
+            <a:r>
+              <a:rPr sz="4800" b="1" i="0">
+                <a:solidFill>
+                  <a:srgbClr val="FFFFFF"/>
+                </a:solidFill>
+                <a:latin typeface="Arial"/>
+              </a:rPr>
+              <a:t>Pela primeira vez tive esperança</a:t>
+            </a:r>
+          </a:p>
+        </p:txBody>
+      </p:sp>
+      <p:sp>
+        <p:nvSpPr>
+          <p:cNvPr id="3" name="TextBox 2"/>
+          <p:cNvSpPr txBox="1"/>
+          <p:nvPr/>
+        </p:nvSpPr>
+        <p:spPr>
+          <a:xfrm>
+            <a:off x="640080" y="2985516"/>
+            <a:ext cx="10911535" cy="731520"/>
+          </a:xfrm>
+          <a:prstGeom prst="rect">
+            <a:avLst/>
+          </a:prstGeom>
+          <a:noFill/>
+        </p:spPr>
+        <p:txBody>
+          <a:bodyPr wrap="square">
+            <a:spAutoFit/>
+          </a:bodyPr>
+          <a:lstStyle/>
+          <a:p>
+            <a:pPr algn="ctr"/>
+            <a:r>
+              <a:rPr sz="4000" b="1" i="0">
+                <a:solidFill>
+                  <a:srgbClr val="FFFFFF"/>
+                </a:solidFill>
+                <a:latin typeface="Arial"/>
+              </a:rPr>
+              <a:t>Obrigado, Jesus, pelo sangue derramado</a:t>
+            </a:r>
+          </a:p>
+        </p:txBody>
+      </p:sp>
+      <p:sp>
+        <p:nvSpPr>
+          <p:cNvPr id="4" name="TextBox 3"/>
+          <p:cNvSpPr txBox="1"/>
+          <p:nvPr/>
+        </p:nvSpPr>
+        <p:spPr>
+          <a:xfrm>
+            <a:off x="640080" y="4128516"/>
+            <a:ext cx="10911535" cy="310896"/>
+          </a:xfrm>
+          <a:prstGeom prst="rect">
+            <a:avLst/>
+          </a:prstGeom>
+          <a:noFill/>
+        </p:spPr>
+        <p:txBody>
+          <a:bodyPr wrap="square">
+            <a:spAutoFit/>
+          </a:bodyPr>
+          <a:lstStyle/>
+          <a:p>
+            <a:pPr algn="ctr"/>
+            <a:r>
+              <a:rPr sz="2000" b="0" i="0">
+                <a:solidFill>
+                  <a:srgbClr val="828282"/>
+                </a:solidFill>
+                <a:latin typeface="Arial"/>
+              </a:rPr>
+              <a:t>Thank You, Jesus 救ってくれた</a:t>
+            </a:r>
+          </a:p>
+        </p:txBody>
+      </p:sp>
+      <p:sp>
+        <p:nvSpPr>
+          <p:cNvPr id="5" name="TextBox 4"/>
+          <p:cNvSpPr txBox="1"/>
+          <p:nvPr/>
+        </p:nvSpPr>
+        <p:spPr>
+          <a:xfrm>
+            <a:off x="640080" y="4494276"/>
+            <a:ext cx="10911535" cy="310896"/>
+          </a:xfrm>
+          <a:prstGeom prst="rect">
+            <a:avLst/>
+          </a:prstGeom>
+          <a:noFill/>
+        </p:spPr>
+        <p:txBody>
+          <a:bodyPr wrap="square">
+            <a:spAutoFit/>
+          </a:bodyPr>
+          <a:lstStyle/>
+          <a:p>
+            <a:pPr algn="ctr"/>
+            <a:r>
+              <a:rPr sz="2000" b="0" i="0">
+                <a:solidFill>
+                  <a:srgbClr val="828282"/>
+                </a:solidFill>
+                <a:latin typeface="Arial"/>
+              </a:rPr>
+              <a:t>暗闇から、      光の中へ</a:t>
+            </a:r>
+          </a:p>
+        </p:txBody>
+      </p:sp>
+    </p:spTree>
+  </p:cSld>
+  <p:clrMapOvr>
+    <a:masterClrMapping/>
+  </p:clrMapOvr>
+</p:sld>
+</file>
+
+<file path=ppt/slides/slide29.xml><?xml version="1.0" encoding="utf-8"?>
+<p:sld xmlns:a="http://schemas.openxmlformats.org/drawingml/2006/main" xmlns:p="http://schemas.openxmlformats.org/presentationml/2006/main" xmlns:r="http://schemas.openxmlformats.org/officeDocument/2006/relationships">
+  <p:cSld>
+    <p:bg>
+      <p:bgPr>
+        <a:solidFill>
+          <a:srgbClr val="000000"/>
+        </a:solidFill>
+        <a:effectLst/>
+      </p:bgPr>
+    </p:bg>
+    <p:spTree>
+      <p:nvGrpSpPr>
+        <p:cNvPr id="1" name=""/>
+        <p:cNvGrpSpPr/>
+        <p:nvPr/>
+      </p:nvGrpSpPr>
+      <p:grpSpPr/>
+      <p:sp>
+        <p:nvSpPr>
+          <p:cNvPr id="2" name="TextBox 1"/>
+          <p:cNvSpPr txBox="1"/>
+          <p:nvPr/>
+        </p:nvSpPr>
+        <p:spPr>
+          <a:xfrm>
+            <a:off x="640080" y="2052828"/>
+            <a:ext cx="10911535" cy="731520"/>
+          </a:xfrm>
+          <a:prstGeom prst="rect">
+            <a:avLst/>
+          </a:prstGeom>
+          <a:noFill/>
+        </p:spPr>
+        <p:txBody>
+          <a:bodyPr wrap="square">
+            <a:spAutoFit/>
+          </a:bodyPr>
+          <a:lstStyle/>
+          <a:p>
+            <a:pPr algn="ctr"/>
+            <a:r>
+              <a:rPr sz="4800" b="1" i="0">
+                <a:solidFill>
+                  <a:srgbClr val="FFFFFF"/>
+                </a:solidFill>
+                <a:latin typeface="Arial"/>
+              </a:rPr>
               <a:t>Andando nesse amor</a:t>
             </a:r>
           </a:p>
@@ -5764,99 +6654,29 @@
         </p:nvSpPr>
         <p:spPr>
           <a:xfrm>
-            <a:off x="594360" y="2980944"/>
-            <a:ext cx="11002975" cy="347472"/>
-          </a:xfrm>
-          <a:prstGeom prst="rect">
-            <a:avLst/>
-          </a:prstGeom>
-          <a:noFill/>
-        </p:spPr>
-        <p:txBody>
-          <a:bodyPr wrap="square">
-            <a:spAutoFit/>
-          </a:bodyPr>
-          <a:lstStyle/>
-          <a:p>
-            <a:pPr algn="ctr"/>
-            <a:r>
-              <a:rPr sz="2200" b="0" i="1">
-                <a:solidFill>
-                  <a:srgbClr val="8C8C8C"/>
-                </a:solidFill>
-                <a:latin typeface="Arial"/>
-              </a:rPr>
-              <a:t/>
-            </a:r>
-          </a:p>
-        </p:txBody>
-      </p:sp>
-      <p:sp>
-        <p:nvSpPr>
-          <p:cNvPr id="4" name="TextBox 3"/>
-          <p:cNvSpPr txBox="1"/>
-          <p:nvPr/>
-        </p:nvSpPr>
-        <p:spPr>
-          <a:xfrm>
-            <a:off x="594360" y="3529584"/>
-            <a:ext cx="11002975" cy="685800"/>
-          </a:xfrm>
-          <a:prstGeom prst="rect">
-            <a:avLst/>
-          </a:prstGeom>
-          <a:noFill/>
-        </p:spPr>
-        <p:txBody>
-          <a:bodyPr wrap="square">
-            <a:spAutoFit/>
-          </a:bodyPr>
-          <a:lstStyle/>
-          <a:p>
-            <a:pPr algn="ctr"/>
-            <a:r>
-              <a:rPr sz="4400" b="1" i="0">
+            <a:off x="640080" y="2985516"/>
+            <a:ext cx="10911535" cy="731520"/>
+          </a:xfrm>
+          <a:prstGeom prst="rect">
+            <a:avLst/>
+          </a:prstGeom>
+          <a:noFill/>
+        </p:spPr>
+        <p:txBody>
+          <a:bodyPr wrap="square">
+            <a:spAutoFit/>
+          </a:bodyPr>
+          <a:lstStyle/>
+          <a:p>
+            <a:pPr algn="ctr"/>
+            <a:r>
+              <a:rPr sz="4800" b="1" i="0">
                 <a:solidFill>
                   <a:srgbClr val="FFFFFF"/>
                 </a:solidFill>
                 <a:latin typeface="Arial"/>
               </a:rPr>
               <a:t>Obrigado, Jesus, pelo sangue</a:t>
-            </a:r>
-          </a:p>
-        </p:txBody>
-      </p:sp>
-      <p:sp>
-        <p:nvSpPr>
-          <p:cNvPr id="5" name="TextBox 4"/>
-          <p:cNvSpPr txBox="1"/>
-          <p:nvPr/>
-        </p:nvSpPr>
-        <p:spPr>
-          <a:xfrm>
-            <a:off x="594360" y="4251960"/>
-            <a:ext cx="11002975" cy="347472"/>
-          </a:xfrm>
-          <a:prstGeom prst="rect">
-            <a:avLst/>
-          </a:prstGeom>
-          <a:noFill/>
-        </p:spPr>
-        <p:txBody>
-          <a:bodyPr wrap="square">
-            <a:spAutoFit/>
-          </a:bodyPr>
-          <a:lstStyle/>
-          <a:p>
-            <a:pPr algn="ctr"/>
-            <a:r>
-              <a:rPr sz="2200" b="0" i="1">
-                <a:solidFill>
-                  <a:srgbClr val="8C8C8C"/>
-                </a:solidFill>
-                <a:latin typeface="Arial"/>
-              </a:rPr>
-              <a:t/>
             </a:r>
           </a:p>
         </p:txBody>
@@ -5895,23 +6715,23 @@
         </p:nvSpPr>
         <p:spPr>
           <a:xfrm>
-            <a:off x="594360" y="2258568"/>
-            <a:ext cx="11002975" cy="685800"/>
-          </a:xfrm>
-          <a:prstGeom prst="rect">
-            <a:avLst/>
-          </a:prstGeom>
-          <a:noFill/>
-        </p:spPr>
-        <p:txBody>
-          <a:bodyPr wrap="square">
-            <a:spAutoFit/>
-          </a:bodyPr>
-          <a:lstStyle/>
-          <a:p>
-            <a:pPr algn="ctr"/>
-            <a:r>
-              <a:rPr sz="4400" b="1" i="0">
+            <a:off x="640080" y="2052828"/>
+            <a:ext cx="10911535" cy="731520"/>
+          </a:xfrm>
+          <a:prstGeom prst="rect">
+            <a:avLst/>
+          </a:prstGeom>
+          <a:noFill/>
+        </p:spPr>
+        <p:txBody>
+          <a:bodyPr wrap="square">
+            <a:spAutoFit/>
+          </a:bodyPr>
+          <a:lstStyle/>
+          <a:p>
+            <a:pPr algn="ctr"/>
+            <a:r>
+              <a:rPr sz="4800" b="1" i="0">
                 <a:solidFill>
                   <a:srgbClr val="FFFFFF"/>
                 </a:solidFill>
@@ -5930,58 +6750,23 @@
         </p:nvSpPr>
         <p:spPr>
           <a:xfrm>
-            <a:off x="594360" y="2980944"/>
-            <a:ext cx="11002975" cy="347472"/>
-          </a:xfrm>
-          <a:prstGeom prst="rect">
-            <a:avLst/>
-          </a:prstGeom>
-          <a:noFill/>
-        </p:spPr>
-        <p:txBody>
-          <a:bodyPr wrap="square">
-            <a:spAutoFit/>
-          </a:bodyPr>
-          <a:lstStyle/>
-          <a:p>
-            <a:pPr algn="ctr"/>
-            <a:r>
-              <a:rPr sz="2200" b="0" i="1">
-                <a:solidFill>
-                  <a:srgbClr val="8C8C8C"/>
-                </a:solidFill>
-                <a:latin typeface="Arial"/>
-              </a:rPr>
-              <a:t/>
-            </a:r>
-          </a:p>
-        </p:txBody>
-      </p:sp>
-      <p:sp>
-        <p:nvSpPr>
-          <p:cNvPr id="4" name="TextBox 3"/>
-          <p:cNvSpPr txBox="1"/>
-          <p:nvPr/>
-        </p:nvSpPr>
-        <p:spPr>
-          <a:xfrm>
-            <a:off x="594360" y="3529584"/>
-            <a:ext cx="11002975" cy="685800"/>
-          </a:xfrm>
-          <a:prstGeom prst="rect">
-            <a:avLst/>
-          </a:prstGeom>
-          <a:noFill/>
-        </p:spPr>
-        <p:txBody>
-          <a:bodyPr wrap="square">
-            <a:spAutoFit/>
-          </a:bodyPr>
-          <a:lstStyle/>
-          <a:p>
-            <a:pPr algn="ctr"/>
-            <a:r>
-              <a:rPr sz="4400" b="1" i="0">
+            <a:off x="640080" y="2985516"/>
+            <a:ext cx="10911535" cy="731520"/>
+          </a:xfrm>
+          <a:prstGeom prst="rect">
+            <a:avLst/>
+          </a:prstGeom>
+          <a:noFill/>
+        </p:spPr>
+        <p:txBody>
+          <a:bodyPr wrap="square">
+            <a:spAutoFit/>
+          </a:bodyPr>
+          <a:lstStyle/>
+          <a:p>
+            <a:pPr algn="ctr"/>
+            <a:r>
+              <a:rPr sz="4800" b="1" i="0">
                 <a:solidFill>
                   <a:srgbClr val="FFFFFF"/>
                 </a:solidFill>
@@ -5992,37 +6777,98 @@
           </a:p>
         </p:txBody>
       </p:sp>
-      <p:sp>
-        <p:nvSpPr>
-          <p:cNvPr id="5" name="TextBox 4"/>
-          <p:cNvSpPr txBox="1"/>
-          <p:nvPr/>
-        </p:nvSpPr>
-        <p:spPr>
-          <a:xfrm>
-            <a:off x="594360" y="4251960"/>
-            <a:ext cx="11002975" cy="347472"/>
-          </a:xfrm>
-          <a:prstGeom prst="rect">
-            <a:avLst/>
-          </a:prstGeom>
-          <a:noFill/>
-        </p:spPr>
-        <p:txBody>
-          <a:bodyPr wrap="square">
-            <a:spAutoFit/>
-          </a:bodyPr>
-          <a:lstStyle/>
-          <a:p>
-            <a:pPr algn="ctr"/>
-            <a:r>
-              <a:rPr sz="2200" b="0" i="1">
-                <a:solidFill>
-                  <a:srgbClr val="8C8C8C"/>
-                </a:solidFill>
-                <a:latin typeface="Arial"/>
-              </a:rPr>
-              <a:t/>
+    </p:spTree>
+  </p:cSld>
+  <p:clrMapOvr>
+    <a:masterClrMapping/>
+  </p:clrMapOvr>
+</p:sld>
+</file>
+
+<file path=ppt/slides/slide30.xml><?xml version="1.0" encoding="utf-8"?>
+<p:sld xmlns:a="http://schemas.openxmlformats.org/drawingml/2006/main" xmlns:p="http://schemas.openxmlformats.org/presentationml/2006/main" xmlns:r="http://schemas.openxmlformats.org/officeDocument/2006/relationships">
+  <p:cSld>
+    <p:bg>
+      <p:bgPr>
+        <a:solidFill>
+          <a:srgbClr val="000000"/>
+        </a:solidFill>
+        <a:effectLst/>
+      </p:bgPr>
+    </p:bg>
+    <p:spTree>
+      <p:nvGrpSpPr>
+        <p:cNvPr id="1" name=""/>
+        <p:cNvGrpSpPr/>
+        <p:nvPr/>
+      </p:nvGrpSpPr>
+      <p:grpSpPr/>
+      <p:sp>
+        <p:nvSpPr>
+          <p:cNvPr id="2" name="TextBox 1"/>
+          <p:cNvSpPr txBox="1"/>
+          <p:nvPr/>
+        </p:nvSpPr>
+        <p:spPr>
+          <a:xfrm>
+            <a:off x="640080" y="2052828"/>
+            <a:ext cx="10911535" cy="731520"/>
+          </a:xfrm>
+          <a:prstGeom prst="rect">
+            <a:avLst/>
+          </a:prstGeom>
+          <a:noFill/>
+        </p:spPr>
+        <p:txBody>
+          <a:bodyPr wrap="square">
+            <a:spAutoFit/>
+          </a:bodyPr>
+          <a:lstStyle/>
+          <a:p>
+            <a:pPr algn="ctr"/>
+            <a:r>
+              <a:rPr sz="4800" b="1" i="0">
+                <a:solidFill>
+                  <a:srgbClr val="FFFFFF"/>
+                </a:solidFill>
+                <a:latin typeface="Arial"/>
+              </a:rPr>
+              <a:t>Andando nesse amor</a:t>
+            </a:r>
+          </a:p>
+        </p:txBody>
+      </p:sp>
+      <p:sp>
+        <p:nvSpPr>
+          <p:cNvPr id="3" name="TextBox 2"/>
+          <p:cNvSpPr txBox="1"/>
+          <p:nvPr/>
+        </p:nvSpPr>
+        <p:spPr>
+          <a:xfrm>
+            <a:off x="640080" y="2985516"/>
+            <a:ext cx="10911535" cy="731520"/>
+          </a:xfrm>
+          <a:prstGeom prst="rect">
+            <a:avLst/>
+          </a:prstGeom>
+          <a:noFill/>
+        </p:spPr>
+        <p:txBody>
+          <a:bodyPr wrap="square">
+            <a:spAutoFit/>
+          </a:bodyPr>
+          <a:lstStyle/>
+          <a:p>
+            <a:pPr algn="ctr"/>
+            <a:r>
+              <a:rPr sz="4800" b="1" i="0">
+                <a:solidFill>
+                  <a:srgbClr val="FFFFFF"/>
+                </a:solidFill>
+                <a:latin typeface="Arial"/>
+              </a:rPr>
+              <a:t>Obrigado, Jesus, pelo sangue</a:t>
             </a:r>
           </a:p>
         </p:txBody>
@@ -6061,23 +6907,23 @@
         </p:nvSpPr>
         <p:spPr>
           <a:xfrm>
-            <a:off x="594360" y="1837944"/>
-            <a:ext cx="11002975" cy="685800"/>
-          </a:xfrm>
-          <a:prstGeom prst="rect">
-            <a:avLst/>
-          </a:prstGeom>
-          <a:noFill/>
-        </p:spPr>
-        <p:txBody>
-          <a:bodyPr wrap="square">
-            <a:spAutoFit/>
-          </a:bodyPr>
-          <a:lstStyle/>
-          <a:p>
-            <a:pPr algn="ctr"/>
-            <a:r>
-              <a:rPr sz="4400" b="1" i="0">
+            <a:off x="640080" y="1650492"/>
+            <a:ext cx="10911535" cy="731520"/>
+          </a:xfrm>
+          <a:prstGeom prst="rect">
+            <a:avLst/>
+          </a:prstGeom>
+          <a:noFill/>
+        </p:spPr>
+        <p:txBody>
+          <a:bodyPr wrap="square">
+            <a:spAutoFit/>
+          </a:bodyPr>
+          <a:lstStyle/>
+          <a:p>
+            <a:pPr algn="ctr"/>
+            <a:r>
+              <a:rPr sz="4800" b="1" i="0">
                 <a:solidFill>
                   <a:srgbClr val="FFFFFF"/>
                 </a:solidFill>
@@ -6096,8 +6942,8 @@
         </p:nvSpPr>
         <p:spPr>
           <a:xfrm>
-            <a:off x="594360" y="2560320"/>
-            <a:ext cx="11002975" cy="384048"/>
+            <a:off x="640080" y="2418588"/>
+            <a:ext cx="10911535" cy="365760"/>
           </a:xfrm>
           <a:prstGeom prst="rect">
             <a:avLst/>
@@ -6114,7 +6960,7 @@
             <a:r>
               <a:rPr sz="2400" b="0" i="1">
                 <a:solidFill>
-                  <a:srgbClr val="B4B4B4"/>
+                  <a:srgbClr val="AAAAAA"/>
                 </a:solidFill>
                 <a:latin typeface="Arial"/>
               </a:rPr>
@@ -6131,8 +6977,78 @@
         </p:nvSpPr>
         <p:spPr>
           <a:xfrm>
-            <a:off x="594360" y="2980944"/>
-            <a:ext cx="11002975" cy="347472"/>
+            <a:off x="640080" y="2985516"/>
+            <a:ext cx="10911535" cy="731520"/>
+          </a:xfrm>
+          <a:prstGeom prst="rect">
+            <a:avLst/>
+          </a:prstGeom>
+          <a:noFill/>
+        </p:spPr>
+        <p:txBody>
+          <a:bodyPr wrap="square">
+            <a:spAutoFit/>
+          </a:bodyPr>
+          <a:lstStyle/>
+          <a:p>
+            <a:pPr algn="ctr"/>
+            <a:r>
+              <a:rPr sz="4800" b="1" i="0">
+                <a:solidFill>
+                  <a:srgbClr val="FFFFFF"/>
+                </a:solidFill>
+                <a:latin typeface="Arial"/>
+              </a:rPr>
+              <a:t>天の御座を捨て、ここに築いた</a:t>
+            </a:r>
+          </a:p>
+        </p:txBody>
+      </p:sp>
+      <p:sp>
+        <p:nvSpPr>
+          <p:cNvPr id="5" name="TextBox 4"/>
+          <p:cNvSpPr txBox="1"/>
+          <p:nvPr/>
+        </p:nvSpPr>
+        <p:spPr>
+          <a:xfrm>
+            <a:off x="640080" y="3753612"/>
+            <a:ext cx="10911535" cy="365760"/>
+          </a:xfrm>
+          <a:prstGeom prst="rect">
+            <a:avLst/>
+          </a:prstGeom>
+          <a:noFill/>
+        </p:spPr>
+        <p:txBody>
+          <a:bodyPr wrap="square">
+            <a:spAutoFit/>
+          </a:bodyPr>
+          <a:lstStyle/>
+          <a:p>
+            <a:pPr algn="ctr"/>
+            <a:r>
+              <a:rPr sz="2400" b="0" i="1">
+                <a:solidFill>
+                  <a:srgbClr val="AAAAAA"/>
+                </a:solidFill>
+                <a:latin typeface="Arial"/>
+              </a:rPr>
+              <a:t>ten no miza o sute, koko ni kizuita</a:t>
+            </a:r>
+          </a:p>
+        </p:txBody>
+      </p:sp>
+      <p:sp>
+        <p:nvSpPr>
+          <p:cNvPr id="6" name="TextBox 5"/>
+          <p:cNvSpPr txBox="1"/>
+          <p:nvPr/>
+        </p:nvSpPr>
+        <p:spPr>
+          <a:xfrm>
+            <a:off x="640080" y="4530852"/>
+            <a:ext cx="10911535" cy="310896"/>
           </a:xfrm>
           <a:prstGeom prst="rect">
             <a:avLst/>
@@ -6149,81 +7065,11 @@
             <a:r>
               <a:rPr sz="2000" b="0" i="1">
                 <a:solidFill>
-                  <a:srgbClr val="8C8C8C"/>
-                </a:solidFill>
-                <a:latin typeface="Arial"/>
-              </a:rPr>
-              <a:t/>
-            </a:r>
-          </a:p>
-        </p:txBody>
-      </p:sp>
-      <p:sp>
-        <p:nvSpPr>
-          <p:cNvPr id="5" name="TextBox 4"/>
-          <p:cNvSpPr txBox="1"/>
-          <p:nvPr/>
-        </p:nvSpPr>
-        <p:spPr>
-          <a:xfrm>
-            <a:off x="594360" y="3529584"/>
-            <a:ext cx="11002975" cy="685800"/>
-          </a:xfrm>
-          <a:prstGeom prst="rect">
-            <a:avLst/>
-          </a:prstGeom>
-          <a:noFill/>
-        </p:spPr>
-        <p:txBody>
-          <a:bodyPr wrap="square">
-            <a:spAutoFit/>
-          </a:bodyPr>
-          <a:lstStyle/>
-          <a:p>
-            <a:pPr algn="ctr"/>
-            <a:r>
-              <a:rPr sz="4400" b="1" i="0">
-                <a:solidFill>
-                  <a:srgbClr val="FFFFFF"/>
-                </a:solidFill>
-                <a:latin typeface="Arial"/>
-              </a:rPr>
-              <a:t>天の御座を捨て、ここに築いた</a:t>
-            </a:r>
-          </a:p>
-        </p:txBody>
-      </p:sp>
-      <p:sp>
-        <p:nvSpPr>
-          <p:cNvPr id="6" name="TextBox 5"/>
-          <p:cNvSpPr txBox="1"/>
-          <p:nvPr/>
-        </p:nvSpPr>
-        <p:spPr>
-          <a:xfrm>
-            <a:off x="594360" y="4251960"/>
-            <a:ext cx="11002975" cy="384048"/>
-          </a:xfrm>
-          <a:prstGeom prst="rect">
-            <a:avLst/>
-          </a:prstGeom>
-          <a:noFill/>
-        </p:spPr>
-        <p:txBody>
-          <a:bodyPr wrap="square">
-            <a:spAutoFit/>
-          </a:bodyPr>
-          <a:lstStyle/>
-          <a:p>
-            <a:pPr algn="ctr"/>
-            <a:r>
-              <a:rPr sz="2400" b="0" i="1">
-                <a:solidFill>
-                  <a:srgbClr val="B4B4B4"/>
-                </a:solidFill>
-                <a:latin typeface="Arial"/>
-              </a:rPr>
-              <a:t>ten no miza o sute, koko ni kizuita</a:t>
+                  <a:srgbClr val="828282"/>
+                </a:solidFill>
+                <a:latin typeface="Arial"/>
+              </a:rPr>
+              <a:t>Eu era perdido</a:t>
             </a:r>
           </a:p>
         </p:txBody>
@@ -6236,8 +7082,8 @@
         </p:nvSpPr>
         <p:spPr>
           <a:xfrm>
-            <a:off x="594360" y="4672584"/>
-            <a:ext cx="11002975" cy="347472"/>
+            <a:off x="640080" y="4896612"/>
+            <a:ext cx="10911535" cy="310896"/>
           </a:xfrm>
           <a:prstGeom prst="rect">
             <a:avLst/>
@@ -6254,11 +7100,11 @@
             <a:r>
               <a:rPr sz="2000" b="0" i="1">
                 <a:solidFill>
-                  <a:srgbClr val="8C8C8C"/>
-                </a:solidFill>
-                <a:latin typeface="Arial"/>
-              </a:rPr>
-              <a:t/>
+                  <a:srgbClr val="828282"/>
+                </a:solidFill>
+                <a:latin typeface="Arial"/>
+              </a:rPr>
+              <a:t>Eu lembro quem eu era</a:t>
             </a:r>
           </a:p>
         </p:txBody>
@@ -6297,23 +7143,23 @@
         </p:nvSpPr>
         <p:spPr>
           <a:xfrm>
-            <a:off x="594360" y="1837944"/>
-            <a:ext cx="11002975" cy="685800"/>
-          </a:xfrm>
-          <a:prstGeom prst="rect">
-            <a:avLst/>
-          </a:prstGeom>
-          <a:noFill/>
-        </p:spPr>
-        <p:txBody>
-          <a:bodyPr wrap="square">
-            <a:spAutoFit/>
-          </a:bodyPr>
-          <a:lstStyle/>
-          <a:p>
-            <a:pPr algn="ctr"/>
-            <a:r>
-              <a:rPr sz="4400" b="1" i="0">
+            <a:off x="640080" y="1650492"/>
+            <a:ext cx="10911535" cy="731520"/>
+          </a:xfrm>
+          <a:prstGeom prst="rect">
+            <a:avLst/>
+          </a:prstGeom>
+          <a:noFill/>
+        </p:spPr>
+        <p:txBody>
+          <a:bodyPr wrap="square">
+            <a:spAutoFit/>
+          </a:bodyPr>
+          <a:lstStyle/>
+          <a:p>
+            <a:pPr algn="ctr"/>
+            <a:r>
+              <a:rPr sz="4800" b="1" i="0">
                 <a:solidFill>
                   <a:srgbClr val="FFFFFF"/>
                 </a:solidFill>
@@ -6332,8 +7178,8 @@
         </p:nvSpPr>
         <p:spPr>
           <a:xfrm>
-            <a:off x="594360" y="2560320"/>
-            <a:ext cx="11002975" cy="384048"/>
+            <a:off x="640080" y="2418588"/>
+            <a:ext cx="10911535" cy="365760"/>
           </a:xfrm>
           <a:prstGeom prst="rect">
             <a:avLst/>
@@ -6350,7 +7196,7 @@
             <a:r>
               <a:rPr sz="2400" b="0" i="1">
                 <a:solidFill>
-                  <a:srgbClr val="B4B4B4"/>
+                  <a:srgbClr val="AAAAAA"/>
                 </a:solidFill>
                 <a:latin typeface="Arial"/>
               </a:rPr>
@@ -6367,8 +7213,78 @@
         </p:nvSpPr>
         <p:spPr>
           <a:xfrm>
-            <a:off x="594360" y="2980944"/>
-            <a:ext cx="11002975" cy="347472"/>
+            <a:off x="640080" y="2985516"/>
+            <a:ext cx="10911535" cy="731520"/>
+          </a:xfrm>
+          <a:prstGeom prst="rect">
+            <a:avLst/>
+          </a:prstGeom>
+          <a:noFill/>
+        </p:spPr>
+        <p:txBody>
+          <a:bodyPr wrap="square">
+            <a:spAutoFit/>
+          </a:bodyPr>
+          <a:lstStyle/>
+          <a:p>
+            <a:pPr algn="ctr"/>
+            <a:r>
+              <a:rPr sz="4800" b="1" i="0">
+                <a:solidFill>
+                  <a:srgbClr val="FFFFFF"/>
+                </a:solidFill>
+                <a:latin typeface="Arial"/>
+              </a:rPr>
+              <a:t>鎖を砕いて、自由をくれた</a:t>
+            </a:r>
+          </a:p>
+        </p:txBody>
+      </p:sp>
+      <p:sp>
+        <p:nvSpPr>
+          <p:cNvPr id="5" name="TextBox 4"/>
+          <p:cNvSpPr txBox="1"/>
+          <p:nvPr/>
+        </p:nvSpPr>
+        <p:spPr>
+          <a:xfrm>
+            <a:off x="640080" y="3753612"/>
+            <a:ext cx="10911535" cy="365760"/>
+          </a:xfrm>
+          <a:prstGeom prst="rect">
+            <a:avLst/>
+          </a:prstGeom>
+          <a:noFill/>
+        </p:spPr>
+        <p:txBody>
+          <a:bodyPr wrap="square">
+            <a:spAutoFit/>
+          </a:bodyPr>
+          <a:lstStyle/>
+          <a:p>
+            <a:pPr algn="ctr"/>
+            <a:r>
+              <a:rPr sz="2400" b="0" i="1">
+                <a:solidFill>
+                  <a:srgbClr val="AAAAAA"/>
+                </a:solidFill>
+                <a:latin typeface="Arial"/>
+              </a:rPr>
+              <a:t>kusari o kudaite, jiyuu o kureta</a:t>
+            </a:r>
+          </a:p>
+        </p:txBody>
+      </p:sp>
+      <p:sp>
+        <p:nvSpPr>
+          <p:cNvPr id="6" name="TextBox 5"/>
+          <p:cNvSpPr txBox="1"/>
+          <p:nvPr/>
+        </p:nvSpPr>
+        <p:spPr>
+          <a:xfrm>
+            <a:off x="640080" y="4530852"/>
+            <a:ext cx="10911535" cy="310896"/>
           </a:xfrm>
           <a:prstGeom prst="rect">
             <a:avLst/>
@@ -6385,81 +7301,11 @@
             <a:r>
               <a:rPr sz="2000" b="0" i="1">
                 <a:solidFill>
-                  <a:srgbClr val="8C8C8C"/>
-                </a:solidFill>
-                <a:latin typeface="Arial"/>
-              </a:rPr>
-              <a:t/>
-            </a:r>
-          </a:p>
-        </p:txBody>
-      </p:sp>
-      <p:sp>
-        <p:nvSpPr>
-          <p:cNvPr id="5" name="TextBox 4"/>
-          <p:cNvSpPr txBox="1"/>
-          <p:nvPr/>
-        </p:nvSpPr>
-        <p:spPr>
-          <a:xfrm>
-            <a:off x="594360" y="3529584"/>
-            <a:ext cx="11002975" cy="685800"/>
-          </a:xfrm>
-          <a:prstGeom prst="rect">
-            <a:avLst/>
-          </a:prstGeom>
-          <a:noFill/>
-        </p:spPr>
-        <p:txBody>
-          <a:bodyPr wrap="square">
-            <a:spAutoFit/>
-          </a:bodyPr>
-          <a:lstStyle/>
-          <a:p>
-            <a:pPr algn="ctr"/>
-            <a:r>
-              <a:rPr sz="4400" b="1" i="0">
-                <a:solidFill>
-                  <a:srgbClr val="FFFFFF"/>
-                </a:solidFill>
-                <a:latin typeface="Arial"/>
-              </a:rPr>
-              <a:t>鎖を砕いて、自由をくれた</a:t>
-            </a:r>
-          </a:p>
-        </p:txBody>
-      </p:sp>
-      <p:sp>
-        <p:nvSpPr>
-          <p:cNvPr id="6" name="TextBox 5"/>
-          <p:cNvSpPr txBox="1"/>
-          <p:nvPr/>
-        </p:nvSpPr>
-        <p:spPr>
-          <a:xfrm>
-            <a:off x="594360" y="4251960"/>
-            <a:ext cx="11002975" cy="384048"/>
-          </a:xfrm>
-          <a:prstGeom prst="rect">
-            <a:avLst/>
-          </a:prstGeom>
-          <a:noFill/>
-        </p:spPr>
-        <p:txBody>
-          <a:bodyPr wrap="square">
-            <a:spAutoFit/>
-          </a:bodyPr>
-          <a:lstStyle/>
-          <a:p>
-            <a:pPr algn="ctr"/>
-            <a:r>
-              <a:rPr sz="2400" b="0" i="1">
-                <a:solidFill>
-                  <a:srgbClr val="B4B4B4"/>
-                </a:solidFill>
-                <a:latin typeface="Arial"/>
-              </a:rPr>
-              <a:t>kusari o kudaite, jiyuu o kureta</a:t>
+                  <a:srgbClr val="828282"/>
+                </a:solidFill>
+                <a:latin typeface="Arial"/>
+              </a:rPr>
+              <a:t>Eu estava às trevas</a:t>
             </a:r>
           </a:p>
         </p:txBody>
@@ -6472,8 +7318,8 @@
         </p:nvSpPr>
         <p:spPr>
           <a:xfrm>
-            <a:off x="594360" y="4672584"/>
-            <a:ext cx="11002975" cy="347472"/>
+            <a:off x="640080" y="4896612"/>
+            <a:ext cx="10911535" cy="310896"/>
           </a:xfrm>
           <a:prstGeom prst="rect">
             <a:avLst/>
@@ -6490,11 +7336,11 @@
             <a:r>
               <a:rPr sz="2000" b="0" i="1">
                 <a:solidFill>
-                  <a:srgbClr val="8C8C8C"/>
-                </a:solidFill>
-                <a:latin typeface="Arial"/>
-              </a:rPr>
-              <a:t/>
+                  <a:srgbClr val="828282"/>
+                </a:solidFill>
+                <a:latin typeface="Arial"/>
+              </a:rPr>
+              <a:t>Eu estava cego</a:t>
             </a:r>
           </a:p>
         </p:txBody>
@@ -6533,29 +7379,29 @@
         </p:nvSpPr>
         <p:spPr>
           <a:xfrm>
-            <a:off x="594360" y="1837944"/>
-            <a:ext cx="11002975" cy="685800"/>
-          </a:xfrm>
-          <a:prstGeom prst="rect">
-            <a:avLst/>
-          </a:prstGeom>
-          <a:noFill/>
-        </p:spPr>
-        <p:txBody>
-          <a:bodyPr wrap="square">
-            <a:spAutoFit/>
-          </a:bodyPr>
-          <a:lstStyle/>
-          <a:p>
-            <a:pPr algn="ctr"/>
-            <a:r>
-              <a:rPr sz="4400" b="1" i="0">
+            <a:off x="640080" y="2052828"/>
+            <a:ext cx="10911535" cy="731520"/>
+          </a:xfrm>
+          <a:prstGeom prst="rect">
+            <a:avLst/>
+          </a:prstGeom>
+          <a:noFill/>
+        </p:spPr>
+        <p:txBody>
+          <a:bodyPr wrap="square">
+            <a:spAutoFit/>
+          </a:bodyPr>
+          <a:lstStyle/>
+          <a:p>
+            <a:pPr algn="ctr"/>
+            <a:r>
+              <a:rPr sz="4800" b="1" i="0">
                 <a:solidFill>
                   <a:srgbClr val="FFFFFF"/>
                 </a:solidFill>
                 <a:latin typeface="Arial"/>
               </a:rPr>
-              <a:t>私の   罪の代わりに</a:t>
+              <a:t>Quebraste minhas correntes</a:t>
             </a:r>
           </a:p>
         </p:txBody>
@@ -6568,29 +7414,29 @@
         </p:nvSpPr>
         <p:spPr>
           <a:xfrm>
-            <a:off x="594360" y="2560320"/>
-            <a:ext cx="11002975" cy="384048"/>
-          </a:xfrm>
-          <a:prstGeom prst="rect">
-            <a:avLst/>
-          </a:prstGeom>
-          <a:noFill/>
-        </p:spPr>
-        <p:txBody>
-          <a:bodyPr wrap="square">
-            <a:spAutoFit/>
-          </a:bodyPr>
-          <a:lstStyle/>
-          <a:p>
-            <a:pPr algn="ctr"/>
-            <a:r>
-              <a:rPr sz="2400" b="0" i="1">
-                <a:solidFill>
-                  <a:srgbClr val="B4B4B4"/>
-                </a:solidFill>
-                <a:latin typeface="Arial"/>
-              </a:rPr>
-              <a:t>watashi no tsumi no kawari ni</a:t>
+            <a:off x="640080" y="2985516"/>
+            <a:ext cx="10911535" cy="731520"/>
+          </a:xfrm>
+          <a:prstGeom prst="rect">
+            <a:avLst/>
+          </a:prstGeom>
+          <a:noFill/>
+        </p:spPr>
+        <p:txBody>
+          <a:bodyPr wrap="square">
+            <a:spAutoFit/>
+          </a:bodyPr>
+          <a:lstStyle/>
+          <a:p>
+            <a:pPr algn="ctr"/>
+            <a:r>
+              <a:rPr sz="4800" b="1" i="0">
+                <a:solidFill>
+                  <a:srgbClr val="FFFFFF"/>
+                </a:solidFill>
+                <a:latin typeface="Arial"/>
+              </a:rPr>
+              <a:t>Libertaste minha alma</a:t>
             </a:r>
           </a:p>
         </p:txBody>
@@ -6603,29 +7449,29 @@
         </p:nvSpPr>
         <p:spPr>
           <a:xfrm>
-            <a:off x="594360" y="2980944"/>
-            <a:ext cx="11002975" cy="347472"/>
-          </a:xfrm>
-          <a:prstGeom prst="rect">
-            <a:avLst/>
-          </a:prstGeom>
-          <a:noFill/>
-        </p:spPr>
-        <p:txBody>
-          <a:bodyPr wrap="square">
-            <a:spAutoFit/>
-          </a:bodyPr>
-          <a:lstStyle/>
-          <a:p>
-            <a:pPr algn="ctr"/>
-            <a:r>
-              <a:rPr sz="2000" b="0" i="1">
-                <a:solidFill>
-                  <a:srgbClr val="8C8C8C"/>
-                </a:solidFill>
-                <a:latin typeface="Arial"/>
-              </a:rPr>
-              <a:t/>
+            <a:off x="640080" y="4128516"/>
+            <a:ext cx="10911535" cy="310896"/>
+          </a:xfrm>
+          <a:prstGeom prst="rect">
+            <a:avLst/>
+          </a:prstGeom>
+          <a:noFill/>
+        </p:spPr>
+        <p:txBody>
+          <a:bodyPr wrap="square">
+            <a:spAutoFit/>
+          </a:bodyPr>
+          <a:lstStyle/>
+          <a:p>
+            <a:pPr algn="ctr"/>
+            <a:r>
+              <a:rPr sz="2000" b="0" i="0">
+                <a:solidFill>
+                  <a:srgbClr val="828282"/>
+                </a:solidFill>
+                <a:latin typeface="Arial"/>
+              </a:rPr>
+              <a:t>Thank You, Jesus あなたの血が</a:t>
             </a:r>
           </a:p>
         </p:txBody>
@@ -6638,99 +7484,29 @@
         </p:nvSpPr>
         <p:spPr>
           <a:xfrm>
-            <a:off x="594360" y="3529584"/>
-            <a:ext cx="11002975" cy="685800"/>
-          </a:xfrm>
-          <a:prstGeom prst="rect">
-            <a:avLst/>
-          </a:prstGeom>
-          <a:noFill/>
-        </p:spPr>
-        <p:txBody>
-          <a:bodyPr wrap="square">
-            <a:spAutoFit/>
-          </a:bodyPr>
-          <a:lstStyle/>
-          <a:p>
-            <a:pPr algn="ctr"/>
-            <a:r>
-              <a:rPr sz="4400" b="1" i="0">
-                <a:solidFill>
-                  <a:srgbClr val="FFFFFF"/>
-                </a:solidFill>
-                <a:latin typeface="Arial"/>
-              </a:rPr>
-              <a:t>墓に葬られて</a:t>
-            </a:r>
-          </a:p>
-        </p:txBody>
-      </p:sp>
-      <p:sp>
-        <p:nvSpPr>
-          <p:cNvPr id="6" name="TextBox 5"/>
-          <p:cNvSpPr txBox="1"/>
-          <p:nvPr/>
-        </p:nvSpPr>
-        <p:spPr>
-          <a:xfrm>
-            <a:off x="594360" y="4251960"/>
-            <a:ext cx="11002975" cy="384048"/>
-          </a:xfrm>
-          <a:prstGeom prst="rect">
-            <a:avLst/>
-          </a:prstGeom>
-          <a:noFill/>
-        </p:spPr>
-        <p:txBody>
-          <a:bodyPr wrap="square">
-            <a:spAutoFit/>
-          </a:bodyPr>
-          <a:lstStyle/>
-          <a:p>
-            <a:pPr algn="ctr"/>
-            <a:r>
-              <a:rPr sz="2400" b="0" i="1">
-                <a:solidFill>
-                  <a:srgbClr val="B4B4B4"/>
-                </a:solidFill>
-                <a:latin typeface="Arial"/>
-              </a:rPr>
-              <a:t>haka ni houmurarete</a:t>
-            </a:r>
-          </a:p>
-        </p:txBody>
-      </p:sp>
-      <p:sp>
-        <p:nvSpPr>
-          <p:cNvPr id="7" name="TextBox 6"/>
-          <p:cNvSpPr txBox="1"/>
-          <p:nvPr/>
-        </p:nvSpPr>
-        <p:spPr>
-          <a:xfrm>
-            <a:off x="594360" y="4672584"/>
-            <a:ext cx="11002975" cy="347472"/>
-          </a:xfrm>
-          <a:prstGeom prst="rect">
-            <a:avLst/>
-          </a:prstGeom>
-          <a:noFill/>
-        </p:spPr>
-        <p:txBody>
-          <a:bodyPr wrap="square">
-            <a:spAutoFit/>
-          </a:bodyPr>
-          <a:lstStyle/>
-          <a:p>
-            <a:pPr algn="ctr"/>
-            <a:r>
-              <a:rPr sz="2000" b="0" i="1">
-                <a:solidFill>
-                  <a:srgbClr val="8C8C8C"/>
-                </a:solidFill>
-                <a:latin typeface="Arial"/>
-              </a:rPr>
-              <a:t/>
+            <a:off x="640080" y="4494276"/>
+            <a:ext cx="10911535" cy="310896"/>
+          </a:xfrm>
+          <a:prstGeom prst="rect">
+            <a:avLst/>
+          </a:prstGeom>
+          <a:noFill/>
+        </p:spPr>
+        <p:txBody>
+          <a:bodyPr wrap="square">
+            <a:spAutoFit/>
+          </a:bodyPr>
+          <a:lstStyle/>
+          <a:p>
+            <a:pPr algn="ctr"/>
+            <a:r>
+              <a:rPr sz="2000" b="0" i="0">
+                <a:solidFill>
+                  <a:srgbClr val="828282"/>
+                </a:solidFill>
+                <a:latin typeface="Arial"/>
+              </a:rPr>
+              <a:t>Thank You, Jesus 洗いきよめた</a:t>
             </a:r>
           </a:p>
         </p:txBody>
@@ -6769,29 +7545,29 @@
         </p:nvSpPr>
         <p:spPr>
           <a:xfrm>
-            <a:off x="594360" y="1837944"/>
-            <a:ext cx="11002975" cy="685800"/>
-          </a:xfrm>
-          <a:prstGeom prst="rect">
-            <a:avLst/>
-          </a:prstGeom>
-          <a:noFill/>
-        </p:spPr>
-        <p:txBody>
-          <a:bodyPr wrap="square">
-            <a:spAutoFit/>
-          </a:bodyPr>
-          <a:lstStyle/>
-          <a:p>
-            <a:pPr algn="ctr"/>
-            <a:r>
-              <a:rPr sz="4400" b="1" i="0">
+            <a:off x="640080" y="2052828"/>
+            <a:ext cx="10911535" cy="731520"/>
+          </a:xfrm>
+          <a:prstGeom prst="rect">
+            <a:avLst/>
+          </a:prstGeom>
+          <a:noFill/>
+        </p:spPr>
+        <p:txBody>
+          <a:bodyPr wrap="square">
+            <a:spAutoFit/>
+          </a:bodyPr>
+          <a:lstStyle/>
+          <a:p>
+            <a:pPr algn="ctr"/>
+            <a:r>
+              <a:rPr sz="4800" b="1" i="0">
                 <a:solidFill>
                   <a:srgbClr val="FFFFFF"/>
                 </a:solidFill>
                 <a:latin typeface="Arial"/>
               </a:rPr>
-              <a:t>蘇られた</a:t>
+              <a:t>Pela primeira vez tive esperança</a:t>
             </a:r>
           </a:p>
         </p:txBody>
@@ -6804,29 +7580,29 @@
         </p:nvSpPr>
         <p:spPr>
           <a:xfrm>
-            <a:off x="594360" y="2560320"/>
-            <a:ext cx="11002975" cy="384048"/>
-          </a:xfrm>
-          <a:prstGeom prst="rect">
-            <a:avLst/>
-          </a:prstGeom>
-          <a:noFill/>
-        </p:spPr>
-        <p:txBody>
-          <a:bodyPr wrap="square">
-            <a:spAutoFit/>
-          </a:bodyPr>
-          <a:lstStyle/>
-          <a:p>
-            <a:pPr algn="ctr"/>
-            <a:r>
-              <a:rPr sz="2400" b="0" i="1">
-                <a:solidFill>
-                  <a:srgbClr val="B4B4B4"/>
-                </a:solidFill>
-                <a:latin typeface="Arial"/>
-              </a:rPr>
-              <a:t>yomigaerareta</a:t>
+            <a:off x="640080" y="2985516"/>
+            <a:ext cx="10911535" cy="731520"/>
+          </a:xfrm>
+          <a:prstGeom prst="rect">
+            <a:avLst/>
+          </a:prstGeom>
+          <a:noFill/>
+        </p:spPr>
+        <p:txBody>
+          <a:bodyPr wrap="square">
+            <a:spAutoFit/>
+          </a:bodyPr>
+          <a:lstStyle/>
+          <a:p>
+            <a:pPr algn="ctr"/>
+            <a:r>
+              <a:rPr sz="4000" b="1" i="0">
+                <a:solidFill>
+                  <a:srgbClr val="FFFFFF"/>
+                </a:solidFill>
+                <a:latin typeface="Arial"/>
+              </a:rPr>
+              <a:t>Obrigado, Jesus, pelo sangue derramado</a:t>
             </a:r>
           </a:p>
         </p:txBody>
@@ -6839,29 +7615,29 @@
         </p:nvSpPr>
         <p:spPr>
           <a:xfrm>
-            <a:off x="594360" y="2980944"/>
-            <a:ext cx="11002975" cy="347472"/>
-          </a:xfrm>
-          <a:prstGeom prst="rect">
-            <a:avLst/>
-          </a:prstGeom>
-          <a:noFill/>
-        </p:spPr>
-        <p:txBody>
-          <a:bodyPr wrap="square">
-            <a:spAutoFit/>
-          </a:bodyPr>
-          <a:lstStyle/>
-          <a:p>
-            <a:pPr algn="ctr"/>
-            <a:r>
-              <a:rPr sz="2000" b="0" i="1">
-                <a:solidFill>
-                  <a:srgbClr val="8C8C8C"/>
-                </a:solidFill>
-                <a:latin typeface="Arial"/>
-              </a:rPr>
-              <a:t/>
+            <a:off x="640080" y="4128516"/>
+            <a:ext cx="10911535" cy="310896"/>
+          </a:xfrm>
+          <a:prstGeom prst="rect">
+            <a:avLst/>
+          </a:prstGeom>
+          <a:noFill/>
+        </p:spPr>
+        <p:txBody>
+          <a:bodyPr wrap="square">
+            <a:spAutoFit/>
+          </a:bodyPr>
+          <a:lstStyle/>
+          <a:p>
+            <a:pPr algn="ctr"/>
+            <a:r>
+              <a:rPr sz="2000" b="0" i="0">
+                <a:solidFill>
+                  <a:srgbClr val="828282"/>
+                </a:solidFill>
+                <a:latin typeface="Arial"/>
+              </a:rPr>
+              <a:t>Thank You, Jesus 救ってくれた</a:t>
             </a:r>
           </a:p>
         </p:txBody>
@@ -6874,99 +7650,29 @@
         </p:nvSpPr>
         <p:spPr>
           <a:xfrm>
-            <a:off x="594360" y="3529584"/>
-            <a:ext cx="11002975" cy="685800"/>
-          </a:xfrm>
-          <a:prstGeom prst="rect">
-            <a:avLst/>
-          </a:prstGeom>
-          <a:noFill/>
-        </p:spPr>
-        <p:txBody>
-          <a:bodyPr wrap="square">
-            <a:spAutoFit/>
-          </a:bodyPr>
-          <a:lstStyle/>
-          <a:p>
-            <a:pPr algn="ctr"/>
-            <a:r>
-              <a:rPr sz="4400" b="1" i="0">
-                <a:solidFill>
-                  <a:srgbClr val="FFFFFF"/>
-                </a:solidFill>
-                <a:latin typeface="Arial"/>
-              </a:rPr>
-              <a:t>だから罪の   とげはもう無い</a:t>
-            </a:r>
-          </a:p>
-        </p:txBody>
-      </p:sp>
-      <p:sp>
-        <p:nvSpPr>
-          <p:cNvPr id="6" name="TextBox 5"/>
-          <p:cNvSpPr txBox="1"/>
-          <p:nvPr/>
-        </p:nvSpPr>
-        <p:spPr>
-          <a:xfrm>
-            <a:off x="594360" y="4251960"/>
-            <a:ext cx="11002975" cy="384048"/>
-          </a:xfrm>
-          <a:prstGeom prst="rect">
-            <a:avLst/>
-          </a:prstGeom>
-          <a:noFill/>
-        </p:spPr>
-        <p:txBody>
-          <a:bodyPr wrap="square">
-            <a:spAutoFit/>
-          </a:bodyPr>
-          <a:lstStyle/>
-          <a:p>
-            <a:pPr algn="ctr"/>
-            <a:r>
-              <a:rPr sz="2400" b="0" i="1">
-                <a:solidFill>
-                  <a:srgbClr val="B4B4B4"/>
-                </a:solidFill>
-                <a:latin typeface="Arial"/>
-              </a:rPr>
-              <a:t>dakara tsumi no toge wa mou nai</a:t>
-            </a:r>
-          </a:p>
-        </p:txBody>
-      </p:sp>
-      <p:sp>
-        <p:nvSpPr>
-          <p:cNvPr id="7" name="TextBox 6"/>
-          <p:cNvSpPr txBox="1"/>
-          <p:nvPr/>
-        </p:nvSpPr>
-        <p:spPr>
-          <a:xfrm>
-            <a:off x="594360" y="4672584"/>
-            <a:ext cx="11002975" cy="347472"/>
-          </a:xfrm>
-          <a:prstGeom prst="rect">
-            <a:avLst/>
-          </a:prstGeom>
-          <a:noFill/>
-        </p:spPr>
-        <p:txBody>
-          <a:bodyPr wrap="square">
-            <a:spAutoFit/>
-          </a:bodyPr>
-          <a:lstStyle/>
-          <a:p>
-            <a:pPr algn="ctr"/>
-            <a:r>
-              <a:rPr sz="2000" b="0" i="1">
-                <a:solidFill>
-                  <a:srgbClr val="8C8C8C"/>
-                </a:solidFill>
-                <a:latin typeface="Arial"/>
-              </a:rPr>
-              <a:t/>
+            <a:off x="640080" y="4494276"/>
+            <a:ext cx="10911535" cy="310896"/>
+          </a:xfrm>
+          <a:prstGeom prst="rect">
+            <a:avLst/>
+          </a:prstGeom>
+          <a:noFill/>
+        </p:spPr>
+        <p:txBody>
+          <a:bodyPr wrap="square">
+            <a:spAutoFit/>
+          </a:bodyPr>
+          <a:lstStyle/>
+          <a:p>
+            <a:pPr algn="ctr"/>
+            <a:r>
+              <a:rPr sz="2000" b="0" i="0">
+                <a:solidFill>
+                  <a:srgbClr val="828282"/>
+                </a:solidFill>
+                <a:latin typeface="Arial"/>
+              </a:rPr>
+              <a:t>暗闇から、      光の中へ</a:t>
             </a:r>
           </a:p>
         </p:txBody>
@@ -7005,29 +7711,29 @@
         </p:nvSpPr>
         <p:spPr>
           <a:xfrm>
-            <a:off x="594360" y="2683764"/>
-            <a:ext cx="11002975" cy="685800"/>
-          </a:xfrm>
-          <a:prstGeom prst="rect">
-            <a:avLst/>
-          </a:prstGeom>
-          <a:noFill/>
-        </p:spPr>
-        <p:txBody>
-          <a:bodyPr wrap="square">
-            <a:spAutoFit/>
-          </a:bodyPr>
-          <a:lstStyle/>
-          <a:p>
-            <a:pPr algn="ctr"/>
-            <a:r>
-              <a:rPr sz="4400" b="1" i="0">
+            <a:off x="640080" y="2052828"/>
+            <a:ext cx="10911535" cy="731520"/>
+          </a:xfrm>
+          <a:prstGeom prst="rect">
+            <a:avLst/>
+          </a:prstGeom>
+          <a:noFill/>
+        </p:spPr>
+        <p:txBody>
+          <a:bodyPr wrap="square">
+            <a:spAutoFit/>
+          </a:bodyPr>
+          <a:lstStyle/>
+          <a:p>
+            <a:pPr algn="ctr"/>
+            <a:r>
+              <a:rPr sz="4800" b="1" i="0">
                 <a:solidFill>
                   <a:srgbClr val="FFFFFF"/>
                 </a:solidFill>
                 <a:latin typeface="Arial"/>
               </a:rPr>
-              <a:t>子羊の血で、永久のいのちへ</a:t>
+              <a:t>Andando nesse amor</a:t>
             </a:r>
           </a:p>
         </p:txBody>
@@ -7040,64 +7746,29 @@
         </p:nvSpPr>
         <p:spPr>
           <a:xfrm>
-            <a:off x="594360" y="3406140"/>
-            <a:ext cx="11002975" cy="384048"/>
-          </a:xfrm>
-          <a:prstGeom prst="rect">
-            <a:avLst/>
-          </a:prstGeom>
-          <a:noFill/>
-        </p:spPr>
-        <p:txBody>
-          <a:bodyPr wrap="square">
-            <a:spAutoFit/>
-          </a:bodyPr>
-          <a:lstStyle/>
-          <a:p>
-            <a:pPr algn="ctr"/>
-            <a:r>
-              <a:rPr sz="2400" b="0" i="1">
-                <a:solidFill>
-                  <a:srgbClr val="B4B4B4"/>
-                </a:solidFill>
-                <a:latin typeface="Arial"/>
-              </a:rPr>
-              <a:t>kohitsuji no chi de, towa no inochi he</a:t>
-            </a:r>
-          </a:p>
-        </p:txBody>
-      </p:sp>
-      <p:sp>
-        <p:nvSpPr>
-          <p:cNvPr id="4" name="TextBox 3"/>
-          <p:cNvSpPr txBox="1"/>
-          <p:nvPr/>
-        </p:nvSpPr>
-        <p:spPr>
-          <a:xfrm>
-            <a:off x="594360" y="3826764"/>
-            <a:ext cx="11002975" cy="347472"/>
-          </a:xfrm>
-          <a:prstGeom prst="rect">
-            <a:avLst/>
-          </a:prstGeom>
-          <a:noFill/>
-        </p:spPr>
-        <p:txBody>
-          <a:bodyPr wrap="square">
-            <a:spAutoFit/>
-          </a:bodyPr>
-          <a:lstStyle/>
-          <a:p>
-            <a:pPr algn="ctr"/>
-            <a:r>
-              <a:rPr sz="2000" b="0" i="1">
-                <a:solidFill>
-                  <a:srgbClr val="8C8C8C"/>
-                </a:solidFill>
-                <a:latin typeface="Arial"/>
-              </a:rPr>
-              <a:t/>
+            <a:off x="640080" y="2985516"/>
+            <a:ext cx="10911535" cy="731520"/>
+          </a:xfrm>
+          <a:prstGeom prst="rect">
+            <a:avLst/>
+          </a:prstGeom>
+          <a:noFill/>
+        </p:spPr>
+        <p:txBody>
+          <a:bodyPr wrap="square">
+            <a:spAutoFit/>
+          </a:bodyPr>
+          <a:lstStyle/>
+          <a:p>
+            <a:pPr algn="ctr"/>
+            <a:r>
+              <a:rPr sz="4800" b="1" i="0">
+                <a:solidFill>
+                  <a:srgbClr val="FFFFFF"/>
+                </a:solidFill>
+                <a:latin typeface="Arial"/>
+              </a:rPr>
+              <a:t>Obrigado, Jesus, pelo sangue</a:t>
             </a:r>
           </a:p>
         </p:txBody>
@@ -7136,29 +7807,29 @@
         </p:nvSpPr>
         <p:spPr>
           <a:xfrm>
-            <a:off x="594360" y="2258568"/>
-            <a:ext cx="11002975" cy="685800"/>
-          </a:xfrm>
-          <a:prstGeom prst="rect">
-            <a:avLst/>
-          </a:prstGeom>
-          <a:noFill/>
-        </p:spPr>
-        <p:txBody>
-          <a:bodyPr wrap="square">
-            <a:spAutoFit/>
-          </a:bodyPr>
-          <a:lstStyle/>
-          <a:p>
-            <a:pPr algn="ctr"/>
-            <a:r>
-              <a:rPr sz="4400" b="1" i="0">
+            <a:off x="640080" y="2052828"/>
+            <a:ext cx="10911535" cy="731520"/>
+          </a:xfrm>
+          <a:prstGeom prst="rect">
+            <a:avLst/>
+          </a:prstGeom>
+          <a:noFill/>
+        </p:spPr>
+        <p:txBody>
+          <a:bodyPr wrap="square">
+            <a:spAutoFit/>
+          </a:bodyPr>
+          <a:lstStyle/>
+          <a:p>
+            <a:pPr algn="ctr"/>
+            <a:r>
+              <a:rPr sz="4800" b="1" i="0">
                 <a:solidFill>
                   <a:srgbClr val="FFFFFF"/>
                 </a:solidFill>
                 <a:latin typeface="Arial"/>
               </a:rPr>
-              <a:t>Tu me mantiveste no Teu olhar</a:t>
+              <a:t>Andando nesse amor</a:t>
             </a:r>
           </a:p>
         </p:txBody>
@@ -7171,99 +7842,29 @@
         </p:nvSpPr>
         <p:spPr>
           <a:xfrm>
-            <a:off x="594360" y="2980944"/>
-            <a:ext cx="11002975" cy="347472"/>
-          </a:xfrm>
-          <a:prstGeom prst="rect">
-            <a:avLst/>
-          </a:prstGeom>
-          <a:noFill/>
-        </p:spPr>
-        <p:txBody>
-          <a:bodyPr wrap="square">
-            <a:spAutoFit/>
-          </a:bodyPr>
-          <a:lstStyle/>
-          <a:p>
-            <a:pPr algn="ctr"/>
-            <a:r>
-              <a:rPr sz="2200" b="0" i="1">
-                <a:solidFill>
-                  <a:srgbClr val="8C8C8C"/>
-                </a:solidFill>
-                <a:latin typeface="Arial"/>
-              </a:rPr>
-              <a:t/>
-            </a:r>
-          </a:p>
-        </p:txBody>
-      </p:sp>
-      <p:sp>
-        <p:nvSpPr>
-          <p:cNvPr id="4" name="TextBox 3"/>
-          <p:cNvSpPr txBox="1"/>
-          <p:nvPr/>
-        </p:nvSpPr>
-        <p:spPr>
-          <a:xfrm>
-            <a:off x="594360" y="3529584"/>
-            <a:ext cx="11002975" cy="685800"/>
-          </a:xfrm>
-          <a:prstGeom prst="rect">
-            <a:avLst/>
-          </a:prstGeom>
-          <a:noFill/>
-        </p:spPr>
-        <p:txBody>
-          <a:bodyPr wrap="square">
-            <a:spAutoFit/>
-          </a:bodyPr>
-          <a:lstStyle/>
-          <a:p>
-            <a:pPr algn="ctr"/>
-            <a:r>
-              <a:rPr sz="4400" b="1" i="0">
+            <a:off x="640080" y="2985516"/>
+            <a:ext cx="10911535" cy="731520"/>
+          </a:xfrm>
+          <a:prstGeom prst="rect">
+            <a:avLst/>
+          </a:prstGeom>
+          <a:noFill/>
+        </p:spPr>
+        <p:txBody>
+          <a:bodyPr wrap="square">
+            <a:spAutoFit/>
+          </a:bodyPr>
+          <a:lstStyle/>
+          <a:p>
+            <a:pPr algn="ctr"/>
+            <a:r>
+              <a:rPr sz="4800" b="1" i="0">
                 <a:solidFill>
                   <a:srgbClr val="FFFFFF"/>
                 </a:solidFill>
                 <a:latin typeface="Arial"/>
               </a:rPr>
-              <a:t>E abriste um caminho</a:t>
-            </a:r>
-          </a:p>
-        </p:txBody>
-      </p:sp>
-      <p:sp>
-        <p:nvSpPr>
-          <p:cNvPr id="5" name="TextBox 4"/>
-          <p:cNvSpPr txBox="1"/>
-          <p:nvPr/>
-        </p:nvSpPr>
-        <p:spPr>
-          <a:xfrm>
-            <a:off x="594360" y="4251960"/>
-            <a:ext cx="11002975" cy="347472"/>
-          </a:xfrm>
-          <a:prstGeom prst="rect">
-            <a:avLst/>
-          </a:prstGeom>
-          <a:noFill/>
-        </p:spPr>
-        <p:txBody>
-          <a:bodyPr wrap="square">
-            <a:spAutoFit/>
-          </a:bodyPr>
-          <a:lstStyle/>
-          <a:p>
-            <a:pPr algn="ctr"/>
-            <a:r>
-              <a:rPr sz="2200" b="0" i="1">
-                <a:solidFill>
-                  <a:srgbClr val="8C8C8C"/>
-                </a:solidFill>
-                <a:latin typeface="Arial"/>
-              </a:rPr>
-              <a:t/>
+              <a:t>Obrigado, Jesus, pelo sangue</a:t>
             </a:r>
           </a:p>
         </p:txBody>

--- a/output_pptx/Thank_You_Jesus_For_The_Blood.pptx
+++ b/output_pptx/Thank_You_Jesus_For_The_Blood.pptx
@@ -3195,6 +3195,76 @@
           </a:p>
         </p:txBody>
       </p:sp>
+      <p:sp>
+        <p:nvSpPr>
+          <p:cNvPr id="4" name="TextBox 3"/>
+          <p:cNvSpPr txBox="1"/>
+          <p:nvPr/>
+        </p:nvSpPr>
+        <p:spPr>
+          <a:xfrm>
+            <a:off x="640080" y="4128516"/>
+            <a:ext cx="10911535" cy="310896"/>
+          </a:xfrm>
+          <a:prstGeom prst="rect">
+            <a:avLst/>
+          </a:prstGeom>
+          <a:noFill/>
+        </p:spPr>
+        <p:txBody>
+          <a:bodyPr wrap="square">
+            <a:spAutoFit/>
+          </a:bodyPr>
+          <a:lstStyle/>
+          <a:p>
+            <a:pPr algn="ctr"/>
+            <a:r>
+              <a:rPr sz="2000" b="0" i="0">
+                <a:solidFill>
+                  <a:srgbClr val="828282"/>
+                </a:solidFill>
+                <a:latin typeface="Arial"/>
+              </a:rPr>
+              <a:t>私は迷っていた</a:t>
+            </a:r>
+          </a:p>
+        </p:txBody>
+      </p:sp>
+      <p:sp>
+        <p:nvSpPr>
+          <p:cNvPr id="5" name="TextBox 4"/>
+          <p:cNvSpPr txBox="1"/>
+          <p:nvPr/>
+        </p:nvSpPr>
+        <p:spPr>
+          <a:xfrm>
+            <a:off x="640080" y="4494276"/>
+            <a:ext cx="10911535" cy="310896"/>
+          </a:xfrm>
+          <a:prstGeom prst="rect">
+            <a:avLst/>
+          </a:prstGeom>
+          <a:noFill/>
+        </p:spPr>
+        <p:txBody>
+          <a:bodyPr wrap="square">
+            <a:spAutoFit/>
+          </a:bodyPr>
+          <a:lstStyle/>
+          <a:p>
+            <a:pPr algn="ctr"/>
+            <a:r>
+              <a:rPr sz="2000" b="0" i="0">
+                <a:solidFill>
+                  <a:srgbClr val="828282"/>
+                </a:solidFill>
+                <a:latin typeface="Arial"/>
+              </a:rPr>
+              <a:t>私は以前の自分を覚えている</a:t>
+            </a:r>
+          </a:p>
+        </p:txBody>
+      </p:sp>
     </p:spTree>
   </p:cSld>
   <p:clrMapOvr>
@@ -4261,6 +4331,41 @@
           </a:p>
         </p:txBody>
       </p:sp>
+      <p:sp>
+        <p:nvSpPr>
+          <p:cNvPr id="5" name="TextBox 4"/>
+          <p:cNvSpPr txBox="1"/>
+          <p:nvPr/>
+        </p:nvSpPr>
+        <p:spPr>
+          <a:xfrm>
+            <a:off x="640080" y="4494276"/>
+            <a:ext cx="10911535" cy="310896"/>
+          </a:xfrm>
+          <a:prstGeom prst="rect">
+            <a:avLst/>
+          </a:prstGeom>
+          <a:noFill/>
+        </p:spPr>
+        <p:txBody>
+          <a:bodyPr wrap="square">
+            <a:spAutoFit/>
+          </a:bodyPr>
+          <a:lstStyle/>
+          <a:p>
+            <a:pPr algn="ctr"/>
+            <a:r>
+              <a:rPr sz="2000" b="0" i="0">
+                <a:solidFill>
+                  <a:srgbClr val="828282"/>
+                </a:solidFill>
+                <a:latin typeface="Arial"/>
+              </a:rPr>
+              <a:t>あなたは私が払うべき借金を払ってくださった</a:t>
+            </a:r>
+          </a:p>
+        </p:txBody>
+      </p:sp>
     </p:spTree>
   </p:cSld>
   <p:clrMapOvr>
@@ -4689,6 +4794,76 @@
           </a:p>
         </p:txBody>
       </p:sp>
+      <p:sp>
+        <p:nvSpPr>
+          <p:cNvPr id="4" name="TextBox 3"/>
+          <p:cNvSpPr txBox="1"/>
+          <p:nvPr/>
+        </p:nvSpPr>
+        <p:spPr>
+          <a:xfrm>
+            <a:off x="640080" y="4128516"/>
+            <a:ext cx="10911535" cy="310896"/>
+          </a:xfrm>
+          <a:prstGeom prst="rect">
+            <a:avLst/>
+          </a:prstGeom>
+          <a:noFill/>
+        </p:spPr>
+        <p:txBody>
+          <a:bodyPr wrap="square">
+            <a:spAutoFit/>
+          </a:bodyPr>
+          <a:lstStyle/>
+          <a:p>
+            <a:pPr algn="ctr"/>
+            <a:r>
+              <a:rPr sz="2000" b="0" i="0">
+                <a:solidFill>
+                  <a:srgbClr val="828282"/>
+                </a:solidFill>
+                <a:latin typeface="Arial"/>
+              </a:rPr>
+              <a:t>この愛の中を歩んで</a:t>
+            </a:r>
+          </a:p>
+        </p:txBody>
+      </p:sp>
+      <p:sp>
+        <p:nvSpPr>
+          <p:cNvPr id="5" name="TextBox 4"/>
+          <p:cNvSpPr txBox="1"/>
+          <p:nvPr/>
+        </p:nvSpPr>
+        <p:spPr>
+          <a:xfrm>
+            <a:off x="640080" y="4494276"/>
+            <a:ext cx="10911535" cy="310896"/>
+          </a:xfrm>
+          <a:prstGeom prst="rect">
+            <a:avLst/>
+          </a:prstGeom>
+          <a:noFill/>
+        </p:spPr>
+        <p:txBody>
+          <a:bodyPr wrap="square">
+            <a:spAutoFit/>
+          </a:bodyPr>
+          <a:lstStyle/>
+          <a:p>
+            <a:pPr algn="ctr"/>
+            <a:r>
+              <a:rPr sz="2000" b="0" i="0">
+                <a:solidFill>
+                  <a:srgbClr val="828282"/>
+                </a:solidFill>
+                <a:latin typeface="Arial"/>
+              </a:rPr>
+              <a:t>イエスよ、血のゆえに感謝します</a:t>
+            </a:r>
+          </a:p>
+        </p:txBody>
+      </p:sp>
     </p:spTree>
   </p:cSld>
   <p:clrMapOvr>
@@ -4785,6 +4960,76 @@
           </a:p>
         </p:txBody>
       </p:sp>
+      <p:sp>
+        <p:nvSpPr>
+          <p:cNvPr id="4" name="TextBox 3"/>
+          <p:cNvSpPr txBox="1"/>
+          <p:nvPr/>
+        </p:nvSpPr>
+        <p:spPr>
+          <a:xfrm>
+            <a:off x="640080" y="4128516"/>
+            <a:ext cx="10911535" cy="310896"/>
+          </a:xfrm>
+          <a:prstGeom prst="rect">
+            <a:avLst/>
+          </a:prstGeom>
+          <a:noFill/>
+        </p:spPr>
+        <p:txBody>
+          <a:bodyPr wrap="square">
+            <a:spAutoFit/>
+          </a:bodyPr>
+          <a:lstStyle/>
+          <a:p>
+            <a:pPr algn="ctr"/>
+            <a:r>
+              <a:rPr sz="2000" b="0" i="0">
+                <a:solidFill>
+                  <a:srgbClr val="828282"/>
+                </a:solidFill>
+                <a:latin typeface="Arial"/>
+              </a:rPr>
+              <a:t>この愛の中を歩んで</a:t>
+            </a:r>
+          </a:p>
+        </p:txBody>
+      </p:sp>
+      <p:sp>
+        <p:nvSpPr>
+          <p:cNvPr id="5" name="TextBox 4"/>
+          <p:cNvSpPr txBox="1"/>
+          <p:nvPr/>
+        </p:nvSpPr>
+        <p:spPr>
+          <a:xfrm>
+            <a:off x="640080" y="4494276"/>
+            <a:ext cx="10911535" cy="310896"/>
+          </a:xfrm>
+          <a:prstGeom prst="rect">
+            <a:avLst/>
+          </a:prstGeom>
+          <a:noFill/>
+        </p:spPr>
+        <p:txBody>
+          <a:bodyPr wrap="square">
+            <a:spAutoFit/>
+          </a:bodyPr>
+          <a:lstStyle/>
+          <a:p>
+            <a:pPr algn="ctr"/>
+            <a:r>
+              <a:rPr sz="2000" b="0" i="0">
+                <a:solidFill>
+                  <a:srgbClr val="828282"/>
+                </a:solidFill>
+                <a:latin typeface="Arial"/>
+              </a:rPr>
+              <a:t>イエスよ、血のゆえに感謝します</a:t>
+            </a:r>
+          </a:p>
+        </p:txBody>
+      </p:sp>
     </p:spTree>
   </p:cSld>
   <p:clrMapOvr>
@@ -4881,6 +5126,76 @@
           </a:p>
         </p:txBody>
       </p:sp>
+      <p:sp>
+        <p:nvSpPr>
+          <p:cNvPr id="4" name="TextBox 3"/>
+          <p:cNvSpPr txBox="1"/>
+          <p:nvPr/>
+        </p:nvSpPr>
+        <p:spPr>
+          <a:xfrm>
+            <a:off x="640080" y="4128516"/>
+            <a:ext cx="10911535" cy="310896"/>
+          </a:xfrm>
+          <a:prstGeom prst="rect">
+            <a:avLst/>
+          </a:prstGeom>
+          <a:noFill/>
+        </p:spPr>
+        <p:txBody>
+          <a:bodyPr wrap="square">
+            <a:spAutoFit/>
+          </a:bodyPr>
+          <a:lstStyle/>
+          <a:p>
+            <a:pPr algn="ctr"/>
+            <a:r>
+              <a:rPr sz="2000" b="0" i="0">
+                <a:solidFill>
+                  <a:srgbClr val="828282"/>
+                </a:solidFill>
+                <a:latin typeface="Arial"/>
+              </a:rPr>
+              <a:t>私は暗闇の中にいた</a:t>
+            </a:r>
+          </a:p>
+        </p:txBody>
+      </p:sp>
+      <p:sp>
+        <p:nvSpPr>
+          <p:cNvPr id="5" name="TextBox 4"/>
+          <p:cNvSpPr txBox="1"/>
+          <p:nvPr/>
+        </p:nvSpPr>
+        <p:spPr>
+          <a:xfrm>
+            <a:off x="640080" y="4494276"/>
+            <a:ext cx="10911535" cy="310896"/>
+          </a:xfrm>
+          <a:prstGeom prst="rect">
+            <a:avLst/>
+          </a:prstGeom>
+          <a:noFill/>
+        </p:spPr>
+        <p:txBody>
+          <a:bodyPr wrap="square">
+            <a:spAutoFit/>
+          </a:bodyPr>
+          <a:lstStyle/>
+          <a:p>
+            <a:pPr algn="ctr"/>
+            <a:r>
+              <a:rPr sz="2000" b="0" i="0">
+                <a:solidFill>
+                  <a:srgbClr val="828282"/>
+                </a:solidFill>
+                <a:latin typeface="Arial"/>
+              </a:rPr>
+              <a:t>私は盲目だった</a:t>
+            </a:r>
+          </a:p>
+        </p:txBody>
+      </p:sp>
     </p:spTree>
   </p:cSld>
   <p:clrMapOvr>
@@ -5309,6 +5624,76 @@
           </a:p>
         </p:txBody>
       </p:sp>
+      <p:sp>
+        <p:nvSpPr>
+          <p:cNvPr id="4" name="TextBox 3"/>
+          <p:cNvSpPr txBox="1"/>
+          <p:nvPr/>
+        </p:nvSpPr>
+        <p:spPr>
+          <a:xfrm>
+            <a:off x="640080" y="4128516"/>
+            <a:ext cx="10911535" cy="310896"/>
+          </a:xfrm>
+          <a:prstGeom prst="rect">
+            <a:avLst/>
+          </a:prstGeom>
+          <a:noFill/>
+        </p:spPr>
+        <p:txBody>
+          <a:bodyPr wrap="square">
+            <a:spAutoFit/>
+          </a:bodyPr>
+          <a:lstStyle/>
+          <a:p>
+            <a:pPr algn="ctr"/>
+            <a:r>
+              <a:rPr sz="2000" b="0" i="0">
+                <a:solidFill>
+                  <a:srgbClr val="828282"/>
+                </a:solidFill>
+                <a:latin typeface="Arial"/>
+              </a:rPr>
+              <a:t>喜びが私の心に来た</a:t>
+            </a:r>
+          </a:p>
+        </p:txBody>
+      </p:sp>
+      <p:sp>
+        <p:nvSpPr>
+          <p:cNvPr id="5" name="TextBox 4"/>
+          <p:cNvSpPr txBox="1"/>
+          <p:nvPr/>
+        </p:nvSpPr>
+        <p:spPr>
+          <a:xfrm>
+            <a:off x="640080" y="4494276"/>
+            <a:ext cx="10911535" cy="310896"/>
+          </a:xfrm>
+          <a:prstGeom prst="rect">
+            <a:avLst/>
+          </a:prstGeom>
+          <a:noFill/>
+        </p:spPr>
+        <p:txBody>
+          <a:bodyPr wrap="square">
+            <a:spAutoFit/>
+          </a:bodyPr>
+          <a:lstStyle/>
+          <a:p>
+            <a:pPr algn="ctr"/>
+            <a:r>
+              <a:rPr sz="2000" b="0" i="0">
+                <a:solidFill>
+                  <a:srgbClr val="828282"/>
+                </a:solidFill>
+                <a:latin typeface="Arial"/>
+              </a:rPr>
+              <a:t>何と自由を感じることか</a:t>
+            </a:r>
+          </a:p>
+        </p:txBody>
+      </p:sp>
     </p:spTree>
   </p:cSld>
   <p:clrMapOvr>
@@ -6681,6 +7066,76 @@
           </a:p>
         </p:txBody>
       </p:sp>
+      <p:sp>
+        <p:nvSpPr>
+          <p:cNvPr id="4" name="TextBox 3"/>
+          <p:cNvSpPr txBox="1"/>
+          <p:nvPr/>
+        </p:nvSpPr>
+        <p:spPr>
+          <a:xfrm>
+            <a:off x="640080" y="4128516"/>
+            <a:ext cx="10911535" cy="310896"/>
+          </a:xfrm>
+          <a:prstGeom prst="rect">
+            <a:avLst/>
+          </a:prstGeom>
+          <a:noFill/>
+        </p:spPr>
+        <p:txBody>
+          <a:bodyPr wrap="square">
+            <a:spAutoFit/>
+          </a:bodyPr>
+          <a:lstStyle/>
+          <a:p>
+            <a:pPr algn="ctr"/>
+            <a:r>
+              <a:rPr sz="2000" b="0" i="0">
+                <a:solidFill>
+                  <a:srgbClr val="828282"/>
+                </a:solidFill>
+                <a:latin typeface="Arial"/>
+              </a:rPr>
+              <a:t>この愛の中を歩んで</a:t>
+            </a:r>
+          </a:p>
+        </p:txBody>
+      </p:sp>
+      <p:sp>
+        <p:nvSpPr>
+          <p:cNvPr id="5" name="TextBox 4"/>
+          <p:cNvSpPr txBox="1"/>
+          <p:nvPr/>
+        </p:nvSpPr>
+        <p:spPr>
+          <a:xfrm>
+            <a:off x="640080" y="4494276"/>
+            <a:ext cx="10911535" cy="310896"/>
+          </a:xfrm>
+          <a:prstGeom prst="rect">
+            <a:avLst/>
+          </a:prstGeom>
+          <a:noFill/>
+        </p:spPr>
+        <p:txBody>
+          <a:bodyPr wrap="square">
+            <a:spAutoFit/>
+          </a:bodyPr>
+          <a:lstStyle/>
+          <a:p>
+            <a:pPr algn="ctr"/>
+            <a:r>
+              <a:rPr sz="2000" b="0" i="0">
+                <a:solidFill>
+                  <a:srgbClr val="828282"/>
+                </a:solidFill>
+                <a:latin typeface="Arial"/>
+              </a:rPr>
+              <a:t>イエスよ、血のゆえに感謝します</a:t>
+            </a:r>
+          </a:p>
+        </p:txBody>
+      </p:sp>
     </p:spTree>
   </p:cSld>
   <p:clrMapOvr>
@@ -6777,6 +7232,76 @@
           </a:p>
         </p:txBody>
       </p:sp>
+      <p:sp>
+        <p:nvSpPr>
+          <p:cNvPr id="4" name="TextBox 3"/>
+          <p:cNvSpPr txBox="1"/>
+          <p:nvPr/>
+        </p:nvSpPr>
+        <p:spPr>
+          <a:xfrm>
+            <a:off x="640080" y="4128516"/>
+            <a:ext cx="10911535" cy="310896"/>
+          </a:xfrm>
+          <a:prstGeom prst="rect">
+            <a:avLst/>
+          </a:prstGeom>
+          <a:noFill/>
+        </p:spPr>
+        <p:txBody>
+          <a:bodyPr wrap="square">
+            <a:spAutoFit/>
+          </a:bodyPr>
+          <a:lstStyle/>
+          <a:p>
+            <a:pPr algn="ctr"/>
+            <a:r>
+              <a:rPr sz="2000" b="0" i="0">
+                <a:solidFill>
+                  <a:srgbClr val="828282"/>
+                </a:solidFill>
+                <a:latin typeface="Arial"/>
+              </a:rPr>
+              <a:t>罪が私を引き離していた</a:t>
+            </a:r>
+          </a:p>
+        </p:txBody>
+      </p:sp>
+      <p:sp>
+        <p:nvSpPr>
+          <p:cNvPr id="5" name="TextBox 4"/>
+          <p:cNvSpPr txBox="1"/>
+          <p:nvPr/>
+        </p:nvSpPr>
+        <p:spPr>
+          <a:xfrm>
+            <a:off x="640080" y="4494276"/>
+            <a:ext cx="10911535" cy="310896"/>
+          </a:xfrm>
+          <a:prstGeom prst="rect">
+            <a:avLst/>
+          </a:prstGeom>
+          <a:noFill/>
+        </p:spPr>
+        <p:txBody>
+          <a:bodyPr wrap="square">
+            <a:spAutoFit/>
+          </a:bodyPr>
+          <a:lstStyle/>
+          <a:p>
+            <a:pPr algn="ctr"/>
+            <a:r>
+              <a:rPr sz="2000" b="0" i="0">
+                <a:solidFill>
+                  <a:srgbClr val="828282"/>
+                </a:solidFill>
+                <a:latin typeface="Arial"/>
+              </a:rPr>
+              <a:t>深い淵があった</a:t>
+            </a:r>
+          </a:p>
+        </p:txBody>
+      </p:sp>
     </p:spTree>
   </p:cSld>
   <p:clrMapOvr>
@@ -6873,6 +7398,76 @@
           </a:p>
         </p:txBody>
       </p:sp>
+      <p:sp>
+        <p:nvSpPr>
+          <p:cNvPr id="4" name="TextBox 3"/>
+          <p:cNvSpPr txBox="1"/>
+          <p:nvPr/>
+        </p:nvSpPr>
+        <p:spPr>
+          <a:xfrm>
+            <a:off x="640080" y="4128516"/>
+            <a:ext cx="10911535" cy="310896"/>
+          </a:xfrm>
+          <a:prstGeom prst="rect">
+            <a:avLst/>
+          </a:prstGeom>
+          <a:noFill/>
+        </p:spPr>
+        <p:txBody>
+          <a:bodyPr wrap="square">
+            <a:spAutoFit/>
+          </a:bodyPr>
+          <a:lstStyle/>
+          <a:p>
+            <a:pPr algn="ctr"/>
+            <a:r>
+              <a:rPr sz="2000" b="0" i="0">
+                <a:solidFill>
+                  <a:srgbClr val="828282"/>
+                </a:solidFill>
+                <a:latin typeface="Arial"/>
+              </a:rPr>
+              <a:t>この愛の中を歩んで</a:t>
+            </a:r>
+          </a:p>
+        </p:txBody>
+      </p:sp>
+      <p:sp>
+        <p:nvSpPr>
+          <p:cNvPr id="5" name="TextBox 4"/>
+          <p:cNvSpPr txBox="1"/>
+          <p:nvPr/>
+        </p:nvSpPr>
+        <p:spPr>
+          <a:xfrm>
+            <a:off x="640080" y="4494276"/>
+            <a:ext cx="10911535" cy="310896"/>
+          </a:xfrm>
+          <a:prstGeom prst="rect">
+            <a:avLst/>
+          </a:prstGeom>
+          <a:noFill/>
+        </p:spPr>
+        <p:txBody>
+          <a:bodyPr wrap="square">
+            <a:spAutoFit/>
+          </a:bodyPr>
+          <a:lstStyle/>
+          <a:p>
+            <a:pPr algn="ctr"/>
+            <a:r>
+              <a:rPr sz="2000" b="0" i="0">
+                <a:solidFill>
+                  <a:srgbClr val="828282"/>
+                </a:solidFill>
+                <a:latin typeface="Arial"/>
+              </a:rPr>
+              <a:t>イエスよ、血のゆえに感謝します</a:t>
+            </a:r>
+          </a:p>
+        </p:txBody>
+      </p:sp>
     </p:spTree>
   </p:cSld>
   <p:clrMapOvr>
@@ -7773,6 +8368,76 @@
           </a:p>
         </p:txBody>
       </p:sp>
+      <p:sp>
+        <p:nvSpPr>
+          <p:cNvPr id="4" name="TextBox 3"/>
+          <p:cNvSpPr txBox="1"/>
+          <p:nvPr/>
+        </p:nvSpPr>
+        <p:spPr>
+          <a:xfrm>
+            <a:off x="640080" y="4128516"/>
+            <a:ext cx="10911535" cy="310896"/>
+          </a:xfrm>
+          <a:prstGeom prst="rect">
+            <a:avLst/>
+          </a:prstGeom>
+          <a:noFill/>
+        </p:spPr>
+        <p:txBody>
+          <a:bodyPr wrap="square">
+            <a:spAutoFit/>
+          </a:bodyPr>
+          <a:lstStyle/>
+          <a:p>
+            <a:pPr algn="ctr"/>
+            <a:r>
+              <a:rPr sz="2000" b="0" i="0">
+                <a:solidFill>
+                  <a:srgbClr val="828282"/>
+                </a:solidFill>
+                <a:latin typeface="Arial"/>
+              </a:rPr>
+              <a:t>この愛の中を歩んで</a:t>
+            </a:r>
+          </a:p>
+        </p:txBody>
+      </p:sp>
+      <p:sp>
+        <p:nvSpPr>
+          <p:cNvPr id="5" name="TextBox 4"/>
+          <p:cNvSpPr txBox="1"/>
+          <p:nvPr/>
+        </p:nvSpPr>
+        <p:spPr>
+          <a:xfrm>
+            <a:off x="640080" y="4494276"/>
+            <a:ext cx="10911535" cy="310896"/>
+          </a:xfrm>
+          <a:prstGeom prst="rect">
+            <a:avLst/>
+          </a:prstGeom>
+          <a:noFill/>
+        </p:spPr>
+        <p:txBody>
+          <a:bodyPr wrap="square">
+            <a:spAutoFit/>
+          </a:bodyPr>
+          <a:lstStyle/>
+          <a:p>
+            <a:pPr algn="ctr"/>
+            <a:r>
+              <a:rPr sz="2000" b="0" i="0">
+                <a:solidFill>
+                  <a:srgbClr val="828282"/>
+                </a:solidFill>
+                <a:latin typeface="Arial"/>
+              </a:rPr>
+              <a:t>イエスよ、血のゆえに感謝します</a:t>
+            </a:r>
+          </a:p>
+        </p:txBody>
+      </p:sp>
     </p:spTree>
   </p:cSld>
   <p:clrMapOvr>
@@ -7865,6 +8530,76 @@
                 <a:latin typeface="Arial"/>
               </a:rPr>
               <a:t>Obrigado, Jesus, pelo sangue</a:t>
+            </a:r>
+          </a:p>
+        </p:txBody>
+      </p:sp>
+      <p:sp>
+        <p:nvSpPr>
+          <p:cNvPr id="4" name="TextBox 3"/>
+          <p:cNvSpPr txBox="1"/>
+          <p:nvPr/>
+        </p:nvSpPr>
+        <p:spPr>
+          <a:xfrm>
+            <a:off x="640080" y="4128516"/>
+            <a:ext cx="10911535" cy="310896"/>
+          </a:xfrm>
+          <a:prstGeom prst="rect">
+            <a:avLst/>
+          </a:prstGeom>
+          <a:noFill/>
+        </p:spPr>
+        <p:txBody>
+          <a:bodyPr wrap="square">
+            <a:spAutoFit/>
+          </a:bodyPr>
+          <a:lstStyle/>
+          <a:p>
+            <a:pPr algn="ctr"/>
+            <a:r>
+              <a:rPr sz="2000" b="0" i="0">
+                <a:solidFill>
+                  <a:srgbClr val="828282"/>
+                </a:solidFill>
+                <a:latin typeface="Arial"/>
+              </a:rPr>
+              <a:t>この愛の中を歩んで</a:t>
+            </a:r>
+          </a:p>
+        </p:txBody>
+      </p:sp>
+      <p:sp>
+        <p:nvSpPr>
+          <p:cNvPr id="5" name="TextBox 4"/>
+          <p:cNvSpPr txBox="1"/>
+          <p:nvPr/>
+        </p:nvSpPr>
+        <p:spPr>
+          <a:xfrm>
+            <a:off x="640080" y="4494276"/>
+            <a:ext cx="10911535" cy="310896"/>
+          </a:xfrm>
+          <a:prstGeom prst="rect">
+            <a:avLst/>
+          </a:prstGeom>
+          <a:noFill/>
+        </p:spPr>
+        <p:txBody>
+          <a:bodyPr wrap="square">
+            <a:spAutoFit/>
+          </a:bodyPr>
+          <a:lstStyle/>
+          <a:p>
+            <a:pPr algn="ctr"/>
+            <a:r>
+              <a:rPr sz="2000" b="0" i="0">
+                <a:solidFill>
+                  <a:srgbClr val="828282"/>
+                </a:solidFill>
+                <a:latin typeface="Arial"/>
+              </a:rPr>
+              <a:t>イエスよ、血のゆえに感謝します</a:t>
             </a:r>
           </a:p>
         </p:txBody>
